--- a/docs/final/RUDP_Presentation_with_notes.pptx
+++ b/docs/final/RUDP_Presentation_with_notes.pptx
@@ -42,9 +42,10 @@
     <p:sldId id="290" r:id="rId36"/>
     <p:sldId id="291" r:id="rId37"/>
     <p:sldId id="292" r:id="rId38"/>
+    <p:sldId id="293" r:id="rId39"/>
   </p:sldIdLst>
   <p:notesMasterIdLst>
-    <p:notesMasterId r:id="rId39"/>
+    <p:notesMasterId r:id="rId40"/>
   </p:notesMasterIdLst>
   <p:sldSz cx="12192000" cy="6858000"/>
   <p:notesSz cx="6858000" cy="12192000"/>
@@ -838,12 +839,18 @@
           <a:lstStyle/>
           <a:p>
             <a:r>
-              <a:t>Good morning ma'am. We are Harshavardhan, Rohit and Shloak.</a:t>
+              <a:t>[0:20] Good morning ma'am. We are Harshavardhan, Rohit and Shloak.</a:t>
             </a:r>
           </a:p>
           <a:p>
             <a:r>
               <a:t>Our project is Smart-RUDP: a reliable transport protocol we built in C on top of UDP, plus a controller that learns how fast to send.</a:t>
+            </a:r>
+          </a:p>
+          <a:p/>
+          <a:p>
+            <a:r>
+              <a:t>If asked: Say the three names and the GitHub link once, then move on.</a:t>
             </a:r>
           </a:p>
         </p:txBody>
@@ -929,12 +936,18 @@
           <a:lstStyle/>
           <a:p>
             <a:r>
-              <a:t>62 of 62 packets were delivered at every loss level from 0 to 40 percent.</a:t>
+              <a:t>[0:40] 62 of 62 packets were delivered at every loss level from 0 to 40 percent.</a:t>
             </a:r>
           </a:p>
           <a:p>
             <a:r>
               <a:t>Higher loss costs time and retransmissions, never correctness.</a:t>
+            </a:r>
+          </a:p>
+          <a:p/>
+          <a:p>
+            <a:r>
+              <a:t>If asked: Q: Single runs? A: Yes, the original benchmark ran each level once. Smart-RUDP evaluation uses 6 runs per scenario.</a:t>
             </a:r>
           </a:p>
         </p:txBody>
@@ -1020,7 +1033,7 @@
           <a:lstStyle/>
           <a:p>
             <a:r>
-              <a:t>Server stuck after a killed client: it hung 15.5 s; fix was to accept SYN in any state.</a:t>
+              <a:t>[0:40] Server stuck after a killed client: it hung 15.5 s; fix was to accept SYN in any state.</a:t>
             </a:r>
           </a:p>
           <a:p>
@@ -1036,6 +1049,12 @@
           <a:p>
             <a:r>
               <a:t>Benchmark script portability: replaced date and grep tricks with awk and sed.</a:t>
+            </a:r>
+          </a:p>
+          <a:p/>
+          <a:p>
+            <a:r>
+              <a:t>If asked: Say these quickly: it shows real debugging, which is what separates a project from a lab.</a:t>
             </a:r>
           </a:p>
         </p:txBody>
@@ -1121,7 +1140,7 @@
           <a:lstStyle/>
           <a:p>
             <a:r>
-              <a:t>Jacobson and Karels 1988 is the origin of AIMD; Chiu and Jain 1989 explains why it converges fairly.</a:t>
+              <a:t>[0:30] Jacobson and Karels 1988 is the origin of AIMD; Chiu and Jain 1989 explains why it converges fairly.</a:t>
             </a:r>
           </a:p>
           <a:p>
@@ -1137,6 +1156,12 @@
           <a:p>
             <a:r>
               <a:t>Key researcher: Van Jacobson.</a:t>
+            </a:r>
+          </a:p>
+          <a:p/>
+          <a:p>
+            <a:r>
+              <a:t>If asked: Q: Why AIMD? A: Chiu and Jain show it converges to a fair share. Q: Are those papers deep RL and yours is not? A: Yes; we used a lookup table, which is simpler and inspectable.</a:t>
             </a:r>
           </a:p>
         </p:txBody>
@@ -1222,7 +1247,7 @@
           <a:lstStyle/>
           <a:p>
             <a:r>
-              <a:t>Four routers, OSPF area 0: R1, R2, R3 form a triangle and R4 is a branch.</a:t>
+              <a:t>[0:50] Four routers, OSPF area 0: R1, R2, R3 form a triangle and R4 is a branch.</a:t>
             </a:r>
           </a:p>
           <a:p>
@@ -1233,6 +1258,12 @@
           <a:p>
             <a:r>
               <a:t>Server LAN is metric 2 via R3; branch is metric 3 via R2. Failover: shutting R1 Gi0/2 still gave 70 of 71 pings, rerouted via R2.</a:t>
+            </a:r>
+          </a:p>
+          <a:p/>
+          <a:p>
+            <a:r>
+              <a:t>If asked: Q: Does RUDP run inside Packet Tracer? A: No, it cannot run C. Packet Tracer validates the network design; protocol is validated on one machine plus Wireshark.</a:t>
             </a:r>
           </a:p>
         </p:txBody>
@@ -1318,7 +1349,13 @@
           <a:lstStyle/>
           <a:p>
             <a:r>
-              <a:t>Left: OSPF routes on R1 with the metrics. Middle: the link-failure test, 70 of 71 pings. Right: the ACL, where the student gets destination unreachable to staff but the server is still reachable (TTL 126).</a:t>
+              <a:t>[0:40] Left: OSPF routes on R1 with the metrics. Middle: the link-failure test, 70 of 71 pings. Right: the ACL, where the student gets destination unreachable to staff but the server is still reachable (TTL 126).</a:t>
+            </a:r>
+          </a:p>
+          <a:p/>
+          <a:p>
+            <a:r>
+              <a:t>If asked: If asked to show it live: have the .pkt file open and follow Demo_Steps.txt.</a:t>
             </a:r>
           </a:p>
         </p:txBody>
@@ -1404,7 +1441,7 @@
           <a:lstStyle/>
           <a:p>
             <a:r>
-              <a:t>Q-learning with 80 states (RTT ratio, loss fraction, window size), sampled once per RTT.</a:t>
+              <a:t>[0:50] Q-learning with 80 states (RTT ratio, loss fraction, window size), sampled once per RTT.</a:t>
             </a:r>
           </a:p>
           <a:p>
@@ -1415,6 +1452,12 @@
           <a:p>
             <a:r>
               <a:t>Reward: throughput gained, minus delay growth, minus retransmissions. Same Go-Back-N reliability; only the window policy changes. Paths are emulated in the program: 5G-like, lossy wireless, satellite-like.</a:t>
+            </a:r>
+          </a:p>
+          <a:p/>
+          <a:p>
+            <a:r>
+              <a:t>If asked: Q: Is it really learning? A: Yes, 40 training episodes; the learning-curve figure shows it. It is small and tabular with limited training.</a:t>
             </a:r>
           </a:p>
         </p:txBody>
@@ -1500,7 +1543,7 @@
           <a:lstStyle/>
           <a:p>
             <a:r>
-              <a:t>This is the agent itself. Left: rl_cc.h, 73 lines of C. The state is 80 buckets of RTT ratio, loss and window size.</a:t>
+              <a:t>[1:00] This is the agent itself. Left: rl_cc.h, 73 lines of C. The state is 80 buckets of RTT ratio, loss and window size.</a:t>
             </a:r>
           </a:p>
           <a:p>
@@ -1526,6 +1569,12 @@
           <a:p>
             <a:r>
               <a:t>We also built a deep version: web/dqn.py is a small neural network, two hidden layers of 32, trained with DQN in the same simulator. It reads continuous inputs instead of buckets.</a:t>
+            </a:r>
+          </a:p>
+          <a:p/>
+          <a:p>
+            <a:r>
+              <a:t>If asked: Q: Is this deep RL? A: The C agent is tabular. The chat also has a deep agent, a small DQN in numpy (5-32-32-5). Q: Does deep beat the table? A: Modestly: 3.20 s vs 3.73 s mean on 48 unseen paths, faster on 19, slower on 6. Q: Any problem? A: Training is seed-sensitive: 1 of 4 seeds failed, so we select on validation paths. It is simulated and not in the C code. Q: Where is it trained? A: web/train.py for the chat, the smart client trains online for the main experiments; table in results/q_chat.txt.</a:t>
             </a:r>
           </a:p>
         </p:txBody>
@@ -1611,7 +1660,7 @@
           <a:lstStyle/>
           <a:p>
             <a:r>
-              <a:t>Be honest: it did not beat AIMD. Plus 63 percent time on 5G-like, plus 10 percent on satellite, a tie on the lossy path.</a:t>
+              <a:t>[0:50] Be honest: it did not beat AIMD. Plus 63 percent time on 5G-like, plus 10 percent on satellite, a tie on the lossy path.</a:t>
             </a:r>
           </a:p>
           <a:p>
@@ -1627,6 +1676,12 @@
           <a:p>
             <a:r>
               <a:t>In the chat, retrained for bursty random-loss traffic, it does beat AIMD on most simulated paths; mention that on slide 19.</a:t>
+            </a:r>
+          </a:p>
+          <a:p/>
+          <a:p>
+            <a:r>
+              <a:t>If asked: Q: Then what was the point? A: The experiment. We tested whether a learned window helps and report the answer, including the negative result.</a:t>
             </a:r>
           </a:p>
         </p:txBody>
@@ -1712,7 +1767,7 @@
           <a:lstStyle/>
           <a:p>
             <a:r>
-              <a:t>We wrote a Lua dissector, named smartrudp, that decodes sequence, ack, flags, checksum and length.</a:t>
+              <a:t>[0:40] We wrote a Lua dissector, named smartrudp, that decodes sequence, ack, flags, checksum and length.</a:t>
             </a:r>
           </a:p>
           <a:p>
@@ -1728,6 +1783,12 @@
           <a:p>
             <a:r>
               <a:t>The program's exported trace uses topology addresses and has no handshake.</a:t>
+            </a:r>
+          </a:p>
+          <a:p/>
+          <a:p>
+            <a:r>
+              <a:t>If asked: Q: Why no handshake in the export? A: The export builds synthetic packets. The real tshark capture on the next slide shows the handshake.</a:t>
             </a:r>
           </a:p>
         </p:txBody>
@@ -1813,12 +1874,18 @@
           <a:lstStyle/>
           <a:p>
             <a:r>
-              <a:t>Left: the first three packets, SYN, SYN-ACK and ACK, decoded by our dissector (filter frame.number &lt;= 3).</a:t>
+              <a:t>[0:50] Left: the first three packets, SYN, SYN-ACK and ACK, decoded by our dissector (filter frame.number &lt;= 3).</a:t>
             </a:r>
           </a:p>
           <a:p>
             <a:r>
               <a:t>Right: filter smartrudp.seq == N shows the same segment twice, a retransmission.</a:t>
+            </a:r>
+          </a:p>
+          <a:p/>
+          <a:p>
+            <a:r>
+              <a:t>If asked: If Wireshark is open live: Analyze, Decode As, UDP 8888 = RUDP, then use these two filters.</a:t>
             </a:r>
           </a:p>
         </p:txBody>
@@ -1904,7 +1971,7 @@
           <a:lstStyle/>
           <a:p>
             <a:r>
-              <a:t>UDP is fast but gives no guarantees: packets can be lost, duplicated or reordered.</a:t>
+              <a:t>[0:40] UDP is fast but gives no guarantees: packets can be lost, duplicated or reordered.</a:t>
             </a:r>
           </a:p>
           <a:p>
@@ -1920,6 +1987,12 @@
           <a:p>
             <a:r>
               <a:t>Our question: can we rebuild TCP's core ideas ourselves, on UDP?</a:t>
+            </a:r>
+          </a:p>
+          <a:p/>
+          <a:p>
+            <a:r>
+              <a:t>If asked: Q: Why not just use TCP? A: TCP cannot be changed or inspected; building our own makes every mechanism visible. QUIC and HTTP/3 do the same in practice.</a:t>
             </a:r>
           </a:p>
         </p:txBody>
@@ -2005,7 +2078,7 @@
           <a:lstStyle/>
           <a:p>
             <a:r>
-              <a:t>The protocol in use: each message is one numbered, checksummed RUDP segment, ACKed in order.</a:t>
+              <a:t>[1:00] The protocol in use: each message is one numbered, checksummed RUDP segment, ACKed in order.</a:t>
             </a:r>
           </a:p>
           <a:p>
@@ -2021,6 +2094,12 @@
           <a:p>
             <a:r>
               <a:t>There is a controller switch: fixed window, AIMD, or Smart-RUDP. For the chat we retrained Smart-RUDP on simulated paths: it was faster than AIMD on 5 of 6 held-out paths and equal on 1, because AIMD resets to one packet on random loss. Say it is simulated, and that the agent may not shrink the window without a congestion signal. Stress test: 48 random paths the agent never trained on, 3 seeds each. Mean delivery time was 3.73 seconds for Smart-RUDP against 7.16 for AIMD. Smart-RUDP was faster on 27 paths, slower on 5, within 5 percent on 16. So on our data, in simulation, it beats AIMD in the chat setting. There is also a deep neural-network option in the controller dropdown; it gave 3.20 seconds mean on the stress paths against 3.73 for the table.</a:t>
+            </a:r>
+          </a:p>
+          <a:p/>
+          <a:p>
+            <a:r>
+              <a:t>If asked: Q: Is that a fair win? A: Both start from the same window of 10; held-out paths and seeds; honest limits: simulated, and without the no-shrink rule the agent lost. Q: Did it win in Section 8? A: No, that result stands. Q: Where does it lose? A: Tight bottleneck queues and very high loss; the fixed window of 8 is hard to beat there. A broader-trained agent did worse, so we kept the first.</a:t>
             </a:r>
           </a:p>
         </p:txBody>
@@ -2106,7 +2185,7 @@
           <a:lstStyle/>
           <a:p>
             <a:r>
-              <a:t>The abstract also promised TCP and plain UDP baselines, so we ran them on the same 48 unseen simulated paths.</a:t>
+              <a:t>[1:00] The abstract also promised TCP and plain UDP baselines, so we ran them on the same 48 unseen simulated paths.</a:t>
             </a:r>
           </a:p>
           <a:p>
@@ -2137,6 +2216,12 @@
           <a:p>
             <a:r>
               <a:t>Be upfront: our simulator originally allowed a duplicate-ACK retransmission storm that flatters aggressive controllers. With the realistic rule the neural agent is about level with AIMD in simulation (7.27 s against 7.75 s). The C results are the evidence we rely on.</a:t>
+            </a:r>
+          </a:p>
+          <a:p/>
+          <a:p>
+            <a:r>
+              <a:t>If asked: Q: Is the TCP row real TCP? A: No, it is a model with the same window cap; real kernel TCP needs netem on Linux, and we provide the script. Q: Why did you not implement SACK in C? A: Time; the simulation shows it is the biggest win and it is the first item of future work. Q: Is 20 runs enough? A: The intervals exclude zero for 5G and satellite and include zero for lossy. Did you check it is not a simulator artefact? Yes: with the realistic rule the simulated gain mostly disappears, so we lean on the C results, which use that rule and equal window caps.</a:t>
             </a:r>
           </a:p>
         </p:txBody>
@@ -2222,7 +2307,7 @@
           <a:lstStyle/>
           <a:p>
             <a:r>
-              <a:t>We then put the neural agent into the C transport, the same code as Section 8, and tested it on the same three emulated paths with 15 runs each.</a:t>
+              <a:t>[1:00] We then put the neural agent into the C transport, the same code as Section 8, and tested it on the same three emulated paths with 15 runs each.</a:t>
             </a:r>
           </a:p>
           <a:p>
@@ -2243,6 +2328,12 @@
           <a:p>
             <a:r>
               <a:t>We also reran it with AIMD capped at 32 like the agent: the neural agent still wins by 19, 29 and 28 percent, all significant.</a:t>
+            </a:r>
+          </a:p>
+          <a:p/>
+          <a:p>
+            <a:r>
+              <a:t>If asked: Q: So Smart-RUDP now beats AIMD? A: The neural version does, in the C transport on emulated paths, trained in a simulator; the original table agent in Section 8 did not. Q: Is it fair? A: Same start window; AIMD keeps a cap of 128 while the agents are capped at 32; the agent retransmits more on random loss. Q: Why no gain from SACK? A: Those paths are limited by the bottleneck rate, so extra retransmissions cost little; the simulator, with different paths, showed a large gain.</a:t>
             </a:r>
           </a:p>
         </p:txBody>
@@ -2328,7 +2419,7 @@
           <a:lstStyle/>
           <a:p>
             <a:r>
-              <a:t>We also tested two things people ask about. Fairness: two flows through one bottleneck. The neural agent is fair against itself and on short paths, but takes 74 percent against AIMD on the long 120 ms path, about like a fixed window.</a:t>
+              <a:t>[0:50] We also tested two things people ask about. Fairness: two flows through one bottleneck. The neural agent is fair against itself and on short paths, but takes 74 percent against AIMD on the long 120 ms path, about like a fixed window.</a:t>
             </a:r>
           </a:p>
           <a:p>
@@ -2344,6 +2435,12 @@
           <a:p>
             <a:r>
               <a:t>While building the dashboard we found a retransmission storm in the web gateway and fixed it; there is also an adaptive timeout option now.</a:t>
+            </a:r>
+          </a:p>
+          <a:p/>
+          <a:p>
+            <a:r>
+              <a:t>If asked: Is the agent fair? Mostly, but not on the long path against AIMD (74% share, Jain 0.82). Fairness was only tested in the simulator, not in C.</a:t>
             </a:r>
           </a:p>
         </p:txBody>
@@ -2429,7 +2526,7 @@
           <a:lstStyle/>
           <a:p>
             <a:r>
-              <a:t>While checking our own result we found where the neural agent fails: on a hostile path with 10 percent loss it needed about 85 seconds where AIMD needed 11.</a:t>
+              <a:t>[0:50] While checking our own result we found where the neural agent fails: on a hostile path with 10 percent loss it needed about 85 seconds where AIMD needed 11.</a:t>
             </a:r>
           </a:p>
           <a:p>
@@ -2445,6 +2542,12 @@
           <a:p>
             <a:r>
               <a:t>We also tried cutting the window on every timeout; it fixed the hostile case but made the 2 percent path much worse, so we dropped it. So the learned agent is useful on clean to moderate paths and needs a classical safety net elsewhere.</a:t>
+            </a:r>
+          </a:p>
+          <a:p/>
+          <a:p>
+            <a:r>
+              <a:t>If asked: Is the hybrid still 'AI'? Yes on clean and moderate paths, where the neural network decides; on heavy loss it deliberately defers to AIMD. It is a rule we added, not something the network learned.</a:t>
             </a:r>
           </a:p>
         </p:txBody>
@@ -2530,7 +2633,7 @@
           <a:lstStyle/>
           <a:p>
             <a:r>
-              <a:t>We swapped Go-Back-N for Selective Repeat as the default. The receiver now keeps out-of-order packets and tells the sender exactly which ones it holds in a bitmap inside every ACK; the sender has one timer per packet and resends only what is missing.</a:t>
+              <a:t>[0:50] We swapped Go-Back-N for Selective Repeat as the default. The receiver now keeps out-of-order packets and tells the sender exactly which ones it holds in a bitmap inside every ACK; the sender has one timer per packet and resends only what is missing.</a:t>
             </a:r>
           </a:p>
           <a:p>
@@ -2546,6 +2649,12 @@
           <a:p>
             <a:r>
               <a:t>Go-Back-N is still in the code behind a flag, and the earlier tables in the report were measured with it and are labelled that way.</a:t>
+            </a:r>
+          </a:p>
+          <a:p/>
+          <a:p>
+            <a:r>
+              <a:t>If asked: Is it textbook Selective Repeat? Nearly: per-packet timers and a buffering receiver, but we use a cumulative ACK plus a 64-bit bitmap instead of one ACK per packet, and the window is capped at 60.</a:t>
             </a:r>
           </a:p>
         </p:txBody>
@@ -2631,7 +2740,7 @@
           <a:lstStyle/>
           <a:p>
             <a:r>
-              <a:t>This is the final comparison. Everything runs in the C transport with Selective Repeat, a real clock and a real server process. We compare four policies: the original AIMD with a window cap of 32, AIMD tuned with a cap of 128, tuned CUBIC, and the neural agent with its final settings.</a:t>
+              <a:t>[1:00] This is the final comparison. Everything runs in the C transport with Selective Repeat, a real clock and a real server process. We compare four policies: the original AIMD with a window cap of 32, AIMD tuned with a cap of 128, tuned CUBIC, and the neural agent with its final settings.</a:t>
             </a:r>
           </a:p>
           <a:p>
@@ -2642,6 +2751,12 @@
           <a:p>
             <a:r>
               <a:t>One correction we want to be upfront about: earlier we reported bigger margins and 262 retransmissions on the fast path. That came from a timer that fired too early. Fixing it helped AIMD even more than the agent, so these numbers are the honest ones.</a:t>
+            </a:r>
+          </a:p>
+          <a:p/>
+          <a:p>
+            <a:r>
+              <a:t>If asked: Why did the margin shrink? A retransmission timer defect was hurting AIMD more than the agent. We found it by tracing the retransmissions, fixed it for every policy, and re-ran everything. Without the fix AIMD is 41 percent slower on random paths.</a:t>
             </a:r>
           </a:p>
         </p:txBody>
@@ -2727,7 +2842,7 @@
           <a:lstStyle/>
           <a:p>
             <a:r>
-              <a:t>The emulator is inside our client, so we also tested through a separate impairment process on real UDP sockets. That found three real defects.</a:t>
+              <a:t>[0:50] The emulator is inside our client, so we also tested through a separate impairment process on real UDP sockets. That found three real defects.</a:t>
             </a:r>
           </a:p>
           <a:p>
@@ -2738,6 +2853,12 @@
           <a:p>
             <a:r>
               <a:t>On real sockets the neural agent is again fastest on every path: 17, 53, 45 and 39 percent faster than tuned AIMD on 5G, lossy, satellite and fast, and a tie on the hostile path.</a:t>
+            </a:r>
+          </a:p>
+          <a:p/>
+          <a:p>
+            <a:r>
+              <a:t>If asked: Is this a real network? It is real UDP sockets on one machine, with the impairment applied by a separate process. It is not a kernel netem or a multi-machine path; we provide the script for that but had no root access.</a:t>
             </a:r>
           </a:p>
         </p:txBody>
@@ -2823,7 +2944,7 @@
           <a:lstStyle/>
           <a:p>
             <a:r>
-              <a:t>Our old simulator was in Python and never matched the C code exactly. So we added a virtual-time mode to the C sender itself: same code, simulated receiver and clock, about a thousand times faster. It reproduces the real-clock results in all 15 calibration cells.</a:t>
+              <a:t>[1:00] Our old simulator was in Python and never matched the C code exactly. So we added a virtual-time mode to the C sender itself: same code, simulated receiver and clock, about a thousand times faster. It reproduces the real-clock results in all 15 calibration cells.</a:t>
             </a:r>
           </a:p>
           <a:p>
@@ -2834,6 +2955,12 @@
           <a:p>
             <a:r>
               <a:t>The ablation shows which parts matter: the window cap of 128 most, then pacing, the timer floor and slow start. We also tried evolution-strategy retraining directly in the C sender and it only gave 2 percent, so we did not adopt it.</a:t>
+            </a:r>
+          </a:p>
+          <a:p/>
+          <a:p>
+            <a:r>
+              <a:t>If asked: Is the test set separate from tuning? Yes. Slow-start and hand-over settings were chosen on a different set of random paths; the 100 test paths were used only for the reported numbers.</a:t>
             </a:r>
           </a:p>
         </p:txBody>
@@ -2919,7 +3046,7 @@
           <a:lstStyle/>
           <a:p>
             <a:r>
-              <a:t>Fairness on real sockets: two neural flows split the link evenly, and so do two AIMD flows. But against tuned AIMD the neural agent takes 68 percent of the link, and 76 percent against the original AIMD. CUBIC takes 61 percent. So the agent is a more aggressive neighbour. Nothing starves, but it is not polite, and we did not test coexistence with TCP. That is our main limitation.</a:t>
+              <a:t>[0:50] Fairness on real sockets: two neural flows split the link evenly, and so do two AIMD flows. But against tuned AIMD the neural agent takes 68 percent of the link, and 76 percent against the original AIMD. CUBIC takes 61 percent. So the agent is a more aggressive neighbour. Nothing starves, but it is not polite, and we did not test coexistence with TCP. That is our main limitation.</a:t>
             </a:r>
           </a:p>
           <a:p>
@@ -2930,6 +3057,12 @@
           <a:p>
             <a:r>
               <a:t>The chat and web gateway now use the same window and bitmap as the C transport, and there is CI, fuzzing and an architecture document.</a:t>
+            </a:r>
+          </a:p>
+          <a:p/>
+          <a:p>
+            <a:r>
+              <a:t>If asked: Would this be safe to deploy? Not on a shared link yet: it needs fairness-aware training and TCP coexistence tests. For a dedicated path it is a clear win.</a:t>
             </a:r>
           </a:p>
         </p:txBody>
@@ -3015,7 +3148,7 @@
           <a:lstStyle/>
           <a:p>
             <a:r>
-              <a:t>The need: campus users send data to a server across a routed network. TCP is fixed in the kernel; UDP gives no guarantees.</a:t>
+              <a:t>[0:50] The need: campus users send data to a server across a routed network. TCP is fixed in the kernel; UDP gives no guarantees.</a:t>
             </a:r>
           </a:p>
           <a:p>
@@ -3026,6 +3159,12 @@
           <a:p>
             <a:r>
               <a:t>Scenario: a student on VLAN 10 uploads to the server LAN. The ACL keeps students out of staff VLAN 20. If a core link fails, OSPF reroutes through R2: longer path, higher RTT, and the transport must adapt.</a:t>
+            </a:r>
+          </a:p>
+          <a:p/>
+          <a:p>
+            <a:r>
+              <a:t>If asked: Q: Is this just a lab exercise? A: A lab sends datagrams. We built reliability and congestion control on top, measured them, and used them in an application.</a:t>
             </a:r>
           </a:p>
         </p:txBody>
@@ -3111,7 +3250,13 @@
           <a:lstStyle/>
           <a:p>
             <a:r>
-              <a:t>This is the congestion window on the lossy path, same seed for both. AIMD, in grey, climbs one packet per round trip and halves on every loss, so it never gets above about 15 packets and takes nine seconds. The neural agent, in green, runs much higher, backs off when it sees loss or queueing delay, and finishes in four seconds. The figure comes from our virtual-time sender and can be regenerated with make figures.</a:t>
+              <a:t>[0:40] This is the congestion window on the lossy path, same seed for both. AIMD, in grey, climbs one packet per round trip and halves on every loss, so it never gets above about 15 packets and takes nine seconds. The neural agent, in green, runs much higher, backs off when it sees loss or queueing delay, and finishes in four seconds. The figure comes from our virtual-time sender and can be regenerated with make figures.</a:t>
+            </a:r>
+          </a:p>
+          <a:p/>
+          <a:p>
+            <a:r>
+              <a:t>If asked: Why does the agent's window jump around so much? It picks one of five multipliers about once per round trip, so it moves in steps; that is the cost of a learned policy with a coarse action set.</a:t>
             </a:r>
           </a:p>
         </p:txBody>
@@ -3197,12 +3342,18 @@
           <a:lstStyle/>
           <a:p>
             <a:r>
-              <a:t>We worked on the weaknesses we had listed. For fairness we added an optional polite mode: when a standing queue builds, the agent backs off. Over 8 runs against tuned AIMD it takes 52 percent of the link instead of 70, and the Jain index rises from 0.86 to 0.94. The price is speed: on 100 random paths the average time goes from 0.53 to 0.58 times AIMD's, and the worst path is 2.95 times slower, so it stays off by default.</a:t>
+              <a:t>[0:50] We worked on the weaknesses we had listed. For fairness we added an optional polite mode: when a standing queue builds, the agent backs off. Over 8 runs against tuned AIMD it takes 52 percent of the link instead of 70, and the Jain index rises from 0.86 to 0.94. The price is speed: on 100 random paths the average time goes from 0.53 to 0.58 times AIMD's, and the worst path is 2.95 times slower, so it stays off by default.</a:t>
             </a:r>
           </a:p>
           <a:p>
             <a:r>
               <a:t>We also added bursty cross traffic to the test proxy. Here the result is less flattering: the agent is 15 percent faster than tuned AIMD, but level with CUBIC, and it retransmits about three times as often as AIMD. Three tweaks did not fix that, so we report it as a limit. Finally the server now handles up to 16 clients, checked by sending two files at once.</a:t>
+            </a:r>
+          </a:p>
+          <a:p/>
+          <a:p>
+            <a:r>
+              <a:t>If asked: Is polite mode learned? No. It is a hand-made rule on the delay signal. A learned version needs a two-flow training environment, which is future work.</a:t>
             </a:r>
           </a:p>
         </p:txBody>
@@ -3288,7 +3439,7 @@
           <a:lstStyle/>
           <a:p>
             <a:r>
-              <a:t>Until now our real-socket tests ran through our own proxy. We repeated them on the Linux kernel itself, using tc netem, with kernel TCP in the same table.</a:t>
+              <a:t>[1:00] Until now our real-socket tests ran through our own proxy. We repeated them on the Linux kernel itself, using tc netem, with kernel TCP in the same table.</a:t>
             </a:r>
           </a:p>
           <a:p>
@@ -3309,6 +3460,12 @@
           <a:p>
             <a:r>
               <a:t>Our first runs were wrong four times: the netem queue limit counted packets in flight, the baseline was untuned, the payload sizes differed, and finally RUDP was sending 40-byte synthetic packets. We found each one, fixed it, re-ran everything and documented it.</a:t>
+            </a:r>
+          </a:p>
+          <a:p/>
+          <a:p>
+            <a:r>
+              <a:t>If asked: Q: Does it beat TCP? A: No. It beats our AIMD baselines on a real kernel path; mature kernel TCP is faster, by 1.5x to 1.7x. Q: Does it starve TCP? A: No, it takes 24 to 34 percent of a shared link (3 runs per cell, one laptop). Q: Why were the first runs wrong? A: four separate mistakes, the last being 40-byte synthetic packets against 512-byte TCP payloads; all fixed and re-run.</a:t>
             </a:r>
           </a:p>
         </p:txBody>
@@ -3394,7 +3551,7 @@
           <a:lstStyle/>
           <a:p>
             <a:r>
-              <a:t>Two more research gaps we tested.</a:t>
+              <a:t>[1:00] Two more research gaps we tested.</a:t>
             </a:r>
           </a:p>
           <a:p>
@@ -3420,6 +3577,12 @@
           <a:p>
             <a:r>
               <a:t>Be honest that our BBR is a simplification and that two bugs in it were found and fixed by these tests.</a:t>
+            </a:r>
+          </a:p>
+          <a:p/>
+          <a:p>
+            <a:r>
+              <a:t>If asked: Is your BBR the real one? No: a simplified version with no ProbeRTT and no BBRv3 loss response; the comparison is against a BBR-style policy.</a:t>
             </a:r>
           </a:p>
         </p:txBody>
@@ -3505,7 +3668,7 @@
           <a:lstStyle/>
           <a:p>
             <a:r>
-              <a:t>Fairness and trust.</a:t>
+              <a:t>[1:00] Fairness and trust.</a:t>
             </a:r>
           </a:p>
           <a:p>
@@ -3531,6 +3694,12 @@
           <a:p>
             <a:r>
               <a:t>Kernel TCP coexistence is measured: the neural agent takes 24 to 34 percent of a shared link, so it does not starve TCP, with only three runs per cell.</a:t>
+            </a:r>
+          </a:p>
+          <a:p/>
+          <a:p>
+            <a:r>
+              <a:t>If asked: Did you test against kernel TCP? Yes, on kernel netem: the neural agent took 24 to 34 percent of a shared link, three runs per cell on one laptop.</a:t>
             </a:r>
           </a:p>
         </p:txBody>
@@ -3616,17 +3785,23 @@
           <a:lstStyle/>
           <a:p>
             <a:r>
-              <a:t>What we learned: reliability is a set of simple rules working together, congestion control matters as much as retransmission, and tests tell you things about your own results that you do not want to hear.</a:t>
-            </a:r>
-          </a:p>
-          <a:p>
-            <a:r>
-              <a:t>Our limits: no kernel netem or multi-machine test, the agent is not a polite neighbour, there is no gain at 10 percent random loss, and the tabular agent did not beat AIMD.</a:t>
-            </a:r>
-          </a:p>
-          <a:p>
-            <a:r>
-              <a:t>Next: fairness-aware training with TCP coexistence, training on real traces, and kernel and multi-machine tests.</a:t>
+              <a:t>[0:45] Until now every test ran on one computer. We ran the sender on one laptop and the receiver on another, on different networks, joined by Tailscale. It could not connect directly, so traffic went through a relay, about 79 milliseconds round trip.</a:t>
+            </a:r>
+          </a:p>
+          <a:p>
+            <a:r>
+              <a:t>RUDP works between real machines: every transfer that finished delivered all 4,000 packets, with all four policies.</a:t>
+            </a:r>
+          </a:p>
+          <a:p>
+            <a:r>
+              <a:t>Be honest about the numbers: the path drifted, kernel TCP alone took anywhere from 2 to 51 seconds, and 4 of 20 RUDP runs timed out, so this is a demonstration and not a ranking. On the two clean repetitions kernel TCP was 2 to 6 times faster, and in repetition 1 the neural agent beat tuned AIMD, 4.7 against 14.2 seconds.</a:t>
+            </a:r>
+          </a:p>
+          <a:p/>
+          <a:p>
+            <a:r>
+              <a:t>If asked: Why not a better test? The other laptop was a one-time setup over the internet; the next step is a direct local network with more repetitions.</a:t>
             </a:r>
           </a:p>
         </p:txBody>
@@ -3712,7 +3887,23 @@
           <a:lstStyle/>
           <a:p>
             <a:r>
-              <a:t>Thank you. The code, report and captures are at github.com/Capsturrrr/rudp. Happy to take questions.</a:t>
+              <a:t>[0:50] What we learned: reliability is a set of simple rules working together, congestion control matters as much as retransmission, and tests tell you things about your own results that you do not want to hear.</a:t>
+            </a:r>
+          </a:p>
+          <a:p>
+            <a:r>
+              <a:t>Our limits: only one noisy two-machine run, the agent is not a polite neighbour, there is no gain at 10 percent random loss, and the tabular agent did not beat AIMD.</a:t>
+            </a:r>
+          </a:p>
+          <a:p>
+            <a:r>
+              <a:t>Next: fairness-aware training with TCP coexistence, training on real traces, and controlled multi-machine tests.</a:t>
+            </a:r>
+          </a:p>
+          <a:p/>
+          <a:p>
+            <a:r>
+              <a:t>If asked: What would you do first? Run the netem script on a Linux machine for kernel TCP and RUDP on the same path, then add a competing flow to the training.</a:t>
             </a:r>
           </a:p>
         </p:txBody>
@@ -3798,7 +3989,13 @@
           <a:lstStyle/>
           <a:p>
             <a:r>
-              <a:t>Only if asked: the window starts at 1, adds 1 per ACK until the threshold 16, then 1/window per ACK. In the 62-packet run the final window was 18.71.</a:t>
+              <a:t>[0:15] Thank you. The code, report and captures are at github.com/Capsturrrr/rudp. Happy to take questions.</a:t>
+            </a:r>
+          </a:p>
+          <a:p/>
+          <a:p>
+            <a:r>
+              <a:t>If asked: Pause and smile; hand over to questions.</a:t>
             </a:r>
           </a:p>
         </p:txBody>
@@ -3821,6 +4018,98 @@
             <a:fld id="{F7021451-1387-4CA6-816F-3879F97B5CBC}" type="slidenum">
               <a:rPr lang="en-US"/>
               <a:t>37</a:t>
+            </a:fld>
+            <a:endParaRPr lang="en-US"/>
+          </a:p>
+        </p:txBody>
+      </p:sp>
+    </p:spTree>
+    <p:extLst>
+      <p:ext uri="{BB962C8B-B14F-4D97-AF65-F5344CB8AC3E}">
+        <p14:creationId xmlns:p14="http://schemas.microsoft.com/office/powerpoint/2010/main" val="1024086991"/>
+      </p:ext>
+    </p:extLst>
+  </p:cSld>
+  <p:clrMapOvr>
+    <a:masterClrMapping/>
+  </p:clrMapOvr>
+</p:notes>
+</file>
+
+<file path=ppt/notesSlides/notesSlide38.xml><?xml version="1.0" encoding="utf-8"?>
+<p:notes xmlns:a="http://schemas.openxmlformats.org/drawingml/2006/main" xmlns:r="http://schemas.openxmlformats.org/officeDocument/2006/relationships" xmlns:p="http://schemas.openxmlformats.org/presentationml/2006/main">
+  <p:cSld>
+    <p:spTree>
+      <p:nvGrpSpPr>
+        <p:cNvPr id="1" name=""/>
+        <p:cNvGrpSpPr/>
+        <p:nvPr/>
+      </p:nvGrpSpPr>
+      <p:grpSpPr>
+        <a:xfrm>
+          <a:off x="0" y="0"/>
+          <a:ext cx="0" cy="0"/>
+          <a:chOff x="0" y="0"/>
+          <a:chExt cx="0" cy="0"/>
+        </a:xfrm>
+      </p:grpSpPr>
+      <p:sp>
+        <p:nvSpPr>
+          <p:cNvPr id="2" name="Slide Image Placeholder 1"/>
+          <p:cNvSpPr>
+            <a:spLocks noGrp="1" noRot="1" noChangeAspect="1"/>
+          </p:cNvSpPr>
+          <p:nvPr>
+            <p:ph type="sldImg"/>
+          </p:nvPr>
+        </p:nvSpPr>
+        <p:spPr/>
+      </p:sp>
+      <p:sp>
+        <p:nvSpPr>
+          <p:cNvPr id="3" name="Notes Placeholder 2"/>
+          <p:cNvSpPr>
+            <a:spLocks noGrp="1"/>
+          </p:cNvSpPr>
+          <p:nvPr>
+            <p:ph type="body" idx="1"/>
+          </p:nvPr>
+        </p:nvSpPr>
+        <p:spPr/>
+        <p:txBody>
+          <a:bodyPr/>
+          <a:lstStyle/>
+          <a:p>
+            <a:r>
+              <a:t>[-] Only if asked: the window starts at 1, adds 1 per ACK until the threshold 16, then 1/window per ACK. In the 62-packet run the final window was 18.71.</a:t>
+            </a:r>
+          </a:p>
+          <a:p/>
+          <a:p>
+            <a:r>
+              <a:t>If asked: Use this slide to answer 'show me congestion avoidance'.</a:t>
+            </a:r>
+          </a:p>
+        </p:txBody>
+      </p:sp>
+      <p:sp>
+        <p:nvSpPr>
+          <p:cNvPr id="4" name="Slide Number Placeholder 3"/>
+          <p:cNvSpPr>
+            <a:spLocks noGrp="1"/>
+          </p:cNvSpPr>
+          <p:nvPr>
+            <p:ph type="sldNum" sz="quarter" idx="10"/>
+          </p:nvPr>
+        </p:nvSpPr>
+        <p:spPr/>
+        <p:txBody>
+          <a:bodyPr/>
+          <a:lstStyle/>
+          <a:p>
+            <a:fld id="{F7021451-1387-4CA6-816F-3879F97B5CBC}" type="slidenum">
+              <a:rPr lang="en-US"/>
+              <a:t>38</a:t>
             </a:fld>
             <a:endParaRPr lang="en-US"/>
           </a:p>
@@ -3884,12 +4173,18 @@
           <a:lstStyle/>
           <a:p>
             <a:r>
-              <a:t>Four pieces: handshake, reliability, flow control and congestion control.</a:t>
+              <a:t>[0:40] Four pieces: handshake, reliability, flow control and congestion control.</a:t>
             </a:r>
           </a:p>
           <a:p>
             <a:r>
               <a:t>About 670 lines of C across four source files, built in eight phases, on GitHub at Capsturrrr/rudp.</a:t>
+            </a:r>
+          </a:p>
+          <a:p/>
+          <a:p>
+            <a:r>
+              <a:t>If asked: Q: Who did what? A: Agree one answer as a team before you go in.</a:t>
             </a:r>
           </a:p>
         </p:txBody>
@@ -3975,7 +4270,7 @@
           <a:lstStyle/>
           <a:p>
             <a:r>
-              <a:t>13-byte header: sequence 4, ack 4, flags 1, checksum 2, payload length 2.</a:t>
+              <a:t>[0:40] 13-byte header: sequence 4, ack 4, flags 1, checksum 2, payload length 2.</a:t>
             </a:r>
           </a:p>
           <a:p>
@@ -3986,6 +4281,12 @@
           <a:p>
             <a:r>
               <a:t>A data packet is 53 bytes on the wire; ACKs and handshake packets are 13.</a:t>
+            </a:r>
+          </a:p>
+          <a:p/>
+          <a:p>
+            <a:r>
+              <a:t>If asked: Q: How does the checksum work? A: 16-bit one's-complement sum over header and payload, like UDP/TCP. A corrupted packet fails and is recovered by retransmission.</a:t>
             </a:r>
           </a:p>
         </p:txBody>
@@ -4071,7 +4372,7 @@
           <a:lstStyle/>
           <a:p>
             <a:r>
-              <a:t>Three-way handshake: SYN, SYN-ACK, ACK. Then data, up to a window of packets in flight.</a:t>
+              <a:t>[0:50] Three-way handshake: SYN, SYN-ACK, ACK. Then data, up to a window of packets in flight.</a:t>
             </a:r>
           </a:p>
           <a:p>
@@ -4082,6 +4383,12 @@
           <a:p>
             <a:r>
               <a:t>The server accepts a new SYN in any state, so a killed client can never leave it stuck. That was a real bug we fixed.</a:t>
+            </a:r>
+          </a:p>
+          <a:p/>
+          <a:p>
+            <a:r>
+              <a:t>If asked: Q: What if the peer disappears? A: Sender keeps retransmitting on timeout. An abort after repeated timeouts is not implemented; it is the fix we would add.</a:t>
             </a:r>
           </a:p>
         </p:txBody>
@@ -4167,7 +4474,7 @@
           <a:lstStyle/>
           <a:p>
             <a:r>
-              <a:t>The window is the number of packets in flight; it started fixed at 4 and is now driven by the congestion window.</a:t>
+              <a:t>[0:50] The window is the number of packets in flight; it started fixed at 4 and is now driven by the congestion window.</a:t>
             </a:r>
           </a:p>
           <a:p>
@@ -4178,6 +4485,12 @@
           <a:p>
             <a:r>
               <a:t>Proof: in a 20% loss netem capture we saw 12 timeouts about 500 ms apart. Result: the 2,442-byte message reassembled correctly.</a:t>
+            </a:r>
+          </a:p>
+          <a:p/>
+          <a:p>
+            <a:r>
+              <a:t>If asked: Q: Why Go-Back-N? A: Simpler to build and explain. It wastes bandwidth under loss; Selective Repeat with SACK is our stated future work.</a:t>
             </a:r>
           </a:p>
         </p:txBody>
@@ -4263,7 +4576,7 @@
           <a:lstStyle/>
           <a:p>
             <a:r>
-              <a:t>Slow start: window grows by one per ACK until the threshold of 16. Then avoidance: plus 1/window per ACK.</a:t>
+              <a:t>[0:50] Slow start: window grows by one per ACK until the threshold of 16. Then avoidance: plus 1/window per ACK.</a:t>
             </a:r>
           </a:p>
           <a:p>
@@ -4274,6 +4587,12 @@
           <a:p>
             <a:r>
               <a:t>The graph shows fresh runs at 0, 10, 20 and 40 percent loss. Red marks are timeouts, green are fast retransmits.</a:t>
+            </a:r>
+          </a:p>
+          <a:p/>
+          <a:p>
+            <a:r>
+              <a:t>If asked: Q: Why cap 32 and ssthresh 16? A: The cap stops a lossless run growing without bound; 16 is where doubling switches to linear growth.</a:t>
             </a:r>
           </a:p>
         </p:txBody>
@@ -4359,12 +4678,18 @@
           <a:lstStyle/>
           <a:p>
             <a:r>
-              <a:t>Three tools: a loss simulator inside the code (used for the benchmark), Linux tc/netem injecting real loss on loopback, and Wireshark/tshark.</a:t>
+              <a:t>[0:40] Three tools: a loss simulator inside the code (used for the benchmark), Linux tc/netem injecting real loss on loopback, and Wireshark/tshark.</a:t>
             </a:r>
           </a:p>
           <a:p>
             <a:r>
               <a:t>Windows Wireshark could not see WSL loopback, so we captured with tshark inside WSL and copied the file across.</a:t>
+            </a:r>
+          </a:p>
+          <a:p/>
+          <a:p>
+            <a:r>
+              <a:t>If asked: Q: Is the loss real? A: Benchmark and chat loss is simulated in the program. We also captured a real loopback run with tshark and netem loss.</a:t>
             </a:r>
           </a:p>
         </p:txBody>
@@ -4996,7 +5321,7 @@
                 <a:ea typeface="Courier New" pitchFamily="34" charset="-122"/>
                 <a:cs typeface="Courier New" pitchFamily="34" charset="-120"/>
               </a:rPr>
-              <a:t>10 / 37   Smart-RUDP</a:t>
+              <a:t>10 / 38   Smart-RUDP</a:t>
             </a:r>
             <a:endParaRPr lang="en-US" sz="1000" dirty="0"/>
           </a:p>
@@ -5193,7 +5518,7 @@
                 <a:ea typeface="Courier New" pitchFamily="34" charset="-122"/>
                 <a:cs typeface="Courier New" pitchFamily="34" charset="-120"/>
               </a:rPr>
-              <a:t>11 / 37   Smart-RUDP</a:t>
+              <a:t>11 / 38   Smart-RUDP</a:t>
             </a:r>
             <a:endParaRPr lang="en-US" sz="1000" dirty="0"/>
           </a:p>
@@ -6023,7 +6348,7 @@
                 <a:ea typeface="Courier New" pitchFamily="34" charset="-122"/>
                 <a:cs typeface="Courier New" pitchFamily="34" charset="-120"/>
               </a:rPr>
-              <a:t>12 / 37   Smart-RUDP</a:t>
+              <a:t>12 / 38   Smart-RUDP</a:t>
             </a:r>
             <a:endParaRPr lang="en-US" sz="1000" dirty="0"/>
           </a:p>
@@ -6320,7 +6645,7 @@
                 <a:ea typeface="Courier New" pitchFamily="34" charset="-122"/>
                 <a:cs typeface="Courier New" pitchFamily="34" charset="-120"/>
               </a:rPr>
-              <a:t>13 / 37   Smart-RUDP</a:t>
+              <a:t>13 / 38   Smart-RUDP</a:t>
             </a:r>
             <a:endParaRPr lang="en-US" sz="1000" dirty="0"/>
           </a:p>
@@ -6620,7 +6945,7 @@
                 <a:ea typeface="Courier New" pitchFamily="34" charset="-122"/>
                 <a:cs typeface="Courier New" pitchFamily="34" charset="-120"/>
               </a:rPr>
-              <a:t>14 / 37   Smart-RUDP</a:t>
+              <a:t>14 / 38   Smart-RUDP</a:t>
             </a:r>
             <a:endParaRPr lang="en-US" sz="1000" dirty="0"/>
           </a:p>
@@ -7004,7 +7329,7 @@
                 <a:ea typeface="Courier New" pitchFamily="34" charset="-122"/>
                 <a:cs typeface="Courier New" pitchFamily="34" charset="-120"/>
               </a:rPr>
-              <a:t>15 / 37   Smart-RUDP</a:t>
+              <a:t>15 / 38   Smart-RUDP</a:t>
             </a:r>
             <a:endParaRPr lang="en-US" sz="1000" dirty="0"/>
           </a:p>
@@ -7462,7 +7787,7 @@
                 <a:ea typeface="Courier New" pitchFamily="34" charset="-122"/>
                 <a:cs typeface="Courier New" pitchFamily="34" charset="-120"/>
               </a:rPr>
-              <a:t>16 / 37   Smart-RUDP</a:t>
+              <a:t>16 / 38   Smart-RUDP</a:t>
             </a:r>
             <a:endParaRPr lang="en-US" sz="1000" dirty="0"/>
           </a:p>
@@ -8147,7 +8472,7 @@
                 <a:ea typeface="Courier New" pitchFamily="34" charset="-122"/>
                 <a:cs typeface="Courier New" pitchFamily="34" charset="-120"/>
               </a:rPr>
-              <a:t>17 / 37   Smart-RUDP</a:t>
+              <a:t>17 / 38   Smart-RUDP</a:t>
             </a:r>
             <a:endParaRPr lang="en-US" sz="1000" dirty="0"/>
           </a:p>
@@ -8387,7 +8712,7 @@
                 <a:ea typeface="Courier New" pitchFamily="34" charset="-122"/>
                 <a:cs typeface="Courier New" pitchFamily="34" charset="-120"/>
               </a:rPr>
-              <a:t>18 / 37   Smart-RUDP</a:t>
+              <a:t>18 / 38   Smart-RUDP</a:t>
             </a:r>
             <a:endParaRPr lang="en-US" sz="1000" dirty="0"/>
           </a:p>
@@ -8627,7 +8952,7 @@
                 <a:ea typeface="Courier New" pitchFamily="34" charset="-122"/>
                 <a:cs typeface="Courier New" pitchFamily="34" charset="-120"/>
               </a:rPr>
-              <a:t>19 / 37   Smart-RUDP</a:t>
+              <a:t>19 / 38   Smart-RUDP</a:t>
             </a:r>
             <a:endParaRPr lang="en-US" sz="1000" dirty="0"/>
           </a:p>
@@ -8849,7 +9174,7 @@
                 <a:ea typeface="Courier New" pitchFamily="34" charset="-122"/>
                 <a:cs typeface="Courier New" pitchFamily="34" charset="-120"/>
               </a:rPr>
-              <a:t>2 / 37   Smart-RUDP</a:t>
+              <a:t>2 / 38   Smart-RUDP</a:t>
             </a:r>
             <a:endParaRPr lang="en-US" sz="1000" dirty="0"/>
           </a:p>
@@ -9243,7 +9568,7 @@
                 <a:ea typeface="Courier New" pitchFamily="34" charset="-122"/>
                 <a:cs typeface="Courier New" pitchFamily="34" charset="-120"/>
               </a:rPr>
-              <a:t>20 / 37   Smart-RUDP</a:t>
+              <a:t>20 / 38   Smart-RUDP</a:t>
             </a:r>
             <a:endParaRPr lang="en-US" sz="1000" dirty="0"/>
           </a:p>
@@ -9567,7 +9892,7 @@
                 <a:ea typeface="Courier New" pitchFamily="34" charset="-122"/>
                 <a:cs typeface="Courier New" pitchFamily="34" charset="-120"/>
               </a:rPr>
-              <a:t>21 / 37   Smart-RUDP</a:t>
+              <a:t>21 / 38   Smart-RUDP</a:t>
             </a:r>
             <a:endParaRPr lang="en-US" sz="1000" dirty="0"/>
           </a:p>
@@ -11274,7 +11599,7 @@
                 <a:ea typeface="Courier New" pitchFamily="34" charset="-122"/>
                 <a:cs typeface="Courier New" pitchFamily="34" charset="-120"/>
               </a:rPr>
-              <a:t>22 / 37   Smart-RUDP</a:t>
+              <a:t>22 / 38   Smart-RUDP</a:t>
             </a:r>
             <a:endParaRPr lang="en-US" sz="1000" dirty="0"/>
           </a:p>
@@ -12657,7 +12982,7 @@
                 <a:ea typeface="Courier New" pitchFamily="34" charset="-122"/>
                 <a:cs typeface="Courier New" pitchFamily="34" charset="-120"/>
               </a:rPr>
-              <a:t>23 / 37   Smart-RUDP</a:t>
+              <a:t>23 / 38   Smart-RUDP</a:t>
             </a:r>
             <a:endParaRPr lang="en-US" sz="1000" dirty="0"/>
           </a:p>
@@ -14200,7 +14525,7 @@
                 <a:ea typeface="Courier New" pitchFamily="34" charset="-122"/>
                 <a:cs typeface="Courier New" pitchFamily="34" charset="-120"/>
               </a:rPr>
-              <a:t>24 / 37   Smart-RUDP</a:t>
+              <a:t>24 / 38   Smart-RUDP</a:t>
             </a:r>
             <a:endParaRPr lang="en-US" sz="1000" dirty="0"/>
           </a:p>
@@ -15878,7 +16203,7 @@
                 <a:ea typeface="Courier New" pitchFamily="34" charset="-122"/>
                 <a:cs typeface="Courier New" pitchFamily="34" charset="-120"/>
               </a:rPr>
-              <a:t>25 / 37   Smart-RUDP</a:t>
+              <a:t>25 / 38   Smart-RUDP</a:t>
             </a:r>
             <a:endParaRPr lang="en-US" sz="1000" dirty="0"/>
           </a:p>
@@ -17556,7 +17881,7 @@
                 <a:ea typeface="Courier New" pitchFamily="34" charset="-122"/>
                 <a:cs typeface="Courier New" pitchFamily="34" charset="-120"/>
               </a:rPr>
-              <a:t>26 / 37   Smart-RUDP</a:t>
+              <a:t>26 / 38   Smart-RUDP</a:t>
             </a:r>
             <a:endParaRPr lang="en-US" sz="1000" dirty="0"/>
           </a:p>
@@ -19896,7 +20221,7 @@
                 <a:ea typeface="Courier New" pitchFamily="34" charset="-122"/>
                 <a:cs typeface="Courier New" pitchFamily="34" charset="-120"/>
               </a:rPr>
-              <a:t>27 / 37   Smart-RUDP</a:t>
+              <a:t>27 / 38   Smart-RUDP</a:t>
             </a:r>
             <a:endParaRPr lang="en-US" sz="1000" dirty="0"/>
           </a:p>
@@ -20354,7 +20679,7 @@
                 <a:ea typeface="Courier New" pitchFamily="34" charset="-122"/>
                 <a:cs typeface="Courier New" pitchFamily="34" charset="-120"/>
               </a:rPr>
-              <a:t>28 / 37   Smart-RUDP</a:t>
+              <a:t>28 / 38   Smart-RUDP</a:t>
             </a:r>
             <a:endParaRPr lang="en-US" sz="1000" dirty="0"/>
           </a:p>
@@ -20586,7 +20911,7 @@
                 <a:ea typeface="Courier New" pitchFamily="34" charset="-122"/>
                 <a:cs typeface="Courier New" pitchFamily="34" charset="-120"/>
               </a:rPr>
-              <a:t>29 / 37   Smart-RUDP</a:t>
+              <a:t>29 / 38   Smart-RUDP</a:t>
             </a:r>
             <a:endParaRPr lang="en-US" sz="1000" dirty="0"/>
           </a:p>
@@ -23332,7 +23657,7 @@
                 <a:ea typeface="Courier New" pitchFamily="34" charset="-122"/>
                 <a:cs typeface="Courier New" pitchFamily="34" charset="-120"/>
               </a:rPr>
-              <a:t>3 / 37   Smart-RUDP</a:t>
+              <a:t>3 / 38   Smart-RUDP</a:t>
             </a:r>
             <a:endParaRPr lang="en-US" sz="1000" dirty="0"/>
           </a:p>
@@ -23726,7 +24051,7 @@
                 <a:ea typeface="Courier New" pitchFamily="34" charset="-122"/>
                 <a:cs typeface="Courier New" pitchFamily="34" charset="-120"/>
               </a:rPr>
-              <a:t>30 / 37   Smart-RUDP</a:t>
+              <a:t>30 / 38   Smart-RUDP</a:t>
             </a:r>
             <a:endParaRPr lang="en-US" sz="1000" dirty="0"/>
           </a:p>
@@ -23966,7 +24291,7 @@
                 <a:ea typeface="Courier New" pitchFamily="34" charset="-122"/>
                 <a:cs typeface="Courier New" pitchFamily="34" charset="-120"/>
               </a:rPr>
-              <a:t>31 / 37   Smart-RUDP</a:t>
+              <a:t>31 / 38   Smart-RUDP</a:t>
             </a:r>
             <a:endParaRPr lang="en-US" sz="1000" dirty="0"/>
           </a:p>
@@ -26283,7 +26608,7 @@
                 <a:ea typeface="Courier New" pitchFamily="34" charset="-122"/>
                 <a:cs typeface="Courier New" pitchFamily="34" charset="-120"/>
               </a:rPr>
-              <a:t>32 / 37   Smart-RUDP</a:t>
+              <a:t>32 / 38   Smart-RUDP</a:t>
             </a:r>
             <a:endParaRPr lang="en-US" sz="1000" dirty="0"/>
           </a:p>
@@ -28263,7 +28588,7 @@
                 <a:ea typeface="Courier New" pitchFamily="34" charset="-122"/>
                 <a:cs typeface="Courier New" pitchFamily="34" charset="-120"/>
               </a:rPr>
-              <a:t>33 / 37   Smart-RUDP</a:t>
+              <a:t>33 / 38   Smart-RUDP</a:t>
             </a:r>
             <a:endParaRPr lang="en-US" sz="1000" dirty="0"/>
           </a:p>
@@ -30906,7 +31231,7 @@
                 <a:ea typeface="Courier New" pitchFamily="34" charset="-122"/>
                 <a:cs typeface="Courier New" pitchFamily="34" charset="-120"/>
               </a:rPr>
-              <a:t>34 / 37   Smart-RUDP</a:t>
+              <a:t>34 / 38   Smart-RUDP</a:t>
             </a:r>
             <a:endParaRPr lang="en-US" sz="1000" dirty="0"/>
           </a:p>
@@ -31958,7 +32283,7 @@
                 <a:ea typeface="Courier New" pitchFamily="34" charset="-122"/>
                 <a:cs typeface="Courier New" pitchFamily="34" charset="-120"/>
               </a:rPr>
-              <a:t>Learnings and future work</a:t>
+              <a:t>First run between two machines</a:t>
             </a:r>
             <a:endParaRPr lang="en-US" sz="3000" dirty="0"/>
           </a:p>
@@ -31997,7 +32322,2738 @@
                 <a:ea typeface="Courier New" pitchFamily="34" charset="-122"/>
                 <a:cs typeface="Courier New" pitchFamily="34" charset="-120"/>
               </a:rPr>
-              <a:t>35 / 37   Smart-RUDP</a:t>
+              <a:t>35 / 38   Smart-RUDP</a:t>
+            </a:r>
+            <a:endParaRPr lang="en-US" sz="1000" dirty="0"/>
+          </a:p>
+        </p:txBody>
+      </p:sp>
+      <p:graphicFrame>
+        <p:nvGraphicFramePr>
+          <p:cNvPr id="36" name="Table 0"/>
+          <p:cNvGraphicFramePr>
+            <a:graphicFrameLocks noGrp="1"/>
+          </p:cNvGraphicFramePr>
+          <p:nvPr>
+            <p:extLst>
+              <p:ext uri="{D42A27DB-BD31-4B8C-83A1-F6EECF244321}">
+                <p14:modId xmlns:p14="http://schemas.microsoft.com/office/powerpoint/2010/main" val="1579011935"/>
+              </p:ext>
+            </p:extLst>
+          </p:nvPr>
+        </p:nvGraphicFramePr>
+        <p:xfrm>
+          <a:off x="548640" y="1188720"/>
+          <a:ext cx="7863840" cy="914400"/>
+        </p:xfrm>
+        <a:graphic>
+          <a:graphicData uri="http://schemas.openxmlformats.org/drawingml/2006/table">
+            <a:tbl>
+              <a:tblPr/>
+              <a:tblGrid>
+                <a:gridCol w="2194560"/>
+                <a:gridCol w="1005840"/>
+                <a:gridCol w="1097280"/>
+                <a:gridCol w="1097280"/>
+                <a:gridCol w="1280160"/>
+                <a:gridCol w="1188720"/>
+              </a:tblGrid>
+              <a:tr h="384048">
+                <a:tc>
+                  <a:txBody>
+                    <a:bodyPr/>
+                    <a:lstStyle/>
+                    <a:p>
+                      <a:pPr indent="0" marL="0">
+                        <a:buNone/>
+                      </a:pPr>
+                      <a:r>
+                        <a:rPr lang="en-US" sz="1300" b="1" dirty="0">
+                          <a:solidFill>
+                            <a:srgbClr val="0B0F14"/>
+                          </a:solidFill>
+                          <a:latin typeface="Courier New" pitchFamily="34" charset="0"/>
+                          <a:ea typeface="Courier New" pitchFamily="34" charset="-122"/>
+                          <a:cs typeface="Courier New" pitchFamily="34" charset="-120"/>
+                        </a:rPr>
+                        <a:t>Time (s)</a:t>
+                      </a:r>
+                      <a:endParaRPr lang="en-US" sz="1300" dirty="0">
+                        <a:latin typeface="Courier New" charset="0"/>
+                        <a:ea typeface="Courier New" charset="0"/>
+                        <a:cs typeface="Courier New" charset="0"/>
+                      </a:endParaRPr>
+                    </a:p>
+                  </a:txBody>
+                  <a:tcPr marL="91440" marR="91440" marT="45720" marB="45720">
+                    <a:lnL w="12700" cap="flat" cmpd="sng" algn="ctr">
+                      <a:solidFill>
+                        <a:srgbClr val="2A3441"/>
+                      </a:solidFill>
+                      <a:prstDash val="solid"/>
+                      <a:round/>
+                      <a:headEnd type="none" w="med" len="med"/>
+                      <a:tailEnd type="none" w="med" len="med"/>
+                    </a:lnL>
+                    <a:lnR w="12700" cap="flat" cmpd="sng" algn="ctr">
+                      <a:solidFill>
+                        <a:srgbClr val="2A3441"/>
+                      </a:solidFill>
+                      <a:prstDash val="solid"/>
+                      <a:round/>
+                      <a:headEnd type="none" w="med" len="med"/>
+                      <a:tailEnd type="none" w="med" len="med"/>
+                    </a:lnR>
+                    <a:lnT w="12700" cap="flat" cmpd="sng" algn="ctr">
+                      <a:solidFill>
+                        <a:srgbClr val="2A3441"/>
+                      </a:solidFill>
+                      <a:prstDash val="solid"/>
+                      <a:round/>
+                      <a:headEnd type="none" w="med" len="med"/>
+                      <a:tailEnd type="none" w="med" len="med"/>
+                    </a:lnT>
+                    <a:lnB w="12700" cap="flat" cmpd="sng" algn="ctr">
+                      <a:solidFill>
+                        <a:srgbClr val="2A3441"/>
+                      </a:solidFill>
+                      <a:prstDash val="solid"/>
+                      <a:round/>
+                      <a:headEnd type="none" w="med" len="med"/>
+                      <a:tailEnd type="none" w="med" len="med"/>
+                    </a:lnB>
+                    <a:solidFill>
+                      <a:srgbClr val="39FF88"/>
+                    </a:solidFill>
+                  </a:tcPr>
+                </a:tc>
+                <a:tc>
+                  <a:txBody>
+                    <a:bodyPr/>
+                    <a:lstStyle/>
+                    <a:p>
+                      <a:pPr indent="0" marL="0">
+                        <a:buNone/>
+                      </a:pPr>
+                      <a:r>
+                        <a:rPr lang="en-US" sz="1300" b="1" dirty="0">
+                          <a:solidFill>
+                            <a:srgbClr val="0B0F14"/>
+                          </a:solidFill>
+                          <a:latin typeface="Courier New" pitchFamily="34" charset="0"/>
+                          <a:ea typeface="Courier New" pitchFamily="34" charset="-122"/>
+                          <a:cs typeface="Courier New" pitchFamily="34" charset="-120"/>
+                        </a:rPr>
+                        <a:t>TCP</a:t>
+                      </a:r>
+                      <a:endParaRPr lang="en-US" sz="1300" dirty="0">
+                        <a:latin typeface="Courier New" charset="0"/>
+                        <a:ea typeface="Courier New" charset="0"/>
+                        <a:cs typeface="Courier New" charset="0"/>
+                      </a:endParaRPr>
+                    </a:p>
+                  </a:txBody>
+                  <a:tcPr marL="91440" marR="91440" marT="45720" marB="45720">
+                    <a:lnL w="12700" cap="flat" cmpd="sng" algn="ctr">
+                      <a:solidFill>
+                        <a:srgbClr val="2A3441"/>
+                      </a:solidFill>
+                      <a:prstDash val="solid"/>
+                      <a:round/>
+                      <a:headEnd type="none" w="med" len="med"/>
+                      <a:tailEnd type="none" w="med" len="med"/>
+                    </a:lnL>
+                    <a:lnR w="12700" cap="flat" cmpd="sng" algn="ctr">
+                      <a:solidFill>
+                        <a:srgbClr val="2A3441"/>
+                      </a:solidFill>
+                      <a:prstDash val="solid"/>
+                      <a:round/>
+                      <a:headEnd type="none" w="med" len="med"/>
+                      <a:tailEnd type="none" w="med" len="med"/>
+                    </a:lnR>
+                    <a:lnT w="12700" cap="flat" cmpd="sng" algn="ctr">
+                      <a:solidFill>
+                        <a:srgbClr val="2A3441"/>
+                      </a:solidFill>
+                      <a:prstDash val="solid"/>
+                      <a:round/>
+                      <a:headEnd type="none" w="med" len="med"/>
+                      <a:tailEnd type="none" w="med" len="med"/>
+                    </a:lnT>
+                    <a:lnB w="12700" cap="flat" cmpd="sng" algn="ctr">
+                      <a:solidFill>
+                        <a:srgbClr val="2A3441"/>
+                      </a:solidFill>
+                      <a:prstDash val="solid"/>
+                      <a:round/>
+                      <a:headEnd type="none" w="med" len="med"/>
+                      <a:tailEnd type="none" w="med" len="med"/>
+                    </a:lnB>
+                    <a:solidFill>
+                      <a:srgbClr val="39FF88"/>
+                    </a:solidFill>
+                  </a:tcPr>
+                </a:tc>
+                <a:tc>
+                  <a:txBody>
+                    <a:bodyPr/>
+                    <a:lstStyle/>
+                    <a:p>
+                      <a:pPr indent="0" marL="0">
+                        <a:buNone/>
+                      </a:pPr>
+                      <a:r>
+                        <a:rPr lang="en-US" sz="1300" b="1" dirty="0">
+                          <a:solidFill>
+                            <a:srgbClr val="0B0F14"/>
+                          </a:solidFill>
+                          <a:latin typeface="Courier New" pitchFamily="34" charset="0"/>
+                          <a:ea typeface="Courier New" pitchFamily="34" charset="-122"/>
+                          <a:cs typeface="Courier New" pitchFamily="34" charset="-120"/>
+                        </a:rPr>
+                        <a:t>AIMD</a:t>
+                      </a:r>
+                      <a:endParaRPr lang="en-US" sz="1300" dirty="0">
+                        <a:latin typeface="Courier New" charset="0"/>
+                        <a:ea typeface="Courier New" charset="0"/>
+                        <a:cs typeface="Courier New" charset="0"/>
+                      </a:endParaRPr>
+                    </a:p>
+                  </a:txBody>
+                  <a:tcPr marL="91440" marR="91440" marT="45720" marB="45720">
+                    <a:lnL w="12700" cap="flat" cmpd="sng" algn="ctr">
+                      <a:solidFill>
+                        <a:srgbClr val="2A3441"/>
+                      </a:solidFill>
+                      <a:prstDash val="solid"/>
+                      <a:round/>
+                      <a:headEnd type="none" w="med" len="med"/>
+                      <a:tailEnd type="none" w="med" len="med"/>
+                    </a:lnL>
+                    <a:lnR w="12700" cap="flat" cmpd="sng" algn="ctr">
+                      <a:solidFill>
+                        <a:srgbClr val="2A3441"/>
+                      </a:solidFill>
+                      <a:prstDash val="solid"/>
+                      <a:round/>
+                      <a:headEnd type="none" w="med" len="med"/>
+                      <a:tailEnd type="none" w="med" len="med"/>
+                    </a:lnR>
+                    <a:lnT w="12700" cap="flat" cmpd="sng" algn="ctr">
+                      <a:solidFill>
+                        <a:srgbClr val="2A3441"/>
+                      </a:solidFill>
+                      <a:prstDash val="solid"/>
+                      <a:round/>
+                      <a:headEnd type="none" w="med" len="med"/>
+                      <a:tailEnd type="none" w="med" len="med"/>
+                    </a:lnT>
+                    <a:lnB w="12700" cap="flat" cmpd="sng" algn="ctr">
+                      <a:solidFill>
+                        <a:srgbClr val="2A3441"/>
+                      </a:solidFill>
+                      <a:prstDash val="solid"/>
+                      <a:round/>
+                      <a:headEnd type="none" w="med" len="med"/>
+                      <a:tailEnd type="none" w="med" len="med"/>
+                    </a:lnB>
+                    <a:solidFill>
+                      <a:srgbClr val="39FF88"/>
+                    </a:solidFill>
+                  </a:tcPr>
+                </a:tc>
+                <a:tc>
+                  <a:txBody>
+                    <a:bodyPr/>
+                    <a:lstStyle/>
+                    <a:p>
+                      <a:pPr indent="0" marL="0">
+                        <a:buNone/>
+                      </a:pPr>
+                      <a:r>
+                        <a:rPr lang="en-US" sz="1300" b="1" dirty="0">
+                          <a:solidFill>
+                            <a:srgbClr val="0B0F14"/>
+                          </a:solidFill>
+                          <a:latin typeface="Courier New" pitchFamily="34" charset="0"/>
+                          <a:ea typeface="Courier New" pitchFamily="34" charset="-122"/>
+                          <a:cs typeface="Courier New" pitchFamily="34" charset="-120"/>
+                        </a:rPr>
+                        <a:t>CUBIC</a:t>
+                      </a:r>
+                      <a:endParaRPr lang="en-US" sz="1300" dirty="0">
+                        <a:latin typeface="Courier New" charset="0"/>
+                        <a:ea typeface="Courier New" charset="0"/>
+                        <a:cs typeface="Courier New" charset="0"/>
+                      </a:endParaRPr>
+                    </a:p>
+                  </a:txBody>
+                  <a:tcPr marL="91440" marR="91440" marT="45720" marB="45720">
+                    <a:lnL w="12700" cap="flat" cmpd="sng" algn="ctr">
+                      <a:solidFill>
+                        <a:srgbClr val="2A3441"/>
+                      </a:solidFill>
+                      <a:prstDash val="solid"/>
+                      <a:round/>
+                      <a:headEnd type="none" w="med" len="med"/>
+                      <a:tailEnd type="none" w="med" len="med"/>
+                    </a:lnL>
+                    <a:lnR w="12700" cap="flat" cmpd="sng" algn="ctr">
+                      <a:solidFill>
+                        <a:srgbClr val="2A3441"/>
+                      </a:solidFill>
+                      <a:prstDash val="solid"/>
+                      <a:round/>
+                      <a:headEnd type="none" w="med" len="med"/>
+                      <a:tailEnd type="none" w="med" len="med"/>
+                    </a:lnR>
+                    <a:lnT w="12700" cap="flat" cmpd="sng" algn="ctr">
+                      <a:solidFill>
+                        <a:srgbClr val="2A3441"/>
+                      </a:solidFill>
+                      <a:prstDash val="solid"/>
+                      <a:round/>
+                      <a:headEnd type="none" w="med" len="med"/>
+                      <a:tailEnd type="none" w="med" len="med"/>
+                    </a:lnT>
+                    <a:lnB w="12700" cap="flat" cmpd="sng" algn="ctr">
+                      <a:solidFill>
+                        <a:srgbClr val="2A3441"/>
+                      </a:solidFill>
+                      <a:prstDash val="solid"/>
+                      <a:round/>
+                      <a:headEnd type="none" w="med" len="med"/>
+                      <a:tailEnd type="none" w="med" len="med"/>
+                    </a:lnB>
+                    <a:solidFill>
+                      <a:srgbClr val="39FF88"/>
+                    </a:solidFill>
+                  </a:tcPr>
+                </a:tc>
+                <a:tc>
+                  <a:txBody>
+                    <a:bodyPr/>
+                    <a:lstStyle/>
+                    <a:p>
+                      <a:pPr indent="0" marL="0">
+                        <a:buNone/>
+                      </a:pPr>
+                      <a:r>
+                        <a:rPr lang="en-US" sz="1300" b="1" dirty="0">
+                          <a:solidFill>
+                            <a:srgbClr val="0B0F14"/>
+                          </a:solidFill>
+                          <a:latin typeface="Courier New" pitchFamily="34" charset="0"/>
+                          <a:ea typeface="Courier New" pitchFamily="34" charset="-122"/>
+                          <a:cs typeface="Courier New" pitchFamily="34" charset="-120"/>
+                        </a:rPr>
+                        <a:t>BBR-style</a:t>
+                      </a:r>
+                      <a:endParaRPr lang="en-US" sz="1300" dirty="0">
+                        <a:latin typeface="Courier New" charset="0"/>
+                        <a:ea typeface="Courier New" charset="0"/>
+                        <a:cs typeface="Courier New" charset="0"/>
+                      </a:endParaRPr>
+                    </a:p>
+                  </a:txBody>
+                  <a:tcPr marL="91440" marR="91440" marT="45720" marB="45720">
+                    <a:lnL w="12700" cap="flat" cmpd="sng" algn="ctr">
+                      <a:solidFill>
+                        <a:srgbClr val="2A3441"/>
+                      </a:solidFill>
+                      <a:prstDash val="solid"/>
+                      <a:round/>
+                      <a:headEnd type="none" w="med" len="med"/>
+                      <a:tailEnd type="none" w="med" len="med"/>
+                    </a:lnL>
+                    <a:lnR w="12700" cap="flat" cmpd="sng" algn="ctr">
+                      <a:solidFill>
+                        <a:srgbClr val="2A3441"/>
+                      </a:solidFill>
+                      <a:prstDash val="solid"/>
+                      <a:round/>
+                      <a:headEnd type="none" w="med" len="med"/>
+                      <a:tailEnd type="none" w="med" len="med"/>
+                    </a:lnR>
+                    <a:lnT w="12700" cap="flat" cmpd="sng" algn="ctr">
+                      <a:solidFill>
+                        <a:srgbClr val="2A3441"/>
+                      </a:solidFill>
+                      <a:prstDash val="solid"/>
+                      <a:round/>
+                      <a:headEnd type="none" w="med" len="med"/>
+                      <a:tailEnd type="none" w="med" len="med"/>
+                    </a:lnT>
+                    <a:lnB w="12700" cap="flat" cmpd="sng" algn="ctr">
+                      <a:solidFill>
+                        <a:srgbClr val="2A3441"/>
+                      </a:solidFill>
+                      <a:prstDash val="solid"/>
+                      <a:round/>
+                      <a:headEnd type="none" w="med" len="med"/>
+                      <a:tailEnd type="none" w="med" len="med"/>
+                    </a:lnB>
+                    <a:solidFill>
+                      <a:srgbClr val="39FF88"/>
+                    </a:solidFill>
+                  </a:tcPr>
+                </a:tc>
+                <a:tc>
+                  <a:txBody>
+                    <a:bodyPr/>
+                    <a:lstStyle/>
+                    <a:p>
+                      <a:pPr indent="0" marL="0">
+                        <a:buNone/>
+                      </a:pPr>
+                      <a:r>
+                        <a:rPr lang="en-US" sz="1300" b="1" dirty="0">
+                          <a:solidFill>
+                            <a:srgbClr val="0B0F14"/>
+                          </a:solidFill>
+                          <a:latin typeface="Courier New" pitchFamily="34" charset="0"/>
+                          <a:ea typeface="Courier New" pitchFamily="34" charset="-122"/>
+                          <a:cs typeface="Courier New" pitchFamily="34" charset="-120"/>
+                        </a:rPr>
+                        <a:t>Neural</a:t>
+                      </a:r>
+                      <a:endParaRPr lang="en-US" sz="1300" dirty="0">
+                        <a:latin typeface="Courier New" charset="0"/>
+                        <a:ea typeface="Courier New" charset="0"/>
+                        <a:cs typeface="Courier New" charset="0"/>
+                      </a:endParaRPr>
+                    </a:p>
+                  </a:txBody>
+                  <a:tcPr marL="91440" marR="91440" marT="45720" marB="45720">
+                    <a:lnL w="12700" cap="flat" cmpd="sng" algn="ctr">
+                      <a:solidFill>
+                        <a:srgbClr val="2A3441"/>
+                      </a:solidFill>
+                      <a:prstDash val="solid"/>
+                      <a:round/>
+                      <a:headEnd type="none" w="med" len="med"/>
+                      <a:tailEnd type="none" w="med" len="med"/>
+                    </a:lnL>
+                    <a:lnR w="12700" cap="flat" cmpd="sng" algn="ctr">
+                      <a:solidFill>
+                        <a:srgbClr val="2A3441"/>
+                      </a:solidFill>
+                      <a:prstDash val="solid"/>
+                      <a:round/>
+                      <a:headEnd type="none" w="med" len="med"/>
+                      <a:tailEnd type="none" w="med" len="med"/>
+                    </a:lnR>
+                    <a:lnT w="12700" cap="flat" cmpd="sng" algn="ctr">
+                      <a:solidFill>
+                        <a:srgbClr val="2A3441"/>
+                      </a:solidFill>
+                      <a:prstDash val="solid"/>
+                      <a:round/>
+                      <a:headEnd type="none" w="med" len="med"/>
+                      <a:tailEnd type="none" w="med" len="med"/>
+                    </a:lnT>
+                    <a:lnB w="12700" cap="flat" cmpd="sng" algn="ctr">
+                      <a:solidFill>
+                        <a:srgbClr val="2A3441"/>
+                      </a:solidFill>
+                      <a:prstDash val="solid"/>
+                      <a:round/>
+                      <a:headEnd type="none" w="med" len="med"/>
+                      <a:tailEnd type="none" w="med" len="med"/>
+                    </a:lnB>
+                    <a:solidFill>
+                      <a:srgbClr val="39FF88"/>
+                    </a:solidFill>
+                  </a:tcPr>
+                </a:tc>
+              </a:tr>
+              <a:tr h="384048">
+                <a:tc>
+                  <a:txBody>
+                    <a:bodyPr/>
+                    <a:lstStyle/>
+                    <a:p>
+                      <a:pPr indent="0" marL="0">
+                        <a:buNone/>
+                      </a:pPr>
+                      <a:r>
+                        <a:rPr lang="en-US" sz="1300" dirty="0">
+                          <a:solidFill>
+                            <a:srgbClr val="E6EDF3"/>
+                          </a:solidFill>
+                          <a:latin typeface="Calibri" pitchFamily="34" charset="0"/>
+                          <a:ea typeface="Calibri" pitchFamily="34" charset="-122"/>
+                          <a:cs typeface="Calibri" pitchFamily="34" charset="-120"/>
+                        </a:rPr>
+                        <a:t>Rep 1 (clean)</a:t>
+                      </a:r>
+                      <a:endParaRPr lang="en-US" sz="1300" dirty="0">
+                        <a:latin typeface="Calibri" charset="0"/>
+                        <a:ea typeface="Calibri" charset="0"/>
+                        <a:cs typeface="Calibri" charset="0"/>
+                      </a:endParaRPr>
+                    </a:p>
+                  </a:txBody>
+                  <a:tcPr marL="91440" marR="91440" marT="45720" marB="45720">
+                    <a:lnL w="12700" cap="flat" cmpd="sng" algn="ctr">
+                      <a:solidFill>
+                        <a:srgbClr val="2A3441"/>
+                      </a:solidFill>
+                      <a:prstDash val="solid"/>
+                      <a:round/>
+                      <a:headEnd type="none" w="med" len="med"/>
+                      <a:tailEnd type="none" w="med" len="med"/>
+                    </a:lnL>
+                    <a:lnR w="12700" cap="flat" cmpd="sng" algn="ctr">
+                      <a:solidFill>
+                        <a:srgbClr val="2A3441"/>
+                      </a:solidFill>
+                      <a:prstDash val="solid"/>
+                      <a:round/>
+                      <a:headEnd type="none" w="med" len="med"/>
+                      <a:tailEnd type="none" w="med" len="med"/>
+                    </a:lnR>
+                    <a:lnT w="12700" cap="flat" cmpd="sng" algn="ctr">
+                      <a:solidFill>
+                        <a:srgbClr val="2A3441"/>
+                      </a:solidFill>
+                      <a:prstDash val="solid"/>
+                      <a:round/>
+                      <a:headEnd type="none" w="med" len="med"/>
+                      <a:tailEnd type="none" w="med" len="med"/>
+                    </a:lnT>
+                    <a:lnB w="12700" cap="flat" cmpd="sng" algn="ctr">
+                      <a:solidFill>
+                        <a:srgbClr val="2A3441"/>
+                      </a:solidFill>
+                      <a:prstDash val="solid"/>
+                      <a:round/>
+                      <a:headEnd type="none" w="med" len="med"/>
+                      <a:tailEnd type="none" w="med" len="med"/>
+                    </a:lnB>
+                    <a:solidFill>
+                      <a:srgbClr val="141B24"/>
+                    </a:solidFill>
+                  </a:tcPr>
+                </a:tc>
+                <a:tc>
+                  <a:txBody>
+                    <a:bodyPr/>
+                    <a:lstStyle/>
+                    <a:p>
+                      <a:pPr indent="0" marL="0">
+                        <a:buNone/>
+                      </a:pPr>
+                      <a:r>
+                        <a:rPr lang="en-US" sz="1300" dirty="0">
+                          <a:solidFill>
+                            <a:srgbClr val="E6EDF3"/>
+                          </a:solidFill>
+                          <a:latin typeface="Calibri" pitchFamily="34" charset="0"/>
+                          <a:ea typeface="Calibri" pitchFamily="34" charset="-122"/>
+                          <a:cs typeface="Calibri" pitchFamily="34" charset="-120"/>
+                        </a:rPr>
+                        <a:t>2.5</a:t>
+                      </a:r>
+                      <a:endParaRPr lang="en-US" sz="1300" dirty="0">
+                        <a:latin typeface="Calibri" charset="0"/>
+                        <a:ea typeface="Calibri" charset="0"/>
+                        <a:cs typeface="Calibri" charset="0"/>
+                      </a:endParaRPr>
+                    </a:p>
+                  </a:txBody>
+                  <a:tcPr marL="91440" marR="91440" marT="45720" marB="45720">
+                    <a:lnL w="12700" cap="flat" cmpd="sng" algn="ctr">
+                      <a:solidFill>
+                        <a:srgbClr val="2A3441"/>
+                      </a:solidFill>
+                      <a:prstDash val="solid"/>
+                      <a:round/>
+                      <a:headEnd type="none" w="med" len="med"/>
+                      <a:tailEnd type="none" w="med" len="med"/>
+                    </a:lnL>
+                    <a:lnR w="12700" cap="flat" cmpd="sng" algn="ctr">
+                      <a:solidFill>
+                        <a:srgbClr val="2A3441"/>
+                      </a:solidFill>
+                      <a:prstDash val="solid"/>
+                      <a:round/>
+                      <a:headEnd type="none" w="med" len="med"/>
+                      <a:tailEnd type="none" w="med" len="med"/>
+                    </a:lnR>
+                    <a:lnT w="12700" cap="flat" cmpd="sng" algn="ctr">
+                      <a:solidFill>
+                        <a:srgbClr val="2A3441"/>
+                      </a:solidFill>
+                      <a:prstDash val="solid"/>
+                      <a:round/>
+                      <a:headEnd type="none" w="med" len="med"/>
+                      <a:tailEnd type="none" w="med" len="med"/>
+                    </a:lnT>
+                    <a:lnB w="12700" cap="flat" cmpd="sng" algn="ctr">
+                      <a:solidFill>
+                        <a:srgbClr val="2A3441"/>
+                      </a:solidFill>
+                      <a:prstDash val="solid"/>
+                      <a:round/>
+                      <a:headEnd type="none" w="med" len="med"/>
+                      <a:tailEnd type="none" w="med" len="med"/>
+                    </a:lnB>
+                    <a:solidFill>
+                      <a:srgbClr val="141B24"/>
+                    </a:solidFill>
+                  </a:tcPr>
+                </a:tc>
+                <a:tc>
+                  <a:txBody>
+                    <a:bodyPr/>
+                    <a:lstStyle/>
+                    <a:p>
+                      <a:pPr indent="0" marL="0">
+                        <a:buNone/>
+                      </a:pPr>
+                      <a:r>
+                        <a:rPr lang="en-US" sz="1300" dirty="0">
+                          <a:solidFill>
+                            <a:srgbClr val="E6EDF3"/>
+                          </a:solidFill>
+                          <a:latin typeface="Calibri" pitchFamily="34" charset="0"/>
+                          <a:ea typeface="Calibri" pitchFamily="34" charset="-122"/>
+                          <a:cs typeface="Calibri" pitchFamily="34" charset="-120"/>
+                        </a:rPr>
+                        <a:t>14.2</a:t>
+                      </a:r>
+                      <a:endParaRPr lang="en-US" sz="1300" dirty="0">
+                        <a:latin typeface="Calibri" charset="0"/>
+                        <a:ea typeface="Calibri" charset="0"/>
+                        <a:cs typeface="Calibri" charset="0"/>
+                      </a:endParaRPr>
+                    </a:p>
+                  </a:txBody>
+                  <a:tcPr marL="91440" marR="91440" marT="45720" marB="45720">
+                    <a:lnL w="12700" cap="flat" cmpd="sng" algn="ctr">
+                      <a:solidFill>
+                        <a:srgbClr val="2A3441"/>
+                      </a:solidFill>
+                      <a:prstDash val="solid"/>
+                      <a:round/>
+                      <a:headEnd type="none" w="med" len="med"/>
+                      <a:tailEnd type="none" w="med" len="med"/>
+                    </a:lnL>
+                    <a:lnR w="12700" cap="flat" cmpd="sng" algn="ctr">
+                      <a:solidFill>
+                        <a:srgbClr val="2A3441"/>
+                      </a:solidFill>
+                      <a:prstDash val="solid"/>
+                      <a:round/>
+                      <a:headEnd type="none" w="med" len="med"/>
+                      <a:tailEnd type="none" w="med" len="med"/>
+                    </a:lnR>
+                    <a:lnT w="12700" cap="flat" cmpd="sng" algn="ctr">
+                      <a:solidFill>
+                        <a:srgbClr val="2A3441"/>
+                      </a:solidFill>
+                      <a:prstDash val="solid"/>
+                      <a:round/>
+                      <a:headEnd type="none" w="med" len="med"/>
+                      <a:tailEnd type="none" w="med" len="med"/>
+                    </a:lnT>
+                    <a:lnB w="12700" cap="flat" cmpd="sng" algn="ctr">
+                      <a:solidFill>
+                        <a:srgbClr val="2A3441"/>
+                      </a:solidFill>
+                      <a:prstDash val="solid"/>
+                      <a:round/>
+                      <a:headEnd type="none" w="med" len="med"/>
+                      <a:tailEnd type="none" w="med" len="med"/>
+                    </a:lnB>
+                    <a:solidFill>
+                      <a:srgbClr val="141B24"/>
+                    </a:solidFill>
+                  </a:tcPr>
+                </a:tc>
+                <a:tc>
+                  <a:txBody>
+                    <a:bodyPr/>
+                    <a:lstStyle/>
+                    <a:p>
+                      <a:pPr indent="0" marL="0">
+                        <a:buNone/>
+                      </a:pPr>
+                      <a:r>
+                        <a:rPr lang="en-US" sz="1300" dirty="0">
+                          <a:solidFill>
+                            <a:srgbClr val="E6EDF3"/>
+                          </a:solidFill>
+                          <a:latin typeface="Calibri" pitchFamily="34" charset="0"/>
+                          <a:ea typeface="Calibri" pitchFamily="34" charset="-122"/>
+                          <a:cs typeface="Calibri" pitchFamily="34" charset="-120"/>
+                        </a:rPr>
+                        <a:t>12.4</a:t>
+                      </a:r>
+                      <a:endParaRPr lang="en-US" sz="1300" dirty="0">
+                        <a:latin typeface="Calibri" charset="0"/>
+                        <a:ea typeface="Calibri" charset="0"/>
+                        <a:cs typeface="Calibri" charset="0"/>
+                      </a:endParaRPr>
+                    </a:p>
+                  </a:txBody>
+                  <a:tcPr marL="91440" marR="91440" marT="45720" marB="45720">
+                    <a:lnL w="12700" cap="flat" cmpd="sng" algn="ctr">
+                      <a:solidFill>
+                        <a:srgbClr val="2A3441"/>
+                      </a:solidFill>
+                      <a:prstDash val="solid"/>
+                      <a:round/>
+                      <a:headEnd type="none" w="med" len="med"/>
+                      <a:tailEnd type="none" w="med" len="med"/>
+                    </a:lnL>
+                    <a:lnR w="12700" cap="flat" cmpd="sng" algn="ctr">
+                      <a:solidFill>
+                        <a:srgbClr val="2A3441"/>
+                      </a:solidFill>
+                      <a:prstDash val="solid"/>
+                      <a:round/>
+                      <a:headEnd type="none" w="med" len="med"/>
+                      <a:tailEnd type="none" w="med" len="med"/>
+                    </a:lnR>
+                    <a:lnT w="12700" cap="flat" cmpd="sng" algn="ctr">
+                      <a:solidFill>
+                        <a:srgbClr val="2A3441"/>
+                      </a:solidFill>
+                      <a:prstDash val="solid"/>
+                      <a:round/>
+                      <a:headEnd type="none" w="med" len="med"/>
+                      <a:tailEnd type="none" w="med" len="med"/>
+                    </a:lnT>
+                    <a:lnB w="12700" cap="flat" cmpd="sng" algn="ctr">
+                      <a:solidFill>
+                        <a:srgbClr val="2A3441"/>
+                      </a:solidFill>
+                      <a:prstDash val="solid"/>
+                      <a:round/>
+                      <a:headEnd type="none" w="med" len="med"/>
+                      <a:tailEnd type="none" w="med" len="med"/>
+                    </a:lnB>
+                    <a:solidFill>
+                      <a:srgbClr val="141B24"/>
+                    </a:solidFill>
+                  </a:tcPr>
+                </a:tc>
+                <a:tc>
+                  <a:txBody>
+                    <a:bodyPr/>
+                    <a:lstStyle/>
+                    <a:p>
+                      <a:pPr indent="0" marL="0">
+                        <a:buNone/>
+                      </a:pPr>
+                      <a:r>
+                        <a:rPr lang="en-US" sz="1300" dirty="0">
+                          <a:solidFill>
+                            <a:srgbClr val="E6EDF3"/>
+                          </a:solidFill>
+                          <a:latin typeface="Calibri" pitchFamily="34" charset="0"/>
+                          <a:ea typeface="Calibri" pitchFamily="34" charset="-122"/>
+                          <a:cs typeface="Calibri" pitchFamily="34" charset="-120"/>
+                        </a:rPr>
+                        <a:t>6.4</a:t>
+                      </a:r>
+                      <a:endParaRPr lang="en-US" sz="1300" dirty="0">
+                        <a:latin typeface="Calibri" charset="0"/>
+                        <a:ea typeface="Calibri" charset="0"/>
+                        <a:cs typeface="Calibri" charset="0"/>
+                      </a:endParaRPr>
+                    </a:p>
+                  </a:txBody>
+                  <a:tcPr marL="91440" marR="91440" marT="45720" marB="45720">
+                    <a:lnL w="12700" cap="flat" cmpd="sng" algn="ctr">
+                      <a:solidFill>
+                        <a:srgbClr val="2A3441"/>
+                      </a:solidFill>
+                      <a:prstDash val="solid"/>
+                      <a:round/>
+                      <a:headEnd type="none" w="med" len="med"/>
+                      <a:tailEnd type="none" w="med" len="med"/>
+                    </a:lnL>
+                    <a:lnR w="12700" cap="flat" cmpd="sng" algn="ctr">
+                      <a:solidFill>
+                        <a:srgbClr val="2A3441"/>
+                      </a:solidFill>
+                      <a:prstDash val="solid"/>
+                      <a:round/>
+                      <a:headEnd type="none" w="med" len="med"/>
+                      <a:tailEnd type="none" w="med" len="med"/>
+                    </a:lnR>
+                    <a:lnT w="12700" cap="flat" cmpd="sng" algn="ctr">
+                      <a:solidFill>
+                        <a:srgbClr val="2A3441"/>
+                      </a:solidFill>
+                      <a:prstDash val="solid"/>
+                      <a:round/>
+                      <a:headEnd type="none" w="med" len="med"/>
+                      <a:tailEnd type="none" w="med" len="med"/>
+                    </a:lnT>
+                    <a:lnB w="12700" cap="flat" cmpd="sng" algn="ctr">
+                      <a:solidFill>
+                        <a:srgbClr val="2A3441"/>
+                      </a:solidFill>
+                      <a:prstDash val="solid"/>
+                      <a:round/>
+                      <a:headEnd type="none" w="med" len="med"/>
+                      <a:tailEnd type="none" w="med" len="med"/>
+                    </a:lnB>
+                    <a:solidFill>
+                      <a:srgbClr val="141B24"/>
+                    </a:solidFill>
+                  </a:tcPr>
+                </a:tc>
+                <a:tc>
+                  <a:txBody>
+                    <a:bodyPr/>
+                    <a:lstStyle/>
+                    <a:p>
+                      <a:pPr indent="0" marL="0">
+                        <a:buNone/>
+                      </a:pPr>
+                      <a:r>
+                        <a:rPr lang="en-US" sz="1300" dirty="0">
+                          <a:solidFill>
+                            <a:srgbClr val="E6EDF3"/>
+                          </a:solidFill>
+                          <a:latin typeface="Calibri" pitchFamily="34" charset="0"/>
+                          <a:ea typeface="Calibri" pitchFamily="34" charset="-122"/>
+                          <a:cs typeface="Calibri" pitchFamily="34" charset="-120"/>
+                        </a:rPr>
+                        <a:t>4.7</a:t>
+                      </a:r>
+                      <a:endParaRPr lang="en-US" sz="1300" dirty="0">
+                        <a:latin typeface="Calibri" charset="0"/>
+                        <a:ea typeface="Calibri" charset="0"/>
+                        <a:cs typeface="Calibri" charset="0"/>
+                      </a:endParaRPr>
+                    </a:p>
+                  </a:txBody>
+                  <a:tcPr marL="91440" marR="91440" marT="45720" marB="45720">
+                    <a:lnL w="12700" cap="flat" cmpd="sng" algn="ctr">
+                      <a:solidFill>
+                        <a:srgbClr val="2A3441"/>
+                      </a:solidFill>
+                      <a:prstDash val="solid"/>
+                      <a:round/>
+                      <a:headEnd type="none" w="med" len="med"/>
+                      <a:tailEnd type="none" w="med" len="med"/>
+                    </a:lnL>
+                    <a:lnR w="12700" cap="flat" cmpd="sng" algn="ctr">
+                      <a:solidFill>
+                        <a:srgbClr val="2A3441"/>
+                      </a:solidFill>
+                      <a:prstDash val="solid"/>
+                      <a:round/>
+                      <a:headEnd type="none" w="med" len="med"/>
+                      <a:tailEnd type="none" w="med" len="med"/>
+                    </a:lnR>
+                    <a:lnT w="12700" cap="flat" cmpd="sng" algn="ctr">
+                      <a:solidFill>
+                        <a:srgbClr val="2A3441"/>
+                      </a:solidFill>
+                      <a:prstDash val="solid"/>
+                      <a:round/>
+                      <a:headEnd type="none" w="med" len="med"/>
+                      <a:tailEnd type="none" w="med" len="med"/>
+                    </a:lnT>
+                    <a:lnB w="12700" cap="flat" cmpd="sng" algn="ctr">
+                      <a:solidFill>
+                        <a:srgbClr val="2A3441"/>
+                      </a:solidFill>
+                      <a:prstDash val="solid"/>
+                      <a:round/>
+                      <a:headEnd type="none" w="med" len="med"/>
+                      <a:tailEnd type="none" w="med" len="med"/>
+                    </a:lnB>
+                    <a:solidFill>
+                      <a:srgbClr val="141B24"/>
+                    </a:solidFill>
+                  </a:tcPr>
+                </a:tc>
+              </a:tr>
+              <a:tr h="384048">
+                <a:tc>
+                  <a:txBody>
+                    <a:bodyPr/>
+                    <a:lstStyle/>
+                    <a:p>
+                      <a:pPr indent="0" marL="0">
+                        <a:buNone/>
+                      </a:pPr>
+                      <a:r>
+                        <a:rPr lang="en-US" sz="1300" dirty="0">
+                          <a:solidFill>
+                            <a:srgbClr val="E6EDF3"/>
+                          </a:solidFill>
+                          <a:latin typeface="Calibri" pitchFamily="34" charset="0"/>
+                          <a:ea typeface="Calibri" pitchFamily="34" charset="-122"/>
+                          <a:cs typeface="Calibri" pitchFamily="34" charset="-120"/>
+                        </a:rPr>
+                        <a:t>Rep 2 (clean)</a:t>
+                      </a:r>
+                      <a:endParaRPr lang="en-US" sz="1300" dirty="0">
+                        <a:latin typeface="Calibri" charset="0"/>
+                        <a:ea typeface="Calibri" charset="0"/>
+                        <a:cs typeface="Calibri" charset="0"/>
+                      </a:endParaRPr>
+                    </a:p>
+                  </a:txBody>
+                  <a:tcPr marL="91440" marR="91440" marT="45720" marB="45720">
+                    <a:lnL w="12700" cap="flat" cmpd="sng" algn="ctr">
+                      <a:solidFill>
+                        <a:srgbClr val="2A3441"/>
+                      </a:solidFill>
+                      <a:prstDash val="solid"/>
+                      <a:round/>
+                      <a:headEnd type="none" w="med" len="med"/>
+                      <a:tailEnd type="none" w="med" len="med"/>
+                    </a:lnL>
+                    <a:lnR w="12700" cap="flat" cmpd="sng" algn="ctr">
+                      <a:solidFill>
+                        <a:srgbClr val="2A3441"/>
+                      </a:solidFill>
+                      <a:prstDash val="solid"/>
+                      <a:round/>
+                      <a:headEnd type="none" w="med" len="med"/>
+                      <a:tailEnd type="none" w="med" len="med"/>
+                    </a:lnR>
+                    <a:lnT w="12700" cap="flat" cmpd="sng" algn="ctr">
+                      <a:solidFill>
+                        <a:srgbClr val="2A3441"/>
+                      </a:solidFill>
+                      <a:prstDash val="solid"/>
+                      <a:round/>
+                      <a:headEnd type="none" w="med" len="med"/>
+                      <a:tailEnd type="none" w="med" len="med"/>
+                    </a:lnT>
+                    <a:lnB w="12700" cap="flat" cmpd="sng" algn="ctr">
+                      <a:solidFill>
+                        <a:srgbClr val="2A3441"/>
+                      </a:solidFill>
+                      <a:prstDash val="solid"/>
+                      <a:round/>
+                      <a:headEnd type="none" w="med" len="med"/>
+                      <a:tailEnd type="none" w="med" len="med"/>
+                    </a:lnB>
+                    <a:solidFill>
+                      <a:srgbClr val="141B24"/>
+                    </a:solidFill>
+                  </a:tcPr>
+                </a:tc>
+                <a:tc>
+                  <a:txBody>
+                    <a:bodyPr/>
+                    <a:lstStyle/>
+                    <a:p>
+                      <a:pPr indent="0" marL="0">
+                        <a:buNone/>
+                      </a:pPr>
+                      <a:r>
+                        <a:rPr lang="en-US" sz="1300" dirty="0">
+                          <a:solidFill>
+                            <a:srgbClr val="E6EDF3"/>
+                          </a:solidFill>
+                          <a:latin typeface="Calibri" pitchFamily="34" charset="0"/>
+                          <a:ea typeface="Calibri" pitchFamily="34" charset="-122"/>
+                          <a:cs typeface="Calibri" pitchFamily="34" charset="-120"/>
+                        </a:rPr>
+                        <a:t>2.0</a:t>
+                      </a:r>
+                      <a:endParaRPr lang="en-US" sz="1300" dirty="0">
+                        <a:latin typeface="Calibri" charset="0"/>
+                        <a:ea typeface="Calibri" charset="0"/>
+                        <a:cs typeface="Calibri" charset="0"/>
+                      </a:endParaRPr>
+                    </a:p>
+                  </a:txBody>
+                  <a:tcPr marL="91440" marR="91440" marT="45720" marB="45720">
+                    <a:lnL w="12700" cap="flat" cmpd="sng" algn="ctr">
+                      <a:solidFill>
+                        <a:srgbClr val="2A3441"/>
+                      </a:solidFill>
+                      <a:prstDash val="solid"/>
+                      <a:round/>
+                      <a:headEnd type="none" w="med" len="med"/>
+                      <a:tailEnd type="none" w="med" len="med"/>
+                    </a:lnL>
+                    <a:lnR w="12700" cap="flat" cmpd="sng" algn="ctr">
+                      <a:solidFill>
+                        <a:srgbClr val="2A3441"/>
+                      </a:solidFill>
+                      <a:prstDash val="solid"/>
+                      <a:round/>
+                      <a:headEnd type="none" w="med" len="med"/>
+                      <a:tailEnd type="none" w="med" len="med"/>
+                    </a:lnR>
+                    <a:lnT w="12700" cap="flat" cmpd="sng" algn="ctr">
+                      <a:solidFill>
+                        <a:srgbClr val="2A3441"/>
+                      </a:solidFill>
+                      <a:prstDash val="solid"/>
+                      <a:round/>
+                      <a:headEnd type="none" w="med" len="med"/>
+                      <a:tailEnd type="none" w="med" len="med"/>
+                    </a:lnT>
+                    <a:lnB w="12700" cap="flat" cmpd="sng" algn="ctr">
+                      <a:solidFill>
+                        <a:srgbClr val="2A3441"/>
+                      </a:solidFill>
+                      <a:prstDash val="solid"/>
+                      <a:round/>
+                      <a:headEnd type="none" w="med" len="med"/>
+                      <a:tailEnd type="none" w="med" len="med"/>
+                    </a:lnB>
+                    <a:solidFill>
+                      <a:srgbClr val="141B24"/>
+                    </a:solidFill>
+                  </a:tcPr>
+                </a:tc>
+                <a:tc>
+                  <a:txBody>
+                    <a:bodyPr/>
+                    <a:lstStyle/>
+                    <a:p>
+                      <a:pPr indent="0" marL="0">
+                        <a:buNone/>
+                      </a:pPr>
+                      <a:r>
+                        <a:rPr lang="en-US" sz="1300" dirty="0">
+                          <a:solidFill>
+                            <a:srgbClr val="E6EDF3"/>
+                          </a:solidFill>
+                          <a:latin typeface="Calibri" pitchFamily="34" charset="0"/>
+                          <a:ea typeface="Calibri" pitchFamily="34" charset="-122"/>
+                          <a:cs typeface="Calibri" pitchFamily="34" charset="-120"/>
+                        </a:rPr>
+                        <a:t>12.0</a:t>
+                      </a:r>
+                      <a:endParaRPr lang="en-US" sz="1300" dirty="0">
+                        <a:latin typeface="Calibri" charset="0"/>
+                        <a:ea typeface="Calibri" charset="0"/>
+                        <a:cs typeface="Calibri" charset="0"/>
+                      </a:endParaRPr>
+                    </a:p>
+                  </a:txBody>
+                  <a:tcPr marL="91440" marR="91440" marT="45720" marB="45720">
+                    <a:lnL w="12700" cap="flat" cmpd="sng" algn="ctr">
+                      <a:solidFill>
+                        <a:srgbClr val="2A3441"/>
+                      </a:solidFill>
+                      <a:prstDash val="solid"/>
+                      <a:round/>
+                      <a:headEnd type="none" w="med" len="med"/>
+                      <a:tailEnd type="none" w="med" len="med"/>
+                    </a:lnL>
+                    <a:lnR w="12700" cap="flat" cmpd="sng" algn="ctr">
+                      <a:solidFill>
+                        <a:srgbClr val="2A3441"/>
+                      </a:solidFill>
+                      <a:prstDash val="solid"/>
+                      <a:round/>
+                      <a:headEnd type="none" w="med" len="med"/>
+                      <a:tailEnd type="none" w="med" len="med"/>
+                    </a:lnR>
+                    <a:lnT w="12700" cap="flat" cmpd="sng" algn="ctr">
+                      <a:solidFill>
+                        <a:srgbClr val="2A3441"/>
+                      </a:solidFill>
+                      <a:prstDash val="solid"/>
+                      <a:round/>
+                      <a:headEnd type="none" w="med" len="med"/>
+                      <a:tailEnd type="none" w="med" len="med"/>
+                    </a:lnT>
+                    <a:lnB w="12700" cap="flat" cmpd="sng" algn="ctr">
+                      <a:solidFill>
+                        <a:srgbClr val="2A3441"/>
+                      </a:solidFill>
+                      <a:prstDash val="solid"/>
+                      <a:round/>
+                      <a:headEnd type="none" w="med" len="med"/>
+                      <a:tailEnd type="none" w="med" len="med"/>
+                    </a:lnB>
+                    <a:solidFill>
+                      <a:srgbClr val="141B24"/>
+                    </a:solidFill>
+                  </a:tcPr>
+                </a:tc>
+                <a:tc>
+                  <a:txBody>
+                    <a:bodyPr/>
+                    <a:lstStyle/>
+                    <a:p>
+                      <a:pPr indent="0" marL="0">
+                        <a:buNone/>
+                      </a:pPr>
+                      <a:r>
+                        <a:rPr lang="en-US" sz="1300" dirty="0">
+                          <a:solidFill>
+                            <a:srgbClr val="E6EDF3"/>
+                          </a:solidFill>
+                          <a:latin typeface="Calibri" pitchFamily="34" charset="0"/>
+                          <a:ea typeface="Calibri" pitchFamily="34" charset="-122"/>
+                          <a:cs typeface="Calibri" pitchFamily="34" charset="-120"/>
+                        </a:rPr>
+                        <a:t>-</a:t>
+                      </a:r>
+                      <a:endParaRPr lang="en-US" sz="1300" dirty="0">
+                        <a:latin typeface="Calibri" charset="0"/>
+                        <a:ea typeface="Calibri" charset="0"/>
+                        <a:cs typeface="Calibri" charset="0"/>
+                      </a:endParaRPr>
+                    </a:p>
+                  </a:txBody>
+                  <a:tcPr marL="91440" marR="91440" marT="45720" marB="45720">
+                    <a:lnL w="12700" cap="flat" cmpd="sng" algn="ctr">
+                      <a:solidFill>
+                        <a:srgbClr val="2A3441"/>
+                      </a:solidFill>
+                      <a:prstDash val="solid"/>
+                      <a:round/>
+                      <a:headEnd type="none" w="med" len="med"/>
+                      <a:tailEnd type="none" w="med" len="med"/>
+                    </a:lnL>
+                    <a:lnR w="12700" cap="flat" cmpd="sng" algn="ctr">
+                      <a:solidFill>
+                        <a:srgbClr val="2A3441"/>
+                      </a:solidFill>
+                      <a:prstDash val="solid"/>
+                      <a:round/>
+                      <a:headEnd type="none" w="med" len="med"/>
+                      <a:tailEnd type="none" w="med" len="med"/>
+                    </a:lnR>
+                    <a:lnT w="12700" cap="flat" cmpd="sng" algn="ctr">
+                      <a:solidFill>
+                        <a:srgbClr val="2A3441"/>
+                      </a:solidFill>
+                      <a:prstDash val="solid"/>
+                      <a:round/>
+                      <a:headEnd type="none" w="med" len="med"/>
+                      <a:tailEnd type="none" w="med" len="med"/>
+                    </a:lnT>
+                    <a:lnB w="12700" cap="flat" cmpd="sng" algn="ctr">
+                      <a:solidFill>
+                        <a:srgbClr val="2A3441"/>
+                      </a:solidFill>
+                      <a:prstDash val="solid"/>
+                      <a:round/>
+                      <a:headEnd type="none" w="med" len="med"/>
+                      <a:tailEnd type="none" w="med" len="med"/>
+                    </a:lnB>
+                    <a:solidFill>
+                      <a:srgbClr val="141B24"/>
+                    </a:solidFill>
+                  </a:tcPr>
+                </a:tc>
+                <a:tc>
+                  <a:txBody>
+                    <a:bodyPr/>
+                    <a:lstStyle/>
+                    <a:p>
+                      <a:pPr indent="0" marL="0">
+                        <a:buNone/>
+                      </a:pPr>
+                      <a:r>
+                        <a:rPr lang="en-US" sz="1300" dirty="0">
+                          <a:solidFill>
+                            <a:srgbClr val="E6EDF3"/>
+                          </a:solidFill>
+                          <a:latin typeface="Calibri" pitchFamily="34" charset="0"/>
+                          <a:ea typeface="Calibri" pitchFamily="34" charset="-122"/>
+                          <a:cs typeface="Calibri" pitchFamily="34" charset="-120"/>
+                        </a:rPr>
+                        <a:t>-</a:t>
+                      </a:r>
+                      <a:endParaRPr lang="en-US" sz="1300" dirty="0">
+                        <a:latin typeface="Calibri" charset="0"/>
+                        <a:ea typeface="Calibri" charset="0"/>
+                        <a:cs typeface="Calibri" charset="0"/>
+                      </a:endParaRPr>
+                    </a:p>
+                  </a:txBody>
+                  <a:tcPr marL="91440" marR="91440" marT="45720" marB="45720">
+                    <a:lnL w="12700" cap="flat" cmpd="sng" algn="ctr">
+                      <a:solidFill>
+                        <a:srgbClr val="2A3441"/>
+                      </a:solidFill>
+                      <a:prstDash val="solid"/>
+                      <a:round/>
+                      <a:headEnd type="none" w="med" len="med"/>
+                      <a:tailEnd type="none" w="med" len="med"/>
+                    </a:lnL>
+                    <a:lnR w="12700" cap="flat" cmpd="sng" algn="ctr">
+                      <a:solidFill>
+                        <a:srgbClr val="2A3441"/>
+                      </a:solidFill>
+                      <a:prstDash val="solid"/>
+                      <a:round/>
+                      <a:headEnd type="none" w="med" len="med"/>
+                      <a:tailEnd type="none" w="med" len="med"/>
+                    </a:lnR>
+                    <a:lnT w="12700" cap="flat" cmpd="sng" algn="ctr">
+                      <a:solidFill>
+                        <a:srgbClr val="2A3441"/>
+                      </a:solidFill>
+                      <a:prstDash val="solid"/>
+                      <a:round/>
+                      <a:headEnd type="none" w="med" len="med"/>
+                      <a:tailEnd type="none" w="med" len="med"/>
+                    </a:lnT>
+                    <a:lnB w="12700" cap="flat" cmpd="sng" algn="ctr">
+                      <a:solidFill>
+                        <a:srgbClr val="2A3441"/>
+                      </a:solidFill>
+                      <a:prstDash val="solid"/>
+                      <a:round/>
+                      <a:headEnd type="none" w="med" len="med"/>
+                      <a:tailEnd type="none" w="med" len="med"/>
+                    </a:lnB>
+                    <a:solidFill>
+                      <a:srgbClr val="141B24"/>
+                    </a:solidFill>
+                  </a:tcPr>
+                </a:tc>
+                <a:tc>
+                  <a:txBody>
+                    <a:bodyPr/>
+                    <a:lstStyle/>
+                    <a:p>
+                      <a:pPr indent="0" marL="0">
+                        <a:buNone/>
+                      </a:pPr>
+                      <a:r>
+                        <a:rPr lang="en-US" sz="1300" dirty="0">
+                          <a:solidFill>
+                            <a:srgbClr val="E6EDF3"/>
+                          </a:solidFill>
+                          <a:latin typeface="Calibri" pitchFamily="34" charset="0"/>
+                          <a:ea typeface="Calibri" pitchFamily="34" charset="-122"/>
+                          <a:cs typeface="Calibri" pitchFamily="34" charset="-120"/>
+                        </a:rPr>
+                        <a:t>-</a:t>
+                      </a:r>
+                      <a:endParaRPr lang="en-US" sz="1300" dirty="0">
+                        <a:latin typeface="Calibri" charset="0"/>
+                        <a:ea typeface="Calibri" charset="0"/>
+                        <a:cs typeface="Calibri" charset="0"/>
+                      </a:endParaRPr>
+                    </a:p>
+                  </a:txBody>
+                  <a:tcPr marL="91440" marR="91440" marT="45720" marB="45720">
+                    <a:lnL w="12700" cap="flat" cmpd="sng" algn="ctr">
+                      <a:solidFill>
+                        <a:srgbClr val="2A3441"/>
+                      </a:solidFill>
+                      <a:prstDash val="solid"/>
+                      <a:round/>
+                      <a:headEnd type="none" w="med" len="med"/>
+                      <a:tailEnd type="none" w="med" len="med"/>
+                    </a:lnL>
+                    <a:lnR w="12700" cap="flat" cmpd="sng" algn="ctr">
+                      <a:solidFill>
+                        <a:srgbClr val="2A3441"/>
+                      </a:solidFill>
+                      <a:prstDash val="solid"/>
+                      <a:round/>
+                      <a:headEnd type="none" w="med" len="med"/>
+                      <a:tailEnd type="none" w="med" len="med"/>
+                    </a:lnR>
+                    <a:lnT w="12700" cap="flat" cmpd="sng" algn="ctr">
+                      <a:solidFill>
+                        <a:srgbClr val="2A3441"/>
+                      </a:solidFill>
+                      <a:prstDash val="solid"/>
+                      <a:round/>
+                      <a:headEnd type="none" w="med" len="med"/>
+                      <a:tailEnd type="none" w="med" len="med"/>
+                    </a:lnT>
+                    <a:lnB w="12700" cap="flat" cmpd="sng" algn="ctr">
+                      <a:solidFill>
+                        <a:srgbClr val="2A3441"/>
+                      </a:solidFill>
+                      <a:prstDash val="solid"/>
+                      <a:round/>
+                      <a:headEnd type="none" w="med" len="med"/>
+                      <a:tailEnd type="none" w="med" len="med"/>
+                    </a:lnB>
+                    <a:solidFill>
+                      <a:srgbClr val="141B24"/>
+                    </a:solidFill>
+                  </a:tcPr>
+                </a:tc>
+              </a:tr>
+              <a:tr h="384048">
+                <a:tc>
+                  <a:txBody>
+                    <a:bodyPr/>
+                    <a:lstStyle/>
+                    <a:p>
+                      <a:pPr indent="0" marL="0">
+                        <a:buNone/>
+                      </a:pPr>
+                      <a:r>
+                        <a:rPr lang="en-US" sz="1300" dirty="0">
+                          <a:solidFill>
+                            <a:srgbClr val="E6EDF3"/>
+                          </a:solidFill>
+                          <a:latin typeface="Calibri" pitchFamily="34" charset="0"/>
+                          <a:ea typeface="Calibri" pitchFamily="34" charset="-122"/>
+                          <a:cs typeface="Calibri" pitchFamily="34" charset="-120"/>
+                        </a:rPr>
+                        <a:t>Rep 3</a:t>
+                      </a:r>
+                      <a:endParaRPr lang="en-US" sz="1300" dirty="0">
+                        <a:latin typeface="Calibri" charset="0"/>
+                        <a:ea typeface="Calibri" charset="0"/>
+                        <a:cs typeface="Calibri" charset="0"/>
+                      </a:endParaRPr>
+                    </a:p>
+                  </a:txBody>
+                  <a:tcPr marL="91440" marR="91440" marT="45720" marB="45720">
+                    <a:lnL w="12700" cap="flat" cmpd="sng" algn="ctr">
+                      <a:solidFill>
+                        <a:srgbClr val="2A3441"/>
+                      </a:solidFill>
+                      <a:prstDash val="solid"/>
+                      <a:round/>
+                      <a:headEnd type="none" w="med" len="med"/>
+                      <a:tailEnd type="none" w="med" len="med"/>
+                    </a:lnL>
+                    <a:lnR w="12700" cap="flat" cmpd="sng" algn="ctr">
+                      <a:solidFill>
+                        <a:srgbClr val="2A3441"/>
+                      </a:solidFill>
+                      <a:prstDash val="solid"/>
+                      <a:round/>
+                      <a:headEnd type="none" w="med" len="med"/>
+                      <a:tailEnd type="none" w="med" len="med"/>
+                    </a:lnR>
+                    <a:lnT w="12700" cap="flat" cmpd="sng" algn="ctr">
+                      <a:solidFill>
+                        <a:srgbClr val="2A3441"/>
+                      </a:solidFill>
+                      <a:prstDash val="solid"/>
+                      <a:round/>
+                      <a:headEnd type="none" w="med" len="med"/>
+                      <a:tailEnd type="none" w="med" len="med"/>
+                    </a:lnT>
+                    <a:lnB w="12700" cap="flat" cmpd="sng" algn="ctr">
+                      <a:solidFill>
+                        <a:srgbClr val="2A3441"/>
+                      </a:solidFill>
+                      <a:prstDash val="solid"/>
+                      <a:round/>
+                      <a:headEnd type="none" w="med" len="med"/>
+                      <a:tailEnd type="none" w="med" len="med"/>
+                    </a:lnB>
+                    <a:solidFill>
+                      <a:srgbClr val="141B24"/>
+                    </a:solidFill>
+                  </a:tcPr>
+                </a:tc>
+                <a:tc>
+                  <a:txBody>
+                    <a:bodyPr/>
+                    <a:lstStyle/>
+                    <a:p>
+                      <a:pPr indent="0" marL="0">
+                        <a:buNone/>
+                      </a:pPr>
+                      <a:r>
+                        <a:rPr lang="en-US" sz="1300" dirty="0">
+                          <a:solidFill>
+                            <a:srgbClr val="E6EDF3"/>
+                          </a:solidFill>
+                          <a:latin typeface="Calibri" pitchFamily="34" charset="0"/>
+                          <a:ea typeface="Calibri" pitchFamily="34" charset="-122"/>
+                          <a:cs typeface="Calibri" pitchFamily="34" charset="-120"/>
+                        </a:rPr>
+                        <a:t>39.3</a:t>
+                      </a:r>
+                      <a:endParaRPr lang="en-US" sz="1300" dirty="0">
+                        <a:latin typeface="Calibri" charset="0"/>
+                        <a:ea typeface="Calibri" charset="0"/>
+                        <a:cs typeface="Calibri" charset="0"/>
+                      </a:endParaRPr>
+                    </a:p>
+                  </a:txBody>
+                  <a:tcPr marL="91440" marR="91440" marT="45720" marB="45720">
+                    <a:lnL w="12700" cap="flat" cmpd="sng" algn="ctr">
+                      <a:solidFill>
+                        <a:srgbClr val="2A3441"/>
+                      </a:solidFill>
+                      <a:prstDash val="solid"/>
+                      <a:round/>
+                      <a:headEnd type="none" w="med" len="med"/>
+                      <a:tailEnd type="none" w="med" len="med"/>
+                    </a:lnL>
+                    <a:lnR w="12700" cap="flat" cmpd="sng" algn="ctr">
+                      <a:solidFill>
+                        <a:srgbClr val="2A3441"/>
+                      </a:solidFill>
+                      <a:prstDash val="solid"/>
+                      <a:round/>
+                      <a:headEnd type="none" w="med" len="med"/>
+                      <a:tailEnd type="none" w="med" len="med"/>
+                    </a:lnR>
+                    <a:lnT w="12700" cap="flat" cmpd="sng" algn="ctr">
+                      <a:solidFill>
+                        <a:srgbClr val="2A3441"/>
+                      </a:solidFill>
+                      <a:prstDash val="solid"/>
+                      <a:round/>
+                      <a:headEnd type="none" w="med" len="med"/>
+                      <a:tailEnd type="none" w="med" len="med"/>
+                    </a:lnT>
+                    <a:lnB w="12700" cap="flat" cmpd="sng" algn="ctr">
+                      <a:solidFill>
+                        <a:srgbClr val="2A3441"/>
+                      </a:solidFill>
+                      <a:prstDash val="solid"/>
+                      <a:round/>
+                      <a:headEnd type="none" w="med" len="med"/>
+                      <a:tailEnd type="none" w="med" len="med"/>
+                    </a:lnB>
+                    <a:solidFill>
+                      <a:srgbClr val="141B24"/>
+                    </a:solidFill>
+                  </a:tcPr>
+                </a:tc>
+                <a:tc>
+                  <a:txBody>
+                    <a:bodyPr/>
+                    <a:lstStyle/>
+                    <a:p>
+                      <a:pPr indent="0" marL="0">
+                        <a:buNone/>
+                      </a:pPr>
+                      <a:r>
+                        <a:rPr lang="en-US" sz="1300" dirty="0">
+                          <a:solidFill>
+                            <a:srgbClr val="E6EDF3"/>
+                          </a:solidFill>
+                          <a:latin typeface="Calibri" pitchFamily="34" charset="0"/>
+                          <a:ea typeface="Calibri" pitchFamily="34" charset="-122"/>
+                          <a:cs typeface="Calibri" pitchFamily="34" charset="-120"/>
+                        </a:rPr>
+                        <a:t>-</a:t>
+                      </a:r>
+                      <a:endParaRPr lang="en-US" sz="1300" dirty="0">
+                        <a:latin typeface="Calibri" charset="0"/>
+                        <a:ea typeface="Calibri" charset="0"/>
+                        <a:cs typeface="Calibri" charset="0"/>
+                      </a:endParaRPr>
+                    </a:p>
+                  </a:txBody>
+                  <a:tcPr marL="91440" marR="91440" marT="45720" marB="45720">
+                    <a:lnL w="12700" cap="flat" cmpd="sng" algn="ctr">
+                      <a:solidFill>
+                        <a:srgbClr val="2A3441"/>
+                      </a:solidFill>
+                      <a:prstDash val="solid"/>
+                      <a:round/>
+                      <a:headEnd type="none" w="med" len="med"/>
+                      <a:tailEnd type="none" w="med" len="med"/>
+                    </a:lnL>
+                    <a:lnR w="12700" cap="flat" cmpd="sng" algn="ctr">
+                      <a:solidFill>
+                        <a:srgbClr val="2A3441"/>
+                      </a:solidFill>
+                      <a:prstDash val="solid"/>
+                      <a:round/>
+                      <a:headEnd type="none" w="med" len="med"/>
+                      <a:tailEnd type="none" w="med" len="med"/>
+                    </a:lnR>
+                    <a:lnT w="12700" cap="flat" cmpd="sng" algn="ctr">
+                      <a:solidFill>
+                        <a:srgbClr val="2A3441"/>
+                      </a:solidFill>
+                      <a:prstDash val="solid"/>
+                      <a:round/>
+                      <a:headEnd type="none" w="med" len="med"/>
+                      <a:tailEnd type="none" w="med" len="med"/>
+                    </a:lnT>
+                    <a:lnB w="12700" cap="flat" cmpd="sng" algn="ctr">
+                      <a:solidFill>
+                        <a:srgbClr val="2A3441"/>
+                      </a:solidFill>
+                      <a:prstDash val="solid"/>
+                      <a:round/>
+                      <a:headEnd type="none" w="med" len="med"/>
+                      <a:tailEnd type="none" w="med" len="med"/>
+                    </a:lnB>
+                    <a:solidFill>
+                      <a:srgbClr val="141B24"/>
+                    </a:solidFill>
+                  </a:tcPr>
+                </a:tc>
+                <a:tc>
+                  <a:txBody>
+                    <a:bodyPr/>
+                    <a:lstStyle/>
+                    <a:p>
+                      <a:pPr indent="0" marL="0">
+                        <a:buNone/>
+                      </a:pPr>
+                      <a:r>
+                        <a:rPr lang="en-US" sz="1300" dirty="0">
+                          <a:solidFill>
+                            <a:srgbClr val="E6EDF3"/>
+                          </a:solidFill>
+                          <a:latin typeface="Calibri" pitchFamily="34" charset="0"/>
+                          <a:ea typeface="Calibri" pitchFamily="34" charset="-122"/>
+                          <a:cs typeface="Calibri" pitchFamily="34" charset="-120"/>
+                        </a:rPr>
+                        <a:t>240</a:t>
+                      </a:r>
+                      <a:endParaRPr lang="en-US" sz="1300" dirty="0">
+                        <a:latin typeface="Calibri" charset="0"/>
+                        <a:ea typeface="Calibri" charset="0"/>
+                        <a:cs typeface="Calibri" charset="0"/>
+                      </a:endParaRPr>
+                    </a:p>
+                  </a:txBody>
+                  <a:tcPr marL="91440" marR="91440" marT="45720" marB="45720">
+                    <a:lnL w="12700" cap="flat" cmpd="sng" algn="ctr">
+                      <a:solidFill>
+                        <a:srgbClr val="2A3441"/>
+                      </a:solidFill>
+                      <a:prstDash val="solid"/>
+                      <a:round/>
+                      <a:headEnd type="none" w="med" len="med"/>
+                      <a:tailEnd type="none" w="med" len="med"/>
+                    </a:lnL>
+                    <a:lnR w="12700" cap="flat" cmpd="sng" algn="ctr">
+                      <a:solidFill>
+                        <a:srgbClr val="2A3441"/>
+                      </a:solidFill>
+                      <a:prstDash val="solid"/>
+                      <a:round/>
+                      <a:headEnd type="none" w="med" len="med"/>
+                      <a:tailEnd type="none" w="med" len="med"/>
+                    </a:lnR>
+                    <a:lnT w="12700" cap="flat" cmpd="sng" algn="ctr">
+                      <a:solidFill>
+                        <a:srgbClr val="2A3441"/>
+                      </a:solidFill>
+                      <a:prstDash val="solid"/>
+                      <a:round/>
+                      <a:headEnd type="none" w="med" len="med"/>
+                      <a:tailEnd type="none" w="med" len="med"/>
+                    </a:lnT>
+                    <a:lnB w="12700" cap="flat" cmpd="sng" algn="ctr">
+                      <a:solidFill>
+                        <a:srgbClr val="2A3441"/>
+                      </a:solidFill>
+                      <a:prstDash val="solid"/>
+                      <a:round/>
+                      <a:headEnd type="none" w="med" len="med"/>
+                      <a:tailEnd type="none" w="med" len="med"/>
+                    </a:lnB>
+                    <a:solidFill>
+                      <a:srgbClr val="141B24"/>
+                    </a:solidFill>
+                  </a:tcPr>
+                </a:tc>
+                <a:tc>
+                  <a:txBody>
+                    <a:bodyPr/>
+                    <a:lstStyle/>
+                    <a:p>
+                      <a:pPr indent="0" marL="0">
+                        <a:buNone/>
+                      </a:pPr>
+                      <a:r>
+                        <a:rPr lang="en-US" sz="1300" dirty="0">
+                          <a:solidFill>
+                            <a:srgbClr val="E6EDF3"/>
+                          </a:solidFill>
+                          <a:latin typeface="Calibri" pitchFamily="34" charset="0"/>
+                          <a:ea typeface="Calibri" pitchFamily="34" charset="-122"/>
+                          <a:cs typeface="Calibri" pitchFamily="34" charset="-120"/>
+                        </a:rPr>
+                        <a:t>53</a:t>
+                      </a:r>
+                      <a:endParaRPr lang="en-US" sz="1300" dirty="0">
+                        <a:latin typeface="Calibri" charset="0"/>
+                        <a:ea typeface="Calibri" charset="0"/>
+                        <a:cs typeface="Calibri" charset="0"/>
+                      </a:endParaRPr>
+                    </a:p>
+                  </a:txBody>
+                  <a:tcPr marL="91440" marR="91440" marT="45720" marB="45720">
+                    <a:lnL w="12700" cap="flat" cmpd="sng" algn="ctr">
+                      <a:solidFill>
+                        <a:srgbClr val="2A3441"/>
+                      </a:solidFill>
+                      <a:prstDash val="solid"/>
+                      <a:round/>
+                      <a:headEnd type="none" w="med" len="med"/>
+                      <a:tailEnd type="none" w="med" len="med"/>
+                    </a:lnL>
+                    <a:lnR w="12700" cap="flat" cmpd="sng" algn="ctr">
+                      <a:solidFill>
+                        <a:srgbClr val="2A3441"/>
+                      </a:solidFill>
+                      <a:prstDash val="solid"/>
+                      <a:round/>
+                      <a:headEnd type="none" w="med" len="med"/>
+                      <a:tailEnd type="none" w="med" len="med"/>
+                    </a:lnR>
+                    <a:lnT w="12700" cap="flat" cmpd="sng" algn="ctr">
+                      <a:solidFill>
+                        <a:srgbClr val="2A3441"/>
+                      </a:solidFill>
+                      <a:prstDash val="solid"/>
+                      <a:round/>
+                      <a:headEnd type="none" w="med" len="med"/>
+                      <a:tailEnd type="none" w="med" len="med"/>
+                    </a:lnT>
+                    <a:lnB w="12700" cap="flat" cmpd="sng" algn="ctr">
+                      <a:solidFill>
+                        <a:srgbClr val="2A3441"/>
+                      </a:solidFill>
+                      <a:prstDash val="solid"/>
+                      <a:round/>
+                      <a:headEnd type="none" w="med" len="med"/>
+                      <a:tailEnd type="none" w="med" len="med"/>
+                    </a:lnB>
+                    <a:solidFill>
+                      <a:srgbClr val="141B24"/>
+                    </a:solidFill>
+                  </a:tcPr>
+                </a:tc>
+                <a:tc>
+                  <a:txBody>
+                    <a:bodyPr/>
+                    <a:lstStyle/>
+                    <a:p>
+                      <a:pPr indent="0" marL="0">
+                        <a:buNone/>
+                      </a:pPr>
+                      <a:r>
+                        <a:rPr lang="en-US" sz="1300" dirty="0">
+                          <a:solidFill>
+                            <a:srgbClr val="E6EDF3"/>
+                          </a:solidFill>
+                          <a:latin typeface="Calibri" pitchFamily="34" charset="0"/>
+                          <a:ea typeface="Calibri" pitchFamily="34" charset="-122"/>
+                          <a:cs typeface="Calibri" pitchFamily="34" charset="-120"/>
+                        </a:rPr>
+                        <a:t>71</a:t>
+                      </a:r>
+                      <a:endParaRPr lang="en-US" sz="1300" dirty="0">
+                        <a:latin typeface="Calibri" charset="0"/>
+                        <a:ea typeface="Calibri" charset="0"/>
+                        <a:cs typeface="Calibri" charset="0"/>
+                      </a:endParaRPr>
+                    </a:p>
+                  </a:txBody>
+                  <a:tcPr marL="91440" marR="91440" marT="45720" marB="45720">
+                    <a:lnL w="12700" cap="flat" cmpd="sng" algn="ctr">
+                      <a:solidFill>
+                        <a:srgbClr val="2A3441"/>
+                      </a:solidFill>
+                      <a:prstDash val="solid"/>
+                      <a:round/>
+                      <a:headEnd type="none" w="med" len="med"/>
+                      <a:tailEnd type="none" w="med" len="med"/>
+                    </a:lnL>
+                    <a:lnR w="12700" cap="flat" cmpd="sng" algn="ctr">
+                      <a:solidFill>
+                        <a:srgbClr val="2A3441"/>
+                      </a:solidFill>
+                      <a:prstDash val="solid"/>
+                      <a:round/>
+                      <a:headEnd type="none" w="med" len="med"/>
+                      <a:tailEnd type="none" w="med" len="med"/>
+                    </a:lnR>
+                    <a:lnT w="12700" cap="flat" cmpd="sng" algn="ctr">
+                      <a:solidFill>
+                        <a:srgbClr val="2A3441"/>
+                      </a:solidFill>
+                      <a:prstDash val="solid"/>
+                      <a:round/>
+                      <a:headEnd type="none" w="med" len="med"/>
+                      <a:tailEnd type="none" w="med" len="med"/>
+                    </a:lnT>
+                    <a:lnB w="12700" cap="flat" cmpd="sng" algn="ctr">
+                      <a:solidFill>
+                        <a:srgbClr val="2A3441"/>
+                      </a:solidFill>
+                      <a:prstDash val="solid"/>
+                      <a:round/>
+                      <a:headEnd type="none" w="med" len="med"/>
+                      <a:tailEnd type="none" w="med" len="med"/>
+                    </a:lnB>
+                    <a:solidFill>
+                      <a:srgbClr val="141B24"/>
+                    </a:solidFill>
+                  </a:tcPr>
+                </a:tc>
+              </a:tr>
+              <a:tr h="384048">
+                <a:tc>
+                  <a:txBody>
+                    <a:bodyPr/>
+                    <a:lstStyle/>
+                    <a:p>
+                      <a:pPr indent="0" marL="0">
+                        <a:buNone/>
+                      </a:pPr>
+                      <a:r>
+                        <a:rPr lang="en-US" sz="1300" dirty="0">
+                          <a:solidFill>
+                            <a:srgbClr val="E6EDF3"/>
+                          </a:solidFill>
+                          <a:latin typeface="Calibri" pitchFamily="34" charset="0"/>
+                          <a:ea typeface="Calibri" pitchFamily="34" charset="-122"/>
+                          <a:cs typeface="Calibri" pitchFamily="34" charset="-120"/>
+                        </a:rPr>
+                        <a:t>Rep 4</a:t>
+                      </a:r>
+                      <a:endParaRPr lang="en-US" sz="1300" dirty="0">
+                        <a:latin typeface="Calibri" charset="0"/>
+                        <a:ea typeface="Calibri" charset="0"/>
+                        <a:cs typeface="Calibri" charset="0"/>
+                      </a:endParaRPr>
+                    </a:p>
+                  </a:txBody>
+                  <a:tcPr marL="91440" marR="91440" marT="45720" marB="45720">
+                    <a:lnL w="12700" cap="flat" cmpd="sng" algn="ctr">
+                      <a:solidFill>
+                        <a:srgbClr val="2A3441"/>
+                      </a:solidFill>
+                      <a:prstDash val="solid"/>
+                      <a:round/>
+                      <a:headEnd type="none" w="med" len="med"/>
+                      <a:tailEnd type="none" w="med" len="med"/>
+                    </a:lnL>
+                    <a:lnR w="12700" cap="flat" cmpd="sng" algn="ctr">
+                      <a:solidFill>
+                        <a:srgbClr val="2A3441"/>
+                      </a:solidFill>
+                      <a:prstDash val="solid"/>
+                      <a:round/>
+                      <a:headEnd type="none" w="med" len="med"/>
+                      <a:tailEnd type="none" w="med" len="med"/>
+                    </a:lnR>
+                    <a:lnT w="12700" cap="flat" cmpd="sng" algn="ctr">
+                      <a:solidFill>
+                        <a:srgbClr val="2A3441"/>
+                      </a:solidFill>
+                      <a:prstDash val="solid"/>
+                      <a:round/>
+                      <a:headEnd type="none" w="med" len="med"/>
+                      <a:tailEnd type="none" w="med" len="med"/>
+                    </a:lnT>
+                    <a:lnB w="12700" cap="flat" cmpd="sng" algn="ctr">
+                      <a:solidFill>
+                        <a:srgbClr val="2A3441"/>
+                      </a:solidFill>
+                      <a:prstDash val="solid"/>
+                      <a:round/>
+                      <a:headEnd type="none" w="med" len="med"/>
+                      <a:tailEnd type="none" w="med" len="med"/>
+                    </a:lnB>
+                    <a:solidFill>
+                      <a:srgbClr val="141B24"/>
+                    </a:solidFill>
+                  </a:tcPr>
+                </a:tc>
+                <a:tc>
+                  <a:txBody>
+                    <a:bodyPr/>
+                    <a:lstStyle/>
+                    <a:p>
+                      <a:pPr indent="0" marL="0">
+                        <a:buNone/>
+                      </a:pPr>
+                      <a:r>
+                        <a:rPr lang="en-US" sz="1300" dirty="0">
+                          <a:solidFill>
+                            <a:srgbClr val="E6EDF3"/>
+                          </a:solidFill>
+                          <a:latin typeface="Calibri" pitchFamily="34" charset="0"/>
+                          <a:ea typeface="Calibri" pitchFamily="34" charset="-122"/>
+                          <a:cs typeface="Calibri" pitchFamily="34" charset="-120"/>
+                        </a:rPr>
+                        <a:t>11.4</a:t>
+                      </a:r>
+                      <a:endParaRPr lang="en-US" sz="1300" dirty="0">
+                        <a:latin typeface="Calibri" charset="0"/>
+                        <a:ea typeface="Calibri" charset="0"/>
+                        <a:cs typeface="Calibri" charset="0"/>
+                      </a:endParaRPr>
+                    </a:p>
+                  </a:txBody>
+                  <a:tcPr marL="91440" marR="91440" marT="45720" marB="45720">
+                    <a:lnL w="12700" cap="flat" cmpd="sng" algn="ctr">
+                      <a:solidFill>
+                        <a:srgbClr val="2A3441"/>
+                      </a:solidFill>
+                      <a:prstDash val="solid"/>
+                      <a:round/>
+                      <a:headEnd type="none" w="med" len="med"/>
+                      <a:tailEnd type="none" w="med" len="med"/>
+                    </a:lnL>
+                    <a:lnR w="12700" cap="flat" cmpd="sng" algn="ctr">
+                      <a:solidFill>
+                        <a:srgbClr val="2A3441"/>
+                      </a:solidFill>
+                      <a:prstDash val="solid"/>
+                      <a:round/>
+                      <a:headEnd type="none" w="med" len="med"/>
+                      <a:tailEnd type="none" w="med" len="med"/>
+                    </a:lnR>
+                    <a:lnT w="12700" cap="flat" cmpd="sng" algn="ctr">
+                      <a:solidFill>
+                        <a:srgbClr val="2A3441"/>
+                      </a:solidFill>
+                      <a:prstDash val="solid"/>
+                      <a:round/>
+                      <a:headEnd type="none" w="med" len="med"/>
+                      <a:tailEnd type="none" w="med" len="med"/>
+                    </a:lnT>
+                    <a:lnB w="12700" cap="flat" cmpd="sng" algn="ctr">
+                      <a:solidFill>
+                        <a:srgbClr val="2A3441"/>
+                      </a:solidFill>
+                      <a:prstDash val="solid"/>
+                      <a:round/>
+                      <a:headEnd type="none" w="med" len="med"/>
+                      <a:tailEnd type="none" w="med" len="med"/>
+                    </a:lnB>
+                    <a:solidFill>
+                      <a:srgbClr val="141B24"/>
+                    </a:solidFill>
+                  </a:tcPr>
+                </a:tc>
+                <a:tc>
+                  <a:txBody>
+                    <a:bodyPr/>
+                    <a:lstStyle/>
+                    <a:p>
+                      <a:pPr indent="0" marL="0">
+                        <a:buNone/>
+                      </a:pPr>
+                      <a:r>
+                        <a:rPr lang="en-US" sz="1300" dirty="0">
+                          <a:solidFill>
+                            <a:srgbClr val="E6EDF3"/>
+                          </a:solidFill>
+                          <a:latin typeface="Calibri" pitchFamily="34" charset="0"/>
+                          <a:ea typeface="Calibri" pitchFamily="34" charset="-122"/>
+                          <a:cs typeface="Calibri" pitchFamily="34" charset="-120"/>
+                        </a:rPr>
+                        <a:t>87</a:t>
+                      </a:r>
+                      <a:endParaRPr lang="en-US" sz="1300" dirty="0">
+                        <a:latin typeface="Calibri" charset="0"/>
+                        <a:ea typeface="Calibri" charset="0"/>
+                        <a:cs typeface="Calibri" charset="0"/>
+                      </a:endParaRPr>
+                    </a:p>
+                  </a:txBody>
+                  <a:tcPr marL="91440" marR="91440" marT="45720" marB="45720">
+                    <a:lnL w="12700" cap="flat" cmpd="sng" algn="ctr">
+                      <a:solidFill>
+                        <a:srgbClr val="2A3441"/>
+                      </a:solidFill>
+                      <a:prstDash val="solid"/>
+                      <a:round/>
+                      <a:headEnd type="none" w="med" len="med"/>
+                      <a:tailEnd type="none" w="med" len="med"/>
+                    </a:lnL>
+                    <a:lnR w="12700" cap="flat" cmpd="sng" algn="ctr">
+                      <a:solidFill>
+                        <a:srgbClr val="2A3441"/>
+                      </a:solidFill>
+                      <a:prstDash val="solid"/>
+                      <a:round/>
+                      <a:headEnd type="none" w="med" len="med"/>
+                      <a:tailEnd type="none" w="med" len="med"/>
+                    </a:lnR>
+                    <a:lnT w="12700" cap="flat" cmpd="sng" algn="ctr">
+                      <a:solidFill>
+                        <a:srgbClr val="2A3441"/>
+                      </a:solidFill>
+                      <a:prstDash val="solid"/>
+                      <a:round/>
+                      <a:headEnd type="none" w="med" len="med"/>
+                      <a:tailEnd type="none" w="med" len="med"/>
+                    </a:lnT>
+                    <a:lnB w="12700" cap="flat" cmpd="sng" algn="ctr">
+                      <a:solidFill>
+                        <a:srgbClr val="2A3441"/>
+                      </a:solidFill>
+                      <a:prstDash val="solid"/>
+                      <a:round/>
+                      <a:headEnd type="none" w="med" len="med"/>
+                      <a:tailEnd type="none" w="med" len="med"/>
+                    </a:lnB>
+                    <a:solidFill>
+                      <a:srgbClr val="141B24"/>
+                    </a:solidFill>
+                  </a:tcPr>
+                </a:tc>
+                <a:tc>
+                  <a:txBody>
+                    <a:bodyPr/>
+                    <a:lstStyle/>
+                    <a:p>
+                      <a:pPr indent="0" marL="0">
+                        <a:buNone/>
+                      </a:pPr>
+                      <a:r>
+                        <a:rPr lang="en-US" sz="1300" dirty="0">
+                          <a:solidFill>
+                            <a:srgbClr val="E6EDF3"/>
+                          </a:solidFill>
+                          <a:latin typeface="Calibri" pitchFamily="34" charset="0"/>
+                          <a:ea typeface="Calibri" pitchFamily="34" charset="-122"/>
+                          <a:cs typeface="Calibri" pitchFamily="34" charset="-120"/>
+                        </a:rPr>
+                        <a:t>218</a:t>
+                      </a:r>
+                      <a:endParaRPr lang="en-US" sz="1300" dirty="0">
+                        <a:latin typeface="Calibri" charset="0"/>
+                        <a:ea typeface="Calibri" charset="0"/>
+                        <a:cs typeface="Calibri" charset="0"/>
+                      </a:endParaRPr>
+                    </a:p>
+                  </a:txBody>
+                  <a:tcPr marL="91440" marR="91440" marT="45720" marB="45720">
+                    <a:lnL w="12700" cap="flat" cmpd="sng" algn="ctr">
+                      <a:solidFill>
+                        <a:srgbClr val="2A3441"/>
+                      </a:solidFill>
+                      <a:prstDash val="solid"/>
+                      <a:round/>
+                      <a:headEnd type="none" w="med" len="med"/>
+                      <a:tailEnd type="none" w="med" len="med"/>
+                    </a:lnL>
+                    <a:lnR w="12700" cap="flat" cmpd="sng" algn="ctr">
+                      <a:solidFill>
+                        <a:srgbClr val="2A3441"/>
+                      </a:solidFill>
+                      <a:prstDash val="solid"/>
+                      <a:round/>
+                      <a:headEnd type="none" w="med" len="med"/>
+                      <a:tailEnd type="none" w="med" len="med"/>
+                    </a:lnR>
+                    <a:lnT w="12700" cap="flat" cmpd="sng" algn="ctr">
+                      <a:solidFill>
+                        <a:srgbClr val="2A3441"/>
+                      </a:solidFill>
+                      <a:prstDash val="solid"/>
+                      <a:round/>
+                      <a:headEnd type="none" w="med" len="med"/>
+                      <a:tailEnd type="none" w="med" len="med"/>
+                    </a:lnT>
+                    <a:lnB w="12700" cap="flat" cmpd="sng" algn="ctr">
+                      <a:solidFill>
+                        <a:srgbClr val="2A3441"/>
+                      </a:solidFill>
+                      <a:prstDash val="solid"/>
+                      <a:round/>
+                      <a:headEnd type="none" w="med" len="med"/>
+                      <a:tailEnd type="none" w="med" len="med"/>
+                    </a:lnB>
+                    <a:solidFill>
+                      <a:srgbClr val="141B24"/>
+                    </a:solidFill>
+                  </a:tcPr>
+                </a:tc>
+                <a:tc>
+                  <a:txBody>
+                    <a:bodyPr/>
+                    <a:lstStyle/>
+                    <a:p>
+                      <a:pPr indent="0" marL="0">
+                        <a:buNone/>
+                      </a:pPr>
+                      <a:r>
+                        <a:rPr lang="en-US" sz="1300" dirty="0">
+                          <a:solidFill>
+                            <a:srgbClr val="E6EDF3"/>
+                          </a:solidFill>
+                          <a:latin typeface="Calibri" pitchFamily="34" charset="0"/>
+                          <a:ea typeface="Calibri" pitchFamily="34" charset="-122"/>
+                          <a:cs typeface="Calibri" pitchFamily="34" charset="-120"/>
+                        </a:rPr>
+                        <a:t>69</a:t>
+                      </a:r>
+                      <a:endParaRPr lang="en-US" sz="1300" dirty="0">
+                        <a:latin typeface="Calibri" charset="0"/>
+                        <a:ea typeface="Calibri" charset="0"/>
+                        <a:cs typeface="Calibri" charset="0"/>
+                      </a:endParaRPr>
+                    </a:p>
+                  </a:txBody>
+                  <a:tcPr marL="91440" marR="91440" marT="45720" marB="45720">
+                    <a:lnL w="12700" cap="flat" cmpd="sng" algn="ctr">
+                      <a:solidFill>
+                        <a:srgbClr val="2A3441"/>
+                      </a:solidFill>
+                      <a:prstDash val="solid"/>
+                      <a:round/>
+                      <a:headEnd type="none" w="med" len="med"/>
+                      <a:tailEnd type="none" w="med" len="med"/>
+                    </a:lnL>
+                    <a:lnR w="12700" cap="flat" cmpd="sng" algn="ctr">
+                      <a:solidFill>
+                        <a:srgbClr val="2A3441"/>
+                      </a:solidFill>
+                      <a:prstDash val="solid"/>
+                      <a:round/>
+                      <a:headEnd type="none" w="med" len="med"/>
+                      <a:tailEnd type="none" w="med" len="med"/>
+                    </a:lnR>
+                    <a:lnT w="12700" cap="flat" cmpd="sng" algn="ctr">
+                      <a:solidFill>
+                        <a:srgbClr val="2A3441"/>
+                      </a:solidFill>
+                      <a:prstDash val="solid"/>
+                      <a:round/>
+                      <a:headEnd type="none" w="med" len="med"/>
+                      <a:tailEnd type="none" w="med" len="med"/>
+                    </a:lnT>
+                    <a:lnB w="12700" cap="flat" cmpd="sng" algn="ctr">
+                      <a:solidFill>
+                        <a:srgbClr val="2A3441"/>
+                      </a:solidFill>
+                      <a:prstDash val="solid"/>
+                      <a:round/>
+                      <a:headEnd type="none" w="med" len="med"/>
+                      <a:tailEnd type="none" w="med" len="med"/>
+                    </a:lnB>
+                    <a:solidFill>
+                      <a:srgbClr val="141B24"/>
+                    </a:solidFill>
+                  </a:tcPr>
+                </a:tc>
+                <a:tc>
+                  <a:txBody>
+                    <a:bodyPr/>
+                    <a:lstStyle/>
+                    <a:p>
+                      <a:pPr indent="0" marL="0">
+                        <a:buNone/>
+                      </a:pPr>
+                      <a:r>
+                        <a:rPr lang="en-US" sz="1300" dirty="0">
+                          <a:solidFill>
+                            <a:srgbClr val="E6EDF3"/>
+                          </a:solidFill>
+                          <a:latin typeface="Calibri" pitchFamily="34" charset="0"/>
+                          <a:ea typeface="Calibri" pitchFamily="34" charset="-122"/>
+                          <a:cs typeface="Calibri" pitchFamily="34" charset="-120"/>
+                        </a:rPr>
+                        <a:t>111</a:t>
+                      </a:r>
+                      <a:endParaRPr lang="en-US" sz="1300" dirty="0">
+                        <a:latin typeface="Calibri" charset="0"/>
+                        <a:ea typeface="Calibri" charset="0"/>
+                        <a:cs typeface="Calibri" charset="0"/>
+                      </a:endParaRPr>
+                    </a:p>
+                  </a:txBody>
+                  <a:tcPr marL="91440" marR="91440" marT="45720" marB="45720">
+                    <a:lnL w="12700" cap="flat" cmpd="sng" algn="ctr">
+                      <a:solidFill>
+                        <a:srgbClr val="2A3441"/>
+                      </a:solidFill>
+                      <a:prstDash val="solid"/>
+                      <a:round/>
+                      <a:headEnd type="none" w="med" len="med"/>
+                      <a:tailEnd type="none" w="med" len="med"/>
+                    </a:lnL>
+                    <a:lnR w="12700" cap="flat" cmpd="sng" algn="ctr">
+                      <a:solidFill>
+                        <a:srgbClr val="2A3441"/>
+                      </a:solidFill>
+                      <a:prstDash val="solid"/>
+                      <a:round/>
+                      <a:headEnd type="none" w="med" len="med"/>
+                      <a:tailEnd type="none" w="med" len="med"/>
+                    </a:lnR>
+                    <a:lnT w="12700" cap="flat" cmpd="sng" algn="ctr">
+                      <a:solidFill>
+                        <a:srgbClr val="2A3441"/>
+                      </a:solidFill>
+                      <a:prstDash val="solid"/>
+                      <a:round/>
+                      <a:headEnd type="none" w="med" len="med"/>
+                      <a:tailEnd type="none" w="med" len="med"/>
+                    </a:lnT>
+                    <a:lnB w="12700" cap="flat" cmpd="sng" algn="ctr">
+                      <a:solidFill>
+                        <a:srgbClr val="2A3441"/>
+                      </a:solidFill>
+                      <a:prstDash val="solid"/>
+                      <a:round/>
+                      <a:headEnd type="none" w="med" len="med"/>
+                      <a:tailEnd type="none" w="med" len="med"/>
+                    </a:lnB>
+                    <a:solidFill>
+                      <a:srgbClr val="141B24"/>
+                    </a:solidFill>
+                  </a:tcPr>
+                </a:tc>
+              </a:tr>
+              <a:tr h="384048">
+                <a:tc>
+                  <a:txBody>
+                    <a:bodyPr/>
+                    <a:lstStyle/>
+                    <a:p>
+                      <a:pPr indent="0" marL="0">
+                        <a:buNone/>
+                      </a:pPr>
+                      <a:r>
+                        <a:rPr lang="en-US" sz="1300" dirty="0">
+                          <a:solidFill>
+                            <a:srgbClr val="E6EDF3"/>
+                          </a:solidFill>
+                          <a:latin typeface="Calibri" pitchFamily="34" charset="0"/>
+                          <a:ea typeface="Calibri" pitchFamily="34" charset="-122"/>
+                          <a:cs typeface="Calibri" pitchFamily="34" charset="-120"/>
+                        </a:rPr>
+                        <a:t>Rep 5</a:t>
+                      </a:r>
+                      <a:endParaRPr lang="en-US" sz="1300" dirty="0">
+                        <a:latin typeface="Calibri" charset="0"/>
+                        <a:ea typeface="Calibri" charset="0"/>
+                        <a:cs typeface="Calibri" charset="0"/>
+                      </a:endParaRPr>
+                    </a:p>
+                  </a:txBody>
+                  <a:tcPr marL="91440" marR="91440" marT="45720" marB="45720">
+                    <a:lnL w="12700" cap="flat" cmpd="sng" algn="ctr">
+                      <a:solidFill>
+                        <a:srgbClr val="2A3441"/>
+                      </a:solidFill>
+                      <a:prstDash val="solid"/>
+                      <a:round/>
+                      <a:headEnd type="none" w="med" len="med"/>
+                      <a:tailEnd type="none" w="med" len="med"/>
+                    </a:lnL>
+                    <a:lnR w="12700" cap="flat" cmpd="sng" algn="ctr">
+                      <a:solidFill>
+                        <a:srgbClr val="2A3441"/>
+                      </a:solidFill>
+                      <a:prstDash val="solid"/>
+                      <a:round/>
+                      <a:headEnd type="none" w="med" len="med"/>
+                      <a:tailEnd type="none" w="med" len="med"/>
+                    </a:lnR>
+                    <a:lnT w="12700" cap="flat" cmpd="sng" algn="ctr">
+                      <a:solidFill>
+                        <a:srgbClr val="2A3441"/>
+                      </a:solidFill>
+                      <a:prstDash val="solid"/>
+                      <a:round/>
+                      <a:headEnd type="none" w="med" len="med"/>
+                      <a:tailEnd type="none" w="med" len="med"/>
+                    </a:lnT>
+                    <a:lnB w="12700" cap="flat" cmpd="sng" algn="ctr">
+                      <a:solidFill>
+                        <a:srgbClr val="2A3441"/>
+                      </a:solidFill>
+                      <a:prstDash val="solid"/>
+                      <a:round/>
+                      <a:headEnd type="none" w="med" len="med"/>
+                      <a:tailEnd type="none" w="med" len="med"/>
+                    </a:lnB>
+                    <a:solidFill>
+                      <a:srgbClr val="141B24"/>
+                    </a:solidFill>
+                  </a:tcPr>
+                </a:tc>
+                <a:tc>
+                  <a:txBody>
+                    <a:bodyPr/>
+                    <a:lstStyle/>
+                    <a:p>
+                      <a:pPr indent="0" marL="0">
+                        <a:buNone/>
+                      </a:pPr>
+                      <a:r>
+                        <a:rPr lang="en-US" sz="1300" dirty="0">
+                          <a:solidFill>
+                            <a:srgbClr val="E6EDF3"/>
+                          </a:solidFill>
+                          <a:latin typeface="Calibri" pitchFamily="34" charset="0"/>
+                          <a:ea typeface="Calibri" pitchFamily="34" charset="-122"/>
+                          <a:cs typeface="Calibri" pitchFamily="34" charset="-120"/>
+                        </a:rPr>
+                        <a:t>50.9</a:t>
+                      </a:r>
+                      <a:endParaRPr lang="en-US" sz="1300" dirty="0">
+                        <a:latin typeface="Calibri" charset="0"/>
+                        <a:ea typeface="Calibri" charset="0"/>
+                        <a:cs typeface="Calibri" charset="0"/>
+                      </a:endParaRPr>
+                    </a:p>
+                  </a:txBody>
+                  <a:tcPr marL="91440" marR="91440" marT="45720" marB="45720">
+                    <a:lnL w="12700" cap="flat" cmpd="sng" algn="ctr">
+                      <a:solidFill>
+                        <a:srgbClr val="2A3441"/>
+                      </a:solidFill>
+                      <a:prstDash val="solid"/>
+                      <a:round/>
+                      <a:headEnd type="none" w="med" len="med"/>
+                      <a:tailEnd type="none" w="med" len="med"/>
+                    </a:lnL>
+                    <a:lnR w="12700" cap="flat" cmpd="sng" algn="ctr">
+                      <a:solidFill>
+                        <a:srgbClr val="2A3441"/>
+                      </a:solidFill>
+                      <a:prstDash val="solid"/>
+                      <a:round/>
+                      <a:headEnd type="none" w="med" len="med"/>
+                      <a:tailEnd type="none" w="med" len="med"/>
+                    </a:lnR>
+                    <a:lnT w="12700" cap="flat" cmpd="sng" algn="ctr">
+                      <a:solidFill>
+                        <a:srgbClr val="2A3441"/>
+                      </a:solidFill>
+                      <a:prstDash val="solid"/>
+                      <a:round/>
+                      <a:headEnd type="none" w="med" len="med"/>
+                      <a:tailEnd type="none" w="med" len="med"/>
+                    </a:lnT>
+                    <a:lnB w="12700" cap="flat" cmpd="sng" algn="ctr">
+                      <a:solidFill>
+                        <a:srgbClr val="2A3441"/>
+                      </a:solidFill>
+                      <a:prstDash val="solid"/>
+                      <a:round/>
+                      <a:headEnd type="none" w="med" len="med"/>
+                      <a:tailEnd type="none" w="med" len="med"/>
+                    </a:lnB>
+                    <a:solidFill>
+                      <a:srgbClr val="141B24"/>
+                    </a:solidFill>
+                  </a:tcPr>
+                </a:tc>
+                <a:tc>
+                  <a:txBody>
+                    <a:bodyPr/>
+                    <a:lstStyle/>
+                    <a:p>
+                      <a:pPr indent="0" marL="0">
+                        <a:buNone/>
+                      </a:pPr>
+                      <a:r>
+                        <a:rPr lang="en-US" sz="1300" dirty="0">
+                          <a:solidFill>
+                            <a:srgbClr val="E6EDF3"/>
+                          </a:solidFill>
+                          <a:latin typeface="Calibri" pitchFamily="34" charset="0"/>
+                          <a:ea typeface="Calibri" pitchFamily="34" charset="-122"/>
+                          <a:cs typeface="Calibri" pitchFamily="34" charset="-120"/>
+                        </a:rPr>
+                        <a:t>143</a:t>
+                      </a:r>
+                      <a:endParaRPr lang="en-US" sz="1300" dirty="0">
+                        <a:latin typeface="Calibri" charset="0"/>
+                        <a:ea typeface="Calibri" charset="0"/>
+                        <a:cs typeface="Calibri" charset="0"/>
+                      </a:endParaRPr>
+                    </a:p>
+                  </a:txBody>
+                  <a:tcPr marL="91440" marR="91440" marT="45720" marB="45720">
+                    <a:lnL w="12700" cap="flat" cmpd="sng" algn="ctr">
+                      <a:solidFill>
+                        <a:srgbClr val="2A3441"/>
+                      </a:solidFill>
+                      <a:prstDash val="solid"/>
+                      <a:round/>
+                      <a:headEnd type="none" w="med" len="med"/>
+                      <a:tailEnd type="none" w="med" len="med"/>
+                    </a:lnL>
+                    <a:lnR w="12700" cap="flat" cmpd="sng" algn="ctr">
+                      <a:solidFill>
+                        <a:srgbClr val="2A3441"/>
+                      </a:solidFill>
+                      <a:prstDash val="solid"/>
+                      <a:round/>
+                      <a:headEnd type="none" w="med" len="med"/>
+                      <a:tailEnd type="none" w="med" len="med"/>
+                    </a:lnR>
+                    <a:lnT w="12700" cap="flat" cmpd="sng" algn="ctr">
+                      <a:solidFill>
+                        <a:srgbClr val="2A3441"/>
+                      </a:solidFill>
+                      <a:prstDash val="solid"/>
+                      <a:round/>
+                      <a:headEnd type="none" w="med" len="med"/>
+                      <a:tailEnd type="none" w="med" len="med"/>
+                    </a:lnT>
+                    <a:lnB w="12700" cap="flat" cmpd="sng" algn="ctr">
+                      <a:solidFill>
+                        <a:srgbClr val="2A3441"/>
+                      </a:solidFill>
+                      <a:prstDash val="solid"/>
+                      <a:round/>
+                      <a:headEnd type="none" w="med" len="med"/>
+                      <a:tailEnd type="none" w="med" len="med"/>
+                    </a:lnB>
+                    <a:solidFill>
+                      <a:srgbClr val="141B24"/>
+                    </a:solidFill>
+                  </a:tcPr>
+                </a:tc>
+                <a:tc>
+                  <a:txBody>
+                    <a:bodyPr/>
+                    <a:lstStyle/>
+                    <a:p>
+                      <a:pPr indent="0" marL="0">
+                        <a:buNone/>
+                      </a:pPr>
+                      <a:r>
+                        <a:rPr lang="en-US" sz="1300" dirty="0">
+                          <a:solidFill>
+                            <a:srgbClr val="E6EDF3"/>
+                          </a:solidFill>
+                          <a:latin typeface="Calibri" pitchFamily="34" charset="0"/>
+                          <a:ea typeface="Calibri" pitchFamily="34" charset="-122"/>
+                          <a:cs typeface="Calibri" pitchFamily="34" charset="-120"/>
+                        </a:rPr>
+                        <a:t>167</a:t>
+                      </a:r>
+                      <a:endParaRPr lang="en-US" sz="1300" dirty="0">
+                        <a:latin typeface="Calibri" charset="0"/>
+                        <a:ea typeface="Calibri" charset="0"/>
+                        <a:cs typeface="Calibri" charset="0"/>
+                      </a:endParaRPr>
+                    </a:p>
+                  </a:txBody>
+                  <a:tcPr marL="91440" marR="91440" marT="45720" marB="45720">
+                    <a:lnL w="12700" cap="flat" cmpd="sng" algn="ctr">
+                      <a:solidFill>
+                        <a:srgbClr val="2A3441"/>
+                      </a:solidFill>
+                      <a:prstDash val="solid"/>
+                      <a:round/>
+                      <a:headEnd type="none" w="med" len="med"/>
+                      <a:tailEnd type="none" w="med" len="med"/>
+                    </a:lnL>
+                    <a:lnR w="12700" cap="flat" cmpd="sng" algn="ctr">
+                      <a:solidFill>
+                        <a:srgbClr val="2A3441"/>
+                      </a:solidFill>
+                      <a:prstDash val="solid"/>
+                      <a:round/>
+                      <a:headEnd type="none" w="med" len="med"/>
+                      <a:tailEnd type="none" w="med" len="med"/>
+                    </a:lnR>
+                    <a:lnT w="12700" cap="flat" cmpd="sng" algn="ctr">
+                      <a:solidFill>
+                        <a:srgbClr val="2A3441"/>
+                      </a:solidFill>
+                      <a:prstDash val="solid"/>
+                      <a:round/>
+                      <a:headEnd type="none" w="med" len="med"/>
+                      <a:tailEnd type="none" w="med" len="med"/>
+                    </a:lnT>
+                    <a:lnB w="12700" cap="flat" cmpd="sng" algn="ctr">
+                      <a:solidFill>
+                        <a:srgbClr val="2A3441"/>
+                      </a:solidFill>
+                      <a:prstDash val="solid"/>
+                      <a:round/>
+                      <a:headEnd type="none" w="med" len="med"/>
+                      <a:tailEnd type="none" w="med" len="med"/>
+                    </a:lnB>
+                    <a:solidFill>
+                      <a:srgbClr val="141B24"/>
+                    </a:solidFill>
+                  </a:tcPr>
+                </a:tc>
+                <a:tc>
+                  <a:txBody>
+                    <a:bodyPr/>
+                    <a:lstStyle/>
+                    <a:p>
+                      <a:pPr indent="0" marL="0">
+                        <a:buNone/>
+                      </a:pPr>
+                      <a:r>
+                        <a:rPr lang="en-US" sz="1300" dirty="0">
+                          <a:solidFill>
+                            <a:srgbClr val="E6EDF3"/>
+                          </a:solidFill>
+                          <a:latin typeface="Calibri" pitchFamily="34" charset="0"/>
+                          <a:ea typeface="Calibri" pitchFamily="34" charset="-122"/>
+                          <a:cs typeface="Calibri" pitchFamily="34" charset="-120"/>
+                        </a:rPr>
+                        <a:t>44</a:t>
+                      </a:r>
+                      <a:endParaRPr lang="en-US" sz="1300" dirty="0">
+                        <a:latin typeface="Calibri" charset="0"/>
+                        <a:ea typeface="Calibri" charset="0"/>
+                        <a:cs typeface="Calibri" charset="0"/>
+                      </a:endParaRPr>
+                    </a:p>
+                  </a:txBody>
+                  <a:tcPr marL="91440" marR="91440" marT="45720" marB="45720">
+                    <a:lnL w="12700" cap="flat" cmpd="sng" algn="ctr">
+                      <a:solidFill>
+                        <a:srgbClr val="2A3441"/>
+                      </a:solidFill>
+                      <a:prstDash val="solid"/>
+                      <a:round/>
+                      <a:headEnd type="none" w="med" len="med"/>
+                      <a:tailEnd type="none" w="med" len="med"/>
+                    </a:lnL>
+                    <a:lnR w="12700" cap="flat" cmpd="sng" algn="ctr">
+                      <a:solidFill>
+                        <a:srgbClr val="2A3441"/>
+                      </a:solidFill>
+                      <a:prstDash val="solid"/>
+                      <a:round/>
+                      <a:headEnd type="none" w="med" len="med"/>
+                      <a:tailEnd type="none" w="med" len="med"/>
+                    </a:lnR>
+                    <a:lnT w="12700" cap="flat" cmpd="sng" algn="ctr">
+                      <a:solidFill>
+                        <a:srgbClr val="2A3441"/>
+                      </a:solidFill>
+                      <a:prstDash val="solid"/>
+                      <a:round/>
+                      <a:headEnd type="none" w="med" len="med"/>
+                      <a:tailEnd type="none" w="med" len="med"/>
+                    </a:lnT>
+                    <a:lnB w="12700" cap="flat" cmpd="sng" algn="ctr">
+                      <a:solidFill>
+                        <a:srgbClr val="2A3441"/>
+                      </a:solidFill>
+                      <a:prstDash val="solid"/>
+                      <a:round/>
+                      <a:headEnd type="none" w="med" len="med"/>
+                      <a:tailEnd type="none" w="med" len="med"/>
+                    </a:lnB>
+                    <a:solidFill>
+                      <a:srgbClr val="141B24"/>
+                    </a:solidFill>
+                  </a:tcPr>
+                </a:tc>
+                <a:tc>
+                  <a:txBody>
+                    <a:bodyPr/>
+                    <a:lstStyle/>
+                    <a:p>
+                      <a:pPr indent="0" marL="0">
+                        <a:buNone/>
+                      </a:pPr>
+                      <a:r>
+                        <a:rPr lang="en-US" sz="1300" dirty="0">
+                          <a:solidFill>
+                            <a:srgbClr val="E6EDF3"/>
+                          </a:solidFill>
+                          <a:latin typeface="Calibri" pitchFamily="34" charset="0"/>
+                          <a:ea typeface="Calibri" pitchFamily="34" charset="-122"/>
+                          <a:cs typeface="Calibri" pitchFamily="34" charset="-120"/>
+                        </a:rPr>
+                        <a:t>32</a:t>
+                      </a:r>
+                      <a:endParaRPr lang="en-US" sz="1300" dirty="0">
+                        <a:latin typeface="Calibri" charset="0"/>
+                        <a:ea typeface="Calibri" charset="0"/>
+                        <a:cs typeface="Calibri" charset="0"/>
+                      </a:endParaRPr>
+                    </a:p>
+                  </a:txBody>
+                  <a:tcPr marL="91440" marR="91440" marT="45720" marB="45720">
+                    <a:lnL w="12700" cap="flat" cmpd="sng" algn="ctr">
+                      <a:solidFill>
+                        <a:srgbClr val="2A3441"/>
+                      </a:solidFill>
+                      <a:prstDash val="solid"/>
+                      <a:round/>
+                      <a:headEnd type="none" w="med" len="med"/>
+                      <a:tailEnd type="none" w="med" len="med"/>
+                    </a:lnL>
+                    <a:lnR w="12700" cap="flat" cmpd="sng" algn="ctr">
+                      <a:solidFill>
+                        <a:srgbClr val="2A3441"/>
+                      </a:solidFill>
+                      <a:prstDash val="solid"/>
+                      <a:round/>
+                      <a:headEnd type="none" w="med" len="med"/>
+                      <a:tailEnd type="none" w="med" len="med"/>
+                    </a:lnR>
+                    <a:lnT w="12700" cap="flat" cmpd="sng" algn="ctr">
+                      <a:solidFill>
+                        <a:srgbClr val="2A3441"/>
+                      </a:solidFill>
+                      <a:prstDash val="solid"/>
+                      <a:round/>
+                      <a:headEnd type="none" w="med" len="med"/>
+                      <a:tailEnd type="none" w="med" len="med"/>
+                    </a:lnT>
+                    <a:lnB w="12700" cap="flat" cmpd="sng" algn="ctr">
+                      <a:solidFill>
+                        <a:srgbClr val="2A3441"/>
+                      </a:solidFill>
+                      <a:prstDash val="solid"/>
+                      <a:round/>
+                      <a:headEnd type="none" w="med" len="med"/>
+                      <a:tailEnd type="none" w="med" len="med"/>
+                    </a:lnB>
+                    <a:solidFill>
+                      <a:srgbClr val="141B24"/>
+                    </a:solidFill>
+                  </a:tcPr>
+                </a:tc>
+              </a:tr>
+            </a:tbl>
+          </a:graphicData>
+        </a:graphic>
+      </p:graphicFrame>
+      <p:sp>
+        <p:nvSpPr>
+          <p:cNvPr id="5" name="Text 2"/>
+          <p:cNvSpPr/>
+          <p:nvPr/>
+        </p:nvSpPr>
+        <p:spPr>
+          <a:xfrm>
+            <a:off x="548640" y="3931920"/>
+            <a:ext cx="11064240" cy="2377440"/>
+          </a:xfrm>
+          <a:prstGeom prst="rect">
+            <a:avLst/>
+          </a:prstGeom>
+          <a:noFill/>
+          <a:ln/>
+        </p:spPr>
+        <p:txBody>
+          <a:bodyPr wrap="square" lIns="0" tIns="0" rIns="0" bIns="0" rtlCol="0" anchor="t"/>
+          <a:lstStyle/>
+          <a:p>
+            <a:pPr marL="342900" indent="-342900">
+              <a:spcAft>
+                <a:spcPts val="800"/>
+              </a:spcAft>
+              <a:buSzPct val="100000"/>
+              <a:buChar char="•"/>
+            </a:pPr>
+            <a:r>
+              <a:rPr lang="en-US" sz="1500" dirty="0">
+                <a:solidFill>
+                  <a:srgbClr val="E6EDF3"/>
+                </a:solidFill>
+                <a:latin typeface="Calibri" pitchFamily="34" charset="0"/>
+                <a:ea typeface="Calibri" pitchFamily="34" charset="-122"/>
+                <a:cs typeface="Calibri" pitchFamily="34" charset="-120"/>
+              </a:rPr>
+              <a:t>Two laptops, different networks, Tailscale relay (about 79 ms RTT); 2 MB per transfer, 5 repetitions</a:t>
+            </a:r>
+            <a:endParaRPr lang="en-US" sz="1500" dirty="0"/>
+          </a:p>
+          <a:p>
+            <a:pPr marL="342900" indent="-342900">
+              <a:spcAft>
+                <a:spcPts val="800"/>
+              </a:spcAft>
+              <a:buSzPct val="100000"/>
+              <a:buChar char="•"/>
+            </a:pPr>
+            <a:r>
+              <a:rPr lang="en-US" sz="1500" dirty="0">
+                <a:solidFill>
+                  <a:srgbClr val="E6EDF3"/>
+                </a:solidFill>
+                <a:latin typeface="Calibri" pitchFamily="34" charset="0"/>
+                <a:ea typeface="Calibri" pitchFamily="34" charset="-122"/>
+                <a:cs typeface="Calibri" pitchFamily="34" charset="-120"/>
+              </a:rPr>
+              <a:t>RUDP works between real machines: every completed run delivered 4,000 of 4,000 packets</a:t>
+            </a:r>
+            <a:endParaRPr lang="en-US" sz="1500" dirty="0"/>
+          </a:p>
+          <a:p>
+            <a:pPr marL="342900" indent="-342900">
+              <a:spcAft>
+                <a:spcPts val="800"/>
+              </a:spcAft>
+              <a:buSzPct val="100000"/>
+              <a:buChar char="•"/>
+            </a:pPr>
+            <a:r>
+              <a:rPr lang="en-US" sz="1500" dirty="0">
+                <a:solidFill>
+                  <a:srgbClr val="E6EDF3"/>
+                </a:solidFill>
+                <a:latin typeface="Calibri" pitchFamily="34" charset="0"/>
+                <a:ea typeface="Calibri" pitchFamily="34" charset="-122"/>
+                <a:cs typeface="Calibri" pitchFamily="34" charset="-120"/>
+              </a:rPr>
+              <a:t>The path drifted (TCP alone 2 s to 51 s) and 4 of 20 RUDP runs timed out, so this is a demonstration, not a ranking</a:t>
+            </a:r>
+            <a:endParaRPr lang="en-US" sz="1500" dirty="0"/>
+          </a:p>
+          <a:p>
+            <a:pPr marL="342900" indent="-342900">
+              <a:spcAft>
+                <a:spcPts val="800"/>
+              </a:spcAft>
+              <a:buSzPct val="100000"/>
+              <a:buChar char="•"/>
+            </a:pPr>
+            <a:r>
+              <a:rPr lang="en-US" sz="1500" dirty="0">
+                <a:solidFill>
+                  <a:srgbClr val="E6EDF3"/>
+                </a:solidFill>
+                <a:latin typeface="Calibri" pitchFamily="34" charset="0"/>
+                <a:ea typeface="Calibri" pitchFamily="34" charset="-122"/>
+                <a:cs typeface="Calibri" pitchFamily="34" charset="-120"/>
+              </a:rPr>
+              <a:t>Clean reps: kernel TCP 2x to 6x faster; rep 1 the neural agent beat AIMD (4.7 s vs 14.2 s)</a:t>
+            </a:r>
+            <a:endParaRPr lang="en-US" sz="1500" dirty="0"/>
+          </a:p>
+          <a:p>
+            <a:pPr marL="342900" indent="-342900">
+              <a:spcAft>
+                <a:spcPts val="800"/>
+              </a:spcAft>
+              <a:buSzPct val="100000"/>
+              <a:buChar char="•"/>
+            </a:pPr>
+            <a:r>
+              <a:rPr lang="en-US" sz="1500" dirty="0">
+                <a:solidFill>
+                  <a:srgbClr val="E6EDF3"/>
+                </a:solidFill>
+                <a:latin typeface="Calibri" pitchFamily="34" charset="0"/>
+                <a:ea typeface="Calibri" pitchFamily="34" charset="-122"/>
+                <a:cs typeface="Calibri" pitchFamily="34" charset="-120"/>
+              </a:rPr>
+              <a:t>Next: repeat on a direct local network with more reps</a:t>
+            </a:r>
+            <a:endParaRPr lang="en-US" sz="1500" dirty="0"/>
+          </a:p>
+        </p:txBody>
+      </p:sp>
+    </p:spTree>
+  </p:cSld>
+  <p:clrMapOvr>
+    <a:masterClrMapping/>
+  </p:clrMapOvr>
+</p:sld>
+</file>
+
+<file path=ppt/slides/slide36.xml><?xml version="1.0" encoding="utf-8"?>
+<p:sld xmlns:a="http://schemas.openxmlformats.org/drawingml/2006/main" xmlns:r="http://schemas.openxmlformats.org/officeDocument/2006/relationships" xmlns:p="http://schemas.openxmlformats.org/presentationml/2006/main">
+  <p:cSld name="Slide 36">
+    <p:bg>
+      <p:bgPr>
+        <a:solidFill>
+          <a:srgbClr val="0B0F14"/>
+        </a:solidFill>
+      </p:bgPr>
+    </p:bg>
+    <p:spTree>
+      <p:nvGrpSpPr>
+        <p:cNvPr id="1" name=""/>
+        <p:cNvGrpSpPr/>
+        <p:nvPr/>
+      </p:nvGrpSpPr>
+      <p:grpSpPr>
+        <a:xfrm>
+          <a:off x="0" y="0"/>
+          <a:ext cx="0" cy="0"/>
+          <a:chOff x="0" y="0"/>
+          <a:chExt cx="0" cy="0"/>
+        </a:xfrm>
+      </p:grpSpPr>
+      <p:sp>
+        <p:nvSpPr>
+          <p:cNvPr id="2" name="Text 0"/>
+          <p:cNvSpPr/>
+          <p:nvPr/>
+        </p:nvSpPr>
+        <p:spPr>
+          <a:xfrm>
+            <a:off x="548640" y="320040"/>
+            <a:ext cx="11064240" cy="731520"/>
+          </a:xfrm>
+          <a:prstGeom prst="rect">
+            <a:avLst/>
+          </a:prstGeom>
+          <a:noFill/>
+          <a:ln/>
+        </p:spPr>
+        <p:txBody>
+          <a:bodyPr wrap="square" lIns="0" tIns="0" rIns="0" bIns="0" rtlCol="0" anchor="ctr"/>
+          <a:lstStyle/>
+          <a:p>
+            <a:pPr indent="0" marL="0">
+              <a:buNone/>
+            </a:pPr>
+            <a:r>
+              <a:rPr lang="en-US" sz="3000" b="1" dirty="0">
+                <a:solidFill>
+                  <a:srgbClr val="39FF88"/>
+                </a:solidFill>
+                <a:latin typeface="Courier New" pitchFamily="34" charset="0"/>
+                <a:ea typeface="Courier New" pitchFamily="34" charset="-122"/>
+                <a:cs typeface="Courier New" pitchFamily="34" charset="-120"/>
+              </a:rPr>
+              <a:t>Learnings and future work</a:t>
+            </a:r>
+            <a:endParaRPr lang="en-US" sz="3000" dirty="0"/>
+          </a:p>
+        </p:txBody>
+      </p:sp>
+      <p:sp>
+        <p:nvSpPr>
+          <p:cNvPr id="3" name="Text 1"/>
+          <p:cNvSpPr/>
+          <p:nvPr/>
+        </p:nvSpPr>
+        <p:spPr>
+          <a:xfrm>
+            <a:off x="9418320" y="6446520"/>
+            <a:ext cx="2377440" cy="274320"/>
+          </a:xfrm>
+          <a:prstGeom prst="rect">
+            <a:avLst/>
+          </a:prstGeom>
+          <a:noFill/>
+          <a:ln/>
+        </p:spPr>
+        <p:txBody>
+          <a:bodyPr wrap="square" lIns="0" tIns="0" rIns="0" bIns="0" rtlCol="0" anchor="ctr"/>
+          <a:lstStyle/>
+          <a:p>
+            <a:pPr algn="r" indent="0" marL="0">
+              <a:buNone/>
+            </a:pPr>
+            <a:r>
+              <a:rPr lang="en-US" sz="1000" dirty="0">
+                <a:solidFill>
+                  <a:srgbClr val="8B98A5"/>
+                </a:solidFill>
+                <a:latin typeface="Courier New" pitchFamily="34" charset="0"/>
+                <a:ea typeface="Courier New" pitchFamily="34" charset="-122"/>
+                <a:cs typeface="Courier New" pitchFamily="34" charset="-120"/>
+              </a:rPr>
+              <a:t>36 / 38   Smart-RUDP</a:t>
             </a:r>
             <a:endParaRPr lang="en-US" sz="1000" dirty="0"/>
           </a:p>
@@ -32271,7 +35327,7 @@
                 <a:ea typeface="Calibri" pitchFamily="34" charset="-122"/>
                 <a:cs typeface="Calibri" pitchFamily="34" charset="-120"/>
               </a:rPr>
-              <a:t>Close the gap to kernel TCP; real multi-machine tests</a:t>
+              <a:t>Close the gap to kernel TCP; controlled multi-machine tests</a:t>
             </a:r>
             <a:endParaRPr lang="en-US" sz="2000" dirty="0"/>
           </a:p>
@@ -32310,7 +35366,7 @@
                 <a:ea typeface="Calibri" pitchFamily="34" charset="-122"/>
                 <a:cs typeface="Calibri" pitchFamily="34" charset="-120"/>
               </a:rPr>
-              <a:t>Limits: kernel TCP is 1.5x to 1.7x faster; no multi-machine test; polite mode is a hand-made rule that costs speed; level with CUBIC under bursty cross traffic; no gain at 10% random loss; BBR-style baseline is faster on the 2% lossy path; coexistence with kernel TCP measured with only 3 runs per cell.</a:t>
+              <a:t>Limits: kernel TCP is 1.5x to 1.7x faster; one noisy two-machine run only; polite mode is a hand-made rule that costs speed; level with CUBIC under bursty cross traffic; no gain at 10% random loss; BBR-style baseline is faster on the 2% lossy path; coexistence with kernel TCP measured with only 3 runs per cell.</a:t>
             </a:r>
             <a:endParaRPr lang="en-US" sz="1400" dirty="0"/>
           </a:p>
@@ -32324,9 +35380,9 @@
 </p:sld>
 </file>
 
-<file path=ppt/slides/slide36.xml><?xml version="1.0" encoding="utf-8"?>
+<file path=ppt/slides/slide37.xml><?xml version="1.0" encoding="utf-8"?>
 <p:sld xmlns:a="http://schemas.openxmlformats.org/drawingml/2006/main" xmlns:r="http://schemas.openxmlformats.org/officeDocument/2006/relationships" xmlns:p="http://schemas.openxmlformats.org/presentationml/2006/main">
-  <p:cSld name="Slide 36">
+  <p:cSld name="Slide 37">
     <p:bg>
       <p:bgPr>
         <a:solidFill>
@@ -32473,9 +35529,9 @@
 </p:sld>
 </file>
 
-<file path=ppt/slides/slide37.xml><?xml version="1.0" encoding="utf-8"?>
+<file path=ppt/slides/slide38.xml><?xml version="1.0" encoding="utf-8"?>
 <p:sld xmlns:a="http://schemas.openxmlformats.org/drawingml/2006/main" xmlns:r="http://schemas.openxmlformats.org/officeDocument/2006/relationships" xmlns:p="http://schemas.openxmlformats.org/presentationml/2006/main">
-  <p:cSld name="Slide 37">
+  <p:cSld name="Slide 38">
     <p:bg>
       <p:bgPr>
         <a:solidFill>
@@ -32809,7 +35865,7 @@
                 <a:ea typeface="Courier New" pitchFamily="34" charset="-122"/>
                 <a:cs typeface="Courier New" pitchFamily="34" charset="-120"/>
               </a:rPr>
-              <a:t>4 / 37   Smart-RUDP</a:t>
+              <a:t>4 / 38   Smart-RUDP</a:t>
             </a:r>
             <a:endParaRPr lang="en-US" sz="1000" dirty="0"/>
           </a:p>
@@ -33370,7 +36426,7 @@
                 <a:ea typeface="Courier New" pitchFamily="34" charset="-122"/>
                 <a:cs typeface="Courier New" pitchFamily="34" charset="-120"/>
               </a:rPr>
-              <a:t>5 / 37   Smart-RUDP</a:t>
+              <a:t>5 / 38   Smart-RUDP</a:t>
             </a:r>
             <a:endParaRPr lang="en-US" sz="1000" dirty="0"/>
           </a:p>
@@ -34809,7 +37865,7 @@
                 <a:ea typeface="Courier New" pitchFamily="34" charset="-122"/>
                 <a:cs typeface="Courier New" pitchFamily="34" charset="-120"/>
               </a:rPr>
-              <a:t>6 / 37   Smart-RUDP</a:t>
+              <a:t>6 / 38   Smart-RUDP</a:t>
             </a:r>
             <a:endParaRPr lang="en-US" sz="1000" dirty="0"/>
           </a:p>
@@ -36044,7 +39100,7 @@
                 <a:ea typeface="Courier New" pitchFamily="34" charset="-122"/>
                 <a:cs typeface="Courier New" pitchFamily="34" charset="-120"/>
               </a:rPr>
-              <a:t>7 / 37   Smart-RUDP</a:t>
+              <a:t>7 / 38   Smart-RUDP</a:t>
             </a:r>
             <a:endParaRPr lang="en-US" sz="1000" dirty="0"/>
           </a:p>
@@ -36487,7 +39543,7 @@
                 <a:ea typeface="Courier New" pitchFamily="34" charset="-122"/>
                 <a:cs typeface="Courier New" pitchFamily="34" charset="-120"/>
               </a:rPr>
-              <a:t>8 / 37   Smart-RUDP</a:t>
+              <a:t>8 / 38   Smart-RUDP</a:t>
             </a:r>
             <a:endParaRPr lang="en-US" sz="1000" dirty="0"/>
           </a:p>
@@ -36787,7 +39843,7 @@
                 <a:ea typeface="Courier New" pitchFamily="34" charset="-122"/>
                 <a:cs typeface="Courier New" pitchFamily="34" charset="-120"/>
               </a:rPr>
-              <a:t>9 / 37   Smart-RUDP</a:t>
+              <a:t>9 / 38   Smart-RUDP</a:t>
             </a:r>
             <a:endParaRPr lang="en-US" sz="1000" dirty="0"/>
           </a:p>

--- a/docs/final/RUDP_Presentation_with_notes.pptx
+++ b/docs/final/RUDP_Presentation_with_notes.pptx
@@ -43,9 +43,10 @@
     <p:sldId id="291" r:id="rId37"/>
     <p:sldId id="292" r:id="rId38"/>
     <p:sldId id="293" r:id="rId39"/>
+    <p:sldId id="294" r:id="rId40"/>
   </p:sldIdLst>
   <p:notesMasterIdLst>
-    <p:notesMasterId r:id="rId40"/>
+    <p:notesMasterId r:id="rId41"/>
   </p:notesMasterIdLst>
   <p:sldSz cx="12192000" cy="6858000"/>
   <p:notesSz cx="6858000" cy="12192000"/>
@@ -3439,33 +3440,23 @@
           <a:lstStyle/>
           <a:p>
             <a:r>
-              <a:t>[1:00] Until now our real-socket tests ran through our own proxy. We repeated them on the Linux kernel itself, using tc netem, with kernel TCP in the same table.</a:t>
-            </a:r>
-          </a:p>
-          <a:p>
-            <a:r>
-              <a:t>Against tuned AIMD the neural agent is 71 percent faster on the lossy path, 65 percent on the 5G-like path and 83 percent on the satellite path, all significant. On the reordering path it is 60 percent faster but that is not significant.</a:t>
-            </a:r>
-          </a:p>
-          <a:p>
-            <a:r>
-              <a:t>Kernel TCP is still faster than our agent on every path, by one and a half to one and seven tenths. We are not claiming to beat TCP.</a:t>
-            </a:r>
-          </a:p>
-          <a:p>
-            <a:r>
-              <a:t>We also put a kernel TCP flow and one RUDP flow on the same link. The neural agent takes 24 to 34 percent of it, so it does not starve TCP; tuned AIMD gets only 5 to 17 percent.</a:t>
-            </a:r>
-          </a:p>
-          <a:p>
-            <a:r>
-              <a:t>Our first runs were wrong four times: the netem queue limit counted packets in flight, the baseline was untuned, the payload sizes differed, and finally RUDP was sending 40-byte synthetic packets. We found each one, fixed it, re-ran everything and documented it.</a:t>
+              <a:t>[0:40] Correctness first: unit, end-to-end, handshake, file-integrity, chat and simulator tests, and the packet parser is fuzzed under AddressSanitizer.</a:t>
+            </a:r>
+          </a:p>
+          <a:p>
+            <a:r>
+              <a:t>For speed we use virtual time, which is the same C sender on a simulated clock. We checked it against the real clock, and it agreed in all 15 of 15 cells. We use paired seeds with 95 percent intervals and keep tuning seeds apart from test seeds.</a:t>
+            </a:r>
+          </a:p>
+          <a:p>
+            <a:r>
+              <a:t>Realism comes in four steps: emulation in the client, a separate proxy on real sockets, the Linux kernel with netem, and two laptops over the internet. Every result has its command in the report.</a:t>
             </a:r>
           </a:p>
           <a:p/>
           <a:p>
             <a:r>
-              <a:t>If asked: Q: Does it beat TCP? A: No. It beats our AIMD baselines on a real kernel path; mature kernel TCP is faster, by 1.5x to 1.7x. Q: Does it starve TCP? A: No, it takes 24 to 34 percent of a shared link (3 runs per cell, one laptop). Q: Why were the first runs wrong? A: four separate mistakes, the last being 40-byte synthetic packets against 512-byte TCP payloads; all fixed and re-run.</a:t>
+              <a:t>If asked: Did you make mistakes? Yes, and we logged them: untuned baselines, unequal payloads, and synthetic 40-byte packets in the kernel test, each found, fixed and re-run.</a:t>
             </a:r>
           </a:p>
         </p:txBody>
@@ -3551,38 +3542,33 @@
           <a:lstStyle/>
           <a:p>
             <a:r>
-              <a:t>[1:00] Two more research gaps we tested.</a:t>
-            </a:r>
-          </a:p>
-          <a:p>
-            <a:r>
-              <a:t>First, paths that change during a transfer: we added a --dyn option so bandwidth and delay change mid-run.</a:t>
-            </a:r>
-          </a:p>
-          <a:p>
-            <a:r>
-              <a:t>The neural agent was fastest in all four cases, 6 to 53 percent faster than tuned AIMD, but it retransmits 1 to 6 percent of packets.</a:t>
-            </a:r>
-          </a:p>
-          <a:p>
-            <a:r>
-              <a:t>Second, a stronger baseline: a simplified BBR.</a:t>
-            </a:r>
-          </a:p>
-          <a:p>
-            <a:r>
-              <a:t>It beats tuned AIMD on four of five paths and is actually faster than our agent on the 2 percent lossy path, 8.2 seconds against 9.8.</a:t>
-            </a:r>
-          </a:p>
-          <a:p>
-            <a:r>
-              <a:t>Be honest that our BBR is a simplification and that two bugs in it were found and fixed by these tests.</a:t>
+              <a:t>[1:00] Until now our real-socket tests ran through our own proxy. We repeated them on the Linux kernel itself, using tc netem, with kernel TCP in the same table.</a:t>
+            </a:r>
+          </a:p>
+          <a:p>
+            <a:r>
+              <a:t>Against tuned AIMD the neural agent is 71 percent faster on the lossy path, 65 percent on the 5G-like path and 83 percent on the satellite path, all significant. On the reordering path it is 60 percent faster but that is not significant.</a:t>
+            </a:r>
+          </a:p>
+          <a:p>
+            <a:r>
+              <a:t>Kernel TCP is still faster than our agent on every path, by one and a half to one and seven tenths. We are not claiming to beat TCP.</a:t>
+            </a:r>
+          </a:p>
+          <a:p>
+            <a:r>
+              <a:t>We also put a kernel TCP flow and one RUDP flow on the same link. The neural agent takes 24 to 34 percent of it, so it does not starve TCP; tuned AIMD gets only 5 to 17 percent.</a:t>
+            </a:r>
+          </a:p>
+          <a:p>
+            <a:r>
+              <a:t>Our first runs were wrong four times: the netem queue limit counted packets in flight, the baseline was untuned, the payload sizes differed, and finally RUDP was sending 40-byte synthetic packets. We found each one, fixed it, re-ran everything and documented it.</a:t>
             </a:r>
           </a:p>
           <a:p/>
           <a:p>
             <a:r>
-              <a:t>If asked: Is your BBR the real one? No: a simplified version with no ProbeRTT and no BBRv3 loss response; the comparison is against a BBR-style policy.</a:t>
+              <a:t>If asked: Q: Does it beat TCP? A: No. It beats our AIMD baselines on a real kernel path; mature kernel TCP is faster, by 1.5x to 1.7x. Q: Does it starve TCP? A: No, it takes 24 to 34 percent of a shared link (3 runs per cell, one laptop). Q: Why were the first runs wrong? A: four separate mistakes, the last being 40-byte synthetic packets against 512-byte TCP payloads; all fixed and re-run.</a:t>
             </a:r>
           </a:p>
         </p:txBody>
@@ -3668,38 +3654,38 @@
           <a:lstStyle/>
           <a:p>
             <a:r>
-              <a:t>[1:00] Fairness and trust.</a:t>
-            </a:r>
-          </a:p>
-          <a:p>
-            <a:r>
-              <a:t>Two neural flows with unequal round-trip times share the link more evenly than two AIMD flows, Jain 0.84 against 0.64 at 150 ms extra RTT, but still favour the short-RTT flow; six pairs per cell so only the largest gap is clear.</a:t>
-            </a:r>
-          </a:p>
-          <a:p>
-            <a:r>
-              <a:t>A small decision tree agrees with the network on only 79 percent of decisions but gives the same transfer time on four of five paths.</a:t>
-            </a:r>
-          </a:p>
-          <a:p>
-            <a:r>
-              <a:t>Noise on the inputs costs at most 12 percent.</a:t>
-            </a:r>
-          </a:p>
-          <a:p>
-            <a:r>
-              <a:t>Formal certification only works at tiny perturbations, so the agent is robust in practice but not proven.</a:t>
-            </a:r>
-          </a:p>
-          <a:p>
-            <a:r>
-              <a:t>Kernel TCP coexistence is measured: the neural agent takes 24 to 34 percent of a shared link, so it does not starve TCP, with only three runs per cell.</a:t>
+              <a:t>[1:00] Two more research gaps we tested.</a:t>
+            </a:r>
+          </a:p>
+          <a:p>
+            <a:r>
+              <a:t>First, paths that change during a transfer: we added a --dyn option so bandwidth and delay change mid-run.</a:t>
+            </a:r>
+          </a:p>
+          <a:p>
+            <a:r>
+              <a:t>The neural agent was fastest in all four cases, 6 to 53 percent faster than tuned AIMD, but it retransmits 1 to 6 percent of packets.</a:t>
+            </a:r>
+          </a:p>
+          <a:p>
+            <a:r>
+              <a:t>Second, a stronger baseline: a simplified BBR.</a:t>
+            </a:r>
+          </a:p>
+          <a:p>
+            <a:r>
+              <a:t>It beats tuned AIMD on four of five paths and is actually faster than our agent on the 2 percent lossy path, 8.2 seconds against 9.8.</a:t>
+            </a:r>
+          </a:p>
+          <a:p>
+            <a:r>
+              <a:t>Be honest that our BBR is a simplification and that two bugs in it were found and fixed by these tests.</a:t>
             </a:r>
           </a:p>
           <a:p/>
           <a:p>
             <a:r>
-              <a:t>If asked: Did you test against kernel TCP? Yes, on kernel netem: the neural agent took 24 to 34 percent of a shared link, three runs per cell on one laptop.</a:t>
+              <a:t>If asked: Is your BBR the real one? No: a simplified version with no ProbeRTT and no BBRv3 loss response; the comparison is against a BBR-style policy.</a:t>
             </a:r>
           </a:p>
         </p:txBody>
@@ -3785,23 +3771,38 @@
           <a:lstStyle/>
           <a:p>
             <a:r>
-              <a:t>[0:45] Until now every test ran on one computer. We ran the sender on one laptop and the receiver on another, on different networks, joined by Tailscale. It could not connect directly, so traffic went through a relay, about 79 milliseconds round trip.</a:t>
-            </a:r>
-          </a:p>
-          <a:p>
-            <a:r>
-              <a:t>RUDP works between real machines: every transfer that finished delivered all 4,000 packets, with all four policies.</a:t>
-            </a:r>
-          </a:p>
-          <a:p>
-            <a:r>
-              <a:t>Be honest about the numbers: the path drifted, kernel TCP alone took anywhere from 2 to 51 seconds, and 4 of 20 RUDP runs timed out, so this is a demonstration and not a ranking. On the two clean repetitions kernel TCP was 2 to 6 times faster, and in repetition 1 the neural agent beat tuned AIMD, 4.7 against 14.2 seconds.</a:t>
+              <a:t>[1:00] Fairness and trust.</a:t>
+            </a:r>
+          </a:p>
+          <a:p>
+            <a:r>
+              <a:t>Two neural flows with unequal round-trip times share the link more evenly than two AIMD flows, Jain 0.84 against 0.64 at 150 ms extra RTT, but still favour the short-RTT flow; six pairs per cell so only the largest gap is clear.</a:t>
+            </a:r>
+          </a:p>
+          <a:p>
+            <a:r>
+              <a:t>A small decision tree agrees with the network on only 79 percent of decisions but gives the same transfer time on four of five paths.</a:t>
+            </a:r>
+          </a:p>
+          <a:p>
+            <a:r>
+              <a:t>Noise on the inputs costs at most 12 percent.</a:t>
+            </a:r>
+          </a:p>
+          <a:p>
+            <a:r>
+              <a:t>Formal certification only works at tiny perturbations, so the agent is robust in practice but not proven.</a:t>
+            </a:r>
+          </a:p>
+          <a:p>
+            <a:r>
+              <a:t>Kernel TCP coexistence is measured: the neural agent takes 24 to 34 percent of a shared link, so it does not starve TCP, with only three runs per cell.</a:t>
             </a:r>
           </a:p>
           <a:p/>
           <a:p>
             <a:r>
-              <a:t>If asked: Why not a better test? The other laptop was a one-time setup over the internet; the next step is a direct local network with more repetitions.</a:t>
+              <a:t>If asked: Did you test against kernel TCP? Yes, on kernel netem: the neural agent took 24 to 34 percent of a shared link, three runs per cell on one laptop.</a:t>
             </a:r>
           </a:p>
         </p:txBody>
@@ -3887,23 +3888,23 @@
           <a:lstStyle/>
           <a:p>
             <a:r>
-              <a:t>[0:50] What we learned: reliability is a set of simple rules working together, congestion control matters as much as retransmission, and tests tell you things about your own results that you do not want to hear.</a:t>
-            </a:r>
-          </a:p>
-          <a:p>
-            <a:r>
-              <a:t>Our limits: only one noisy two-machine run, the agent is not a polite neighbour, there is no gain at 10 percent random loss, and the tabular agent did not beat AIMD.</a:t>
-            </a:r>
-          </a:p>
-          <a:p>
-            <a:r>
-              <a:t>Next: fairness-aware training with TCP coexistence, training on real traces, and controlled multi-machine tests.</a:t>
+              <a:t>[0:45] Until now every test ran on one computer. We ran the sender on one laptop and the receiver on another, on different networks, joined by Tailscale. It could not connect directly, so traffic went through a relay, about 79 milliseconds round trip.</a:t>
+            </a:r>
+          </a:p>
+          <a:p>
+            <a:r>
+              <a:t>RUDP works between real machines: every transfer that finished delivered all 4,000 packets, with all four policies.</a:t>
+            </a:r>
+          </a:p>
+          <a:p>
+            <a:r>
+              <a:t>Be honest about the numbers: the path drifted, kernel TCP alone took anywhere from 2 to 51 seconds, and 4 of 20 RUDP runs timed out, so this is a demonstration and not a ranking. On the two clean repetitions kernel TCP was 2 to 6 times faster, and in repetition 1 the neural agent beat tuned AIMD, 4.7 against 14.2 seconds.</a:t>
             </a:r>
           </a:p>
           <a:p/>
           <a:p>
             <a:r>
-              <a:t>If asked: What would you do first? Run the netem script on a Linux machine for kernel TCP and RUDP on the same path, then add a competing flow to the training.</a:t>
+              <a:t>If asked: Why not a better test? The other laptop was a one-time setup over the internet; the next step is a direct local network with more repetitions.</a:t>
             </a:r>
           </a:p>
         </p:txBody>
@@ -3989,13 +3990,23 @@
           <a:lstStyle/>
           <a:p>
             <a:r>
-              <a:t>[0:15] Thank you. The code, report and captures are at github.com/Capsturrrr/rudp. Happy to take questions.</a:t>
+              <a:t>[0:50] What we learned: reliability is a set of simple rules working together, congestion control matters as much as retransmission, and tests tell you things about your own results that you do not want to hear.</a:t>
+            </a:r>
+          </a:p>
+          <a:p>
+            <a:r>
+              <a:t>Our limits: only one noisy two-machine run, the agent is not a polite neighbour, there is no gain at 10 percent random loss, and the tabular agent did not beat AIMD.</a:t>
+            </a:r>
+          </a:p>
+          <a:p>
+            <a:r>
+              <a:t>Next: fairness-aware training with TCP coexistence, training on real traces, and controlled multi-machine tests.</a:t>
             </a:r>
           </a:p>
           <a:p/>
           <a:p>
             <a:r>
-              <a:t>If asked: Pause and smile; hand over to questions.</a:t>
+              <a:t>If asked: What would you do first? Run the netem script on a Linux machine for kernel TCP and RUDP on the same path, then add a competing flow to the training.</a:t>
             </a:r>
           </a:p>
         </p:txBody>
@@ -4081,13 +4092,13 @@
           <a:lstStyle/>
           <a:p>
             <a:r>
-              <a:t>[-] Only if asked: the window starts at 1, adds 1 per ACK until the threshold 16, then 1/window per ACK. In the 62-packet run the final window was 18.71.</a:t>
+              <a:t>[0:15] Thank you. The code, report and captures are at github.com/Capsturrrr/rudp. Happy to take questions.</a:t>
             </a:r>
           </a:p>
           <a:p/>
           <a:p>
             <a:r>
-              <a:t>If asked: Use this slide to answer 'show me congestion avoidance'.</a:t>
+              <a:t>If asked: Pause and smile; hand over to questions.</a:t>
             </a:r>
           </a:p>
         </p:txBody>
@@ -4110,6 +4121,98 @@
             <a:fld id="{F7021451-1387-4CA6-816F-3879F97B5CBC}" type="slidenum">
               <a:rPr lang="en-US"/>
               <a:t>38</a:t>
+            </a:fld>
+            <a:endParaRPr lang="en-US"/>
+          </a:p>
+        </p:txBody>
+      </p:sp>
+    </p:spTree>
+    <p:extLst>
+      <p:ext uri="{BB962C8B-B14F-4D97-AF65-F5344CB8AC3E}">
+        <p14:creationId xmlns:p14="http://schemas.microsoft.com/office/powerpoint/2010/main" val="1024086991"/>
+      </p:ext>
+    </p:extLst>
+  </p:cSld>
+  <p:clrMapOvr>
+    <a:masterClrMapping/>
+  </p:clrMapOvr>
+</p:notes>
+</file>
+
+<file path=ppt/notesSlides/notesSlide39.xml><?xml version="1.0" encoding="utf-8"?>
+<p:notes xmlns:a="http://schemas.openxmlformats.org/drawingml/2006/main" xmlns:r="http://schemas.openxmlformats.org/officeDocument/2006/relationships" xmlns:p="http://schemas.openxmlformats.org/presentationml/2006/main">
+  <p:cSld>
+    <p:spTree>
+      <p:nvGrpSpPr>
+        <p:cNvPr id="1" name=""/>
+        <p:cNvGrpSpPr/>
+        <p:nvPr/>
+      </p:nvGrpSpPr>
+      <p:grpSpPr>
+        <a:xfrm>
+          <a:off x="0" y="0"/>
+          <a:ext cx="0" cy="0"/>
+          <a:chOff x="0" y="0"/>
+          <a:chExt cx="0" cy="0"/>
+        </a:xfrm>
+      </p:grpSpPr>
+      <p:sp>
+        <p:nvSpPr>
+          <p:cNvPr id="2" name="Slide Image Placeholder 1"/>
+          <p:cNvSpPr>
+            <a:spLocks noGrp="1" noRot="1" noChangeAspect="1"/>
+          </p:cNvSpPr>
+          <p:nvPr>
+            <p:ph type="sldImg"/>
+          </p:nvPr>
+        </p:nvSpPr>
+        <p:spPr/>
+      </p:sp>
+      <p:sp>
+        <p:nvSpPr>
+          <p:cNvPr id="3" name="Notes Placeholder 2"/>
+          <p:cNvSpPr>
+            <a:spLocks noGrp="1"/>
+          </p:cNvSpPr>
+          <p:nvPr>
+            <p:ph type="body" idx="1"/>
+          </p:nvPr>
+        </p:nvSpPr>
+        <p:spPr/>
+        <p:txBody>
+          <a:bodyPr/>
+          <a:lstStyle/>
+          <a:p>
+            <a:r>
+              <a:t>[-] Only if asked: the window starts at 1, adds 1 per ACK until the threshold 16, then 1/window per ACK. In the 62-packet run the final window was 18.71.</a:t>
+            </a:r>
+          </a:p>
+          <a:p/>
+          <a:p>
+            <a:r>
+              <a:t>If asked: Use this slide to answer 'show me congestion avoidance'.</a:t>
+            </a:r>
+          </a:p>
+        </p:txBody>
+      </p:sp>
+      <p:sp>
+        <p:nvSpPr>
+          <p:cNvPr id="4" name="Slide Number Placeholder 3"/>
+          <p:cNvSpPr>
+            <a:spLocks noGrp="1"/>
+          </p:cNvSpPr>
+          <p:nvPr>
+            <p:ph type="sldNum" sz="quarter" idx="10"/>
+          </p:nvPr>
+        </p:nvSpPr>
+        <p:spPr/>
+        <p:txBody>
+          <a:bodyPr/>
+          <a:lstStyle/>
+          <a:p>
+            <a:fld id="{F7021451-1387-4CA6-816F-3879F97B5CBC}" type="slidenum">
+              <a:rPr lang="en-US"/>
+              <a:t>39</a:t>
             </a:fld>
             <a:endParaRPr lang="en-US"/>
           </a:p>
@@ -5321,7 +5424,7 @@
                 <a:ea typeface="Courier New" pitchFamily="34" charset="-122"/>
                 <a:cs typeface="Courier New" pitchFamily="34" charset="-120"/>
               </a:rPr>
-              <a:t>10 / 38   Smart-RUDP</a:t>
+              <a:t>10 / 39   Smart-RUDP</a:t>
             </a:r>
             <a:endParaRPr lang="en-US" sz="1000" dirty="0"/>
           </a:p>
@@ -5518,7 +5621,7 @@
                 <a:ea typeface="Courier New" pitchFamily="34" charset="-122"/>
                 <a:cs typeface="Courier New" pitchFamily="34" charset="-120"/>
               </a:rPr>
-              <a:t>11 / 38   Smart-RUDP</a:t>
+              <a:t>11 / 39   Smart-RUDP</a:t>
             </a:r>
             <a:endParaRPr lang="en-US" sz="1000" dirty="0"/>
           </a:p>
@@ -6348,7 +6451,7 @@
                 <a:ea typeface="Courier New" pitchFamily="34" charset="-122"/>
                 <a:cs typeface="Courier New" pitchFamily="34" charset="-120"/>
               </a:rPr>
-              <a:t>12 / 38   Smart-RUDP</a:t>
+              <a:t>12 / 39   Smart-RUDP</a:t>
             </a:r>
             <a:endParaRPr lang="en-US" sz="1000" dirty="0"/>
           </a:p>
@@ -6645,7 +6748,7 @@
                 <a:ea typeface="Courier New" pitchFamily="34" charset="-122"/>
                 <a:cs typeface="Courier New" pitchFamily="34" charset="-120"/>
               </a:rPr>
-              <a:t>13 / 38   Smart-RUDP</a:t>
+              <a:t>13 / 39   Smart-RUDP</a:t>
             </a:r>
             <a:endParaRPr lang="en-US" sz="1000" dirty="0"/>
           </a:p>
@@ -6945,7 +7048,7 @@
                 <a:ea typeface="Courier New" pitchFamily="34" charset="-122"/>
                 <a:cs typeface="Courier New" pitchFamily="34" charset="-120"/>
               </a:rPr>
-              <a:t>14 / 38   Smart-RUDP</a:t>
+              <a:t>14 / 39   Smart-RUDP</a:t>
             </a:r>
             <a:endParaRPr lang="en-US" sz="1000" dirty="0"/>
           </a:p>
@@ -7329,7 +7432,7 @@
                 <a:ea typeface="Courier New" pitchFamily="34" charset="-122"/>
                 <a:cs typeface="Courier New" pitchFamily="34" charset="-120"/>
               </a:rPr>
-              <a:t>15 / 38   Smart-RUDP</a:t>
+              <a:t>15 / 39   Smart-RUDP</a:t>
             </a:r>
             <a:endParaRPr lang="en-US" sz="1000" dirty="0"/>
           </a:p>
@@ -7787,7 +7890,7 @@
                 <a:ea typeface="Courier New" pitchFamily="34" charset="-122"/>
                 <a:cs typeface="Courier New" pitchFamily="34" charset="-120"/>
               </a:rPr>
-              <a:t>16 / 38   Smart-RUDP</a:t>
+              <a:t>16 / 39   Smart-RUDP</a:t>
             </a:r>
             <a:endParaRPr lang="en-US" sz="1000" dirty="0"/>
           </a:p>
@@ -8472,7 +8575,7 @@
                 <a:ea typeface="Courier New" pitchFamily="34" charset="-122"/>
                 <a:cs typeface="Courier New" pitchFamily="34" charset="-120"/>
               </a:rPr>
-              <a:t>17 / 38   Smart-RUDP</a:t>
+              <a:t>17 / 39   Smart-RUDP</a:t>
             </a:r>
             <a:endParaRPr lang="en-US" sz="1000" dirty="0"/>
           </a:p>
@@ -8712,7 +8815,7 @@
                 <a:ea typeface="Courier New" pitchFamily="34" charset="-122"/>
                 <a:cs typeface="Courier New" pitchFamily="34" charset="-120"/>
               </a:rPr>
-              <a:t>18 / 38   Smart-RUDP</a:t>
+              <a:t>18 / 39   Smart-RUDP</a:t>
             </a:r>
             <a:endParaRPr lang="en-US" sz="1000" dirty="0"/>
           </a:p>
@@ -8952,7 +9055,7 @@
                 <a:ea typeface="Courier New" pitchFamily="34" charset="-122"/>
                 <a:cs typeface="Courier New" pitchFamily="34" charset="-120"/>
               </a:rPr>
-              <a:t>19 / 38   Smart-RUDP</a:t>
+              <a:t>19 / 39   Smart-RUDP</a:t>
             </a:r>
             <a:endParaRPr lang="en-US" sz="1000" dirty="0"/>
           </a:p>
@@ -9174,7 +9277,7 @@
                 <a:ea typeface="Courier New" pitchFamily="34" charset="-122"/>
                 <a:cs typeface="Courier New" pitchFamily="34" charset="-120"/>
               </a:rPr>
-              <a:t>2 / 38   Smart-RUDP</a:t>
+              <a:t>2 / 39   Smart-RUDP</a:t>
             </a:r>
             <a:endParaRPr lang="en-US" sz="1000" dirty="0"/>
           </a:p>
@@ -9568,7 +9671,7 @@
                 <a:ea typeface="Courier New" pitchFamily="34" charset="-122"/>
                 <a:cs typeface="Courier New" pitchFamily="34" charset="-120"/>
               </a:rPr>
-              <a:t>20 / 38   Smart-RUDP</a:t>
+              <a:t>20 / 39   Smart-RUDP</a:t>
             </a:r>
             <a:endParaRPr lang="en-US" sz="1000" dirty="0"/>
           </a:p>
@@ -9892,7 +9995,7 @@
                 <a:ea typeface="Courier New" pitchFamily="34" charset="-122"/>
                 <a:cs typeface="Courier New" pitchFamily="34" charset="-120"/>
               </a:rPr>
-              <a:t>21 / 38   Smart-RUDP</a:t>
+              <a:t>21 / 39   Smart-RUDP</a:t>
             </a:r>
             <a:endParaRPr lang="en-US" sz="1000" dirty="0"/>
           </a:p>
@@ -11599,7 +11702,7 @@
                 <a:ea typeface="Courier New" pitchFamily="34" charset="-122"/>
                 <a:cs typeface="Courier New" pitchFamily="34" charset="-120"/>
               </a:rPr>
-              <a:t>22 / 38   Smart-RUDP</a:t>
+              <a:t>22 / 39   Smart-RUDP</a:t>
             </a:r>
             <a:endParaRPr lang="en-US" sz="1000" dirty="0"/>
           </a:p>
@@ -12982,7 +13085,7 @@
                 <a:ea typeface="Courier New" pitchFamily="34" charset="-122"/>
                 <a:cs typeface="Courier New" pitchFamily="34" charset="-120"/>
               </a:rPr>
-              <a:t>23 / 38   Smart-RUDP</a:t>
+              <a:t>23 / 39   Smart-RUDP</a:t>
             </a:r>
             <a:endParaRPr lang="en-US" sz="1000" dirty="0"/>
           </a:p>
@@ -14525,7 +14628,7 @@
                 <a:ea typeface="Courier New" pitchFamily="34" charset="-122"/>
                 <a:cs typeface="Courier New" pitchFamily="34" charset="-120"/>
               </a:rPr>
-              <a:t>24 / 38   Smart-RUDP</a:t>
+              <a:t>24 / 39   Smart-RUDP</a:t>
             </a:r>
             <a:endParaRPr lang="en-US" sz="1000" dirty="0"/>
           </a:p>
@@ -16203,7 +16306,7 @@
                 <a:ea typeface="Courier New" pitchFamily="34" charset="-122"/>
                 <a:cs typeface="Courier New" pitchFamily="34" charset="-120"/>
               </a:rPr>
-              <a:t>25 / 38   Smart-RUDP</a:t>
+              <a:t>25 / 39   Smart-RUDP</a:t>
             </a:r>
             <a:endParaRPr lang="en-US" sz="1000" dirty="0"/>
           </a:p>
@@ -17881,7 +17984,7 @@
                 <a:ea typeface="Courier New" pitchFamily="34" charset="-122"/>
                 <a:cs typeface="Courier New" pitchFamily="34" charset="-120"/>
               </a:rPr>
-              <a:t>26 / 38   Smart-RUDP</a:t>
+              <a:t>26 / 39   Smart-RUDP</a:t>
             </a:r>
             <a:endParaRPr lang="en-US" sz="1000" dirty="0"/>
           </a:p>
@@ -20221,7 +20324,7 @@
                 <a:ea typeface="Courier New" pitchFamily="34" charset="-122"/>
                 <a:cs typeface="Courier New" pitchFamily="34" charset="-120"/>
               </a:rPr>
-              <a:t>27 / 38   Smart-RUDP</a:t>
+              <a:t>27 / 39   Smart-RUDP</a:t>
             </a:r>
             <a:endParaRPr lang="en-US" sz="1000" dirty="0"/>
           </a:p>
@@ -20679,7 +20782,7 @@
                 <a:ea typeface="Courier New" pitchFamily="34" charset="-122"/>
                 <a:cs typeface="Courier New" pitchFamily="34" charset="-120"/>
               </a:rPr>
-              <a:t>28 / 38   Smart-RUDP</a:t>
+              <a:t>28 / 39   Smart-RUDP</a:t>
             </a:r>
             <a:endParaRPr lang="en-US" sz="1000" dirty="0"/>
           </a:p>
@@ -20911,7 +21014,7 @@
                 <a:ea typeface="Courier New" pitchFamily="34" charset="-122"/>
                 <a:cs typeface="Courier New" pitchFamily="34" charset="-120"/>
               </a:rPr>
-              <a:t>29 / 38   Smart-RUDP</a:t>
+              <a:t>29 / 39   Smart-RUDP</a:t>
             </a:r>
             <a:endParaRPr lang="en-US" sz="1000" dirty="0"/>
           </a:p>
@@ -23657,7 +23760,7 @@
                 <a:ea typeface="Courier New" pitchFamily="34" charset="-122"/>
                 <a:cs typeface="Courier New" pitchFamily="34" charset="-120"/>
               </a:rPr>
-              <a:t>3 / 38   Smart-RUDP</a:t>
+              <a:t>3 / 39   Smart-RUDP</a:t>
             </a:r>
             <a:endParaRPr lang="en-US" sz="1000" dirty="0"/>
           </a:p>
@@ -24051,7 +24154,7 @@
                 <a:ea typeface="Courier New" pitchFamily="34" charset="-122"/>
                 <a:cs typeface="Courier New" pitchFamily="34" charset="-120"/>
               </a:rPr>
-              <a:t>30 / 38   Smart-RUDP</a:t>
+              <a:t>30 / 39   Smart-RUDP</a:t>
             </a:r>
             <a:endParaRPr lang="en-US" sz="1000" dirty="0"/>
           </a:p>
@@ -24291,7 +24394,7 @@
                 <a:ea typeface="Courier New" pitchFamily="34" charset="-122"/>
                 <a:cs typeface="Courier New" pitchFamily="34" charset="-120"/>
               </a:rPr>
-              <a:t>31 / 38   Smart-RUDP</a:t>
+              <a:t>31 / 39   Smart-RUDP</a:t>
             </a:r>
             <a:endParaRPr lang="en-US" sz="1000" dirty="0"/>
           </a:p>
@@ -26569,7 +26672,7 @@
                 <a:ea typeface="Courier New" pitchFamily="34" charset="-122"/>
                 <a:cs typeface="Courier New" pitchFamily="34" charset="-120"/>
               </a:rPr>
-              <a:t>Reality check: real kernel (tc/netem)</a:t>
+              <a:t>How it was tested</a:t>
             </a:r>
             <a:endParaRPr lang="en-US" sz="3000" dirty="0"/>
           </a:p>
@@ -26608,7 +26711,244 @@
                 <a:ea typeface="Courier New" pitchFamily="34" charset="-122"/>
                 <a:cs typeface="Courier New" pitchFamily="34" charset="-120"/>
               </a:rPr>
-              <a:t>32 / 38   Smart-RUDP</a:t>
+              <a:t>32 / 39   Smart-RUDP</a:t>
+            </a:r>
+            <a:endParaRPr lang="en-US" sz="1000" dirty="0"/>
+          </a:p>
+        </p:txBody>
+      </p:sp>
+      <p:sp>
+        <p:nvSpPr>
+          <p:cNvPr id="4" name="Text 2"/>
+          <p:cNvSpPr/>
+          <p:nvPr/>
+        </p:nvSpPr>
+        <p:spPr>
+          <a:xfrm>
+            <a:off x="548640" y="1371600"/>
+            <a:ext cx="11064240" cy="4572000"/>
+          </a:xfrm>
+          <a:prstGeom prst="rect">
+            <a:avLst/>
+          </a:prstGeom>
+          <a:noFill/>
+          <a:ln/>
+        </p:spPr>
+        <p:txBody>
+          <a:bodyPr wrap="square" lIns="0" tIns="0" rIns="0" bIns="0" rtlCol="0" anchor="t"/>
+          <a:lstStyle/>
+          <a:p>
+            <a:pPr marL="342900" indent="-342900">
+              <a:spcAft>
+                <a:spcPts val="800"/>
+              </a:spcAft>
+              <a:buSzPct val="100000"/>
+              <a:buChar char="•"/>
+            </a:pPr>
+            <a:r>
+              <a:rPr lang="en-US" sz="1800" dirty="0">
+                <a:solidFill>
+                  <a:srgbClr val="E6EDF3"/>
+                </a:solidFill>
+                <a:latin typeface="Calibri" pitchFamily="34" charset="0"/>
+                <a:ea typeface="Calibri" pitchFamily="34" charset="-122"/>
+                <a:cs typeface="Calibri" pitchFamily="34" charset="-120"/>
+              </a:rPr>
+              <a:t>Correctness: unit, end-to-end, handshake, file-integrity, chat and simulator tests (make test); packet parser fuzzed under AddressSanitizer and UBSan (make fuzz)</a:t>
+            </a:r>
+            <a:endParaRPr lang="en-US" sz="1800" dirty="0"/>
+          </a:p>
+          <a:p>
+            <a:pPr marL="342900" indent="-342900">
+              <a:spcAft>
+                <a:spcPts val="800"/>
+              </a:spcAft>
+              <a:buSzPct val="100000"/>
+              <a:buChar char="•"/>
+            </a:pPr>
+            <a:r>
+              <a:rPr lang="en-US" sz="1800" dirty="0">
+                <a:solidFill>
+                  <a:srgbClr val="E6EDF3"/>
+                </a:solidFill>
+                <a:latin typeface="Calibri" pitchFamily="34" charset="0"/>
+                <a:ea typeface="Calibri" pitchFamily="34" charset="-122"/>
+                <a:cs typeface="Calibri" pitchFamily="34" charset="-120"/>
+              </a:rPr>
+              <a:t>Speed: virtual time, same C sender, checked against the real clock in 15 of 15 cells; paired seeds, 95% intervals, tuning seeds kept apart from test seeds</a:t>
+            </a:r>
+            <a:endParaRPr lang="en-US" sz="1800" dirty="0"/>
+          </a:p>
+          <a:p>
+            <a:pPr marL="342900" indent="-342900">
+              <a:spcAft>
+                <a:spcPts val="800"/>
+              </a:spcAft>
+              <a:buSzPct val="100000"/>
+              <a:buChar char="•"/>
+            </a:pPr>
+            <a:r>
+              <a:rPr lang="en-US" sz="1800" dirty="0">
+                <a:solidFill>
+                  <a:srgbClr val="E6EDF3"/>
+                </a:solidFill>
+                <a:latin typeface="Calibri" pitchFamily="34" charset="0"/>
+                <a:ea typeface="Calibri" pitchFamily="34" charset="-122"/>
+                <a:cs typeface="Calibri" pitchFamily="34" charset="-120"/>
+              </a:rPr>
+              <a:t>Realism, in four steps: emulation in the client, a separate impairment proxy on real sockets, Linux kernel netem, and two laptops over the internet</a:t>
+            </a:r>
+            <a:endParaRPr lang="en-US" sz="1800" dirty="0"/>
+          </a:p>
+          <a:p>
+            <a:pPr marL="342900" indent="-342900">
+              <a:spcAft>
+                <a:spcPts val="800"/>
+              </a:spcAft>
+              <a:buSzPct val="100000"/>
+              <a:buChar char="•"/>
+            </a:pPr>
+            <a:r>
+              <a:rPr lang="en-US" sz="1800" dirty="0">
+                <a:solidFill>
+                  <a:srgbClr val="E6EDF3"/>
+                </a:solidFill>
+                <a:latin typeface="Calibri" pitchFamily="34" charset="0"/>
+                <a:ea typeface="Calibri" pitchFamily="34" charset="-122"/>
+                <a:cs typeface="Calibri" pitchFamily="34" charset="-120"/>
+              </a:rPr>
+              <a:t>Every result in the report has the command that produced it (docs/RUNNING_ALL_TESTS.md)</a:t>
+            </a:r>
+            <a:endParaRPr lang="en-US" sz="1800" dirty="0"/>
+          </a:p>
+          <a:p>
+            <a:pPr marL="342900" indent="-342900">
+              <a:spcAft>
+                <a:spcPts val="800"/>
+              </a:spcAft>
+              <a:buSzPct val="100000"/>
+              <a:buChar char="•"/>
+            </a:pPr>
+            <a:r>
+              <a:rPr lang="en-US" sz="1800" dirty="0">
+                <a:solidFill>
+                  <a:srgbClr val="E6EDF3"/>
+                </a:solidFill>
+                <a:latin typeface="Calibri" pitchFamily="34" charset="0"/>
+                <a:ea typeface="Calibri" pitchFamily="34" charset="-122"/>
+                <a:cs typeface="Calibri" pitchFamily="34" charset="-120"/>
+              </a:rPr>
+              <a:t>We also record our own mistakes: untuned baselines, unequal payloads and synthetic 40-byte packets were each caught, fixed and re-run</a:t>
+            </a:r>
+            <a:endParaRPr lang="en-US" sz="1800" dirty="0"/>
+          </a:p>
+        </p:txBody>
+      </p:sp>
+    </p:spTree>
+  </p:cSld>
+  <p:clrMapOvr>
+    <a:masterClrMapping/>
+  </p:clrMapOvr>
+</p:sld>
+</file>
+
+<file path=ppt/slides/slide33.xml><?xml version="1.0" encoding="utf-8"?>
+<p:sld xmlns:a="http://schemas.openxmlformats.org/drawingml/2006/main" xmlns:r="http://schemas.openxmlformats.org/officeDocument/2006/relationships" xmlns:p="http://schemas.openxmlformats.org/presentationml/2006/main">
+  <p:cSld name="Slide 33">
+    <p:bg>
+      <p:bgPr>
+        <a:solidFill>
+          <a:srgbClr val="0B0F14"/>
+        </a:solidFill>
+      </p:bgPr>
+    </p:bg>
+    <p:spTree>
+      <p:nvGrpSpPr>
+        <p:cNvPr id="1" name=""/>
+        <p:cNvGrpSpPr/>
+        <p:nvPr/>
+      </p:nvGrpSpPr>
+      <p:grpSpPr>
+        <a:xfrm>
+          <a:off x="0" y="0"/>
+          <a:ext cx="0" cy="0"/>
+          <a:chOff x="0" y="0"/>
+          <a:chExt cx="0" cy="0"/>
+        </a:xfrm>
+      </p:grpSpPr>
+      <p:sp>
+        <p:nvSpPr>
+          <p:cNvPr id="2" name="Text 0"/>
+          <p:cNvSpPr/>
+          <p:nvPr/>
+        </p:nvSpPr>
+        <p:spPr>
+          <a:xfrm>
+            <a:off x="548640" y="320040"/>
+            <a:ext cx="11064240" cy="731520"/>
+          </a:xfrm>
+          <a:prstGeom prst="rect">
+            <a:avLst/>
+          </a:prstGeom>
+          <a:noFill/>
+          <a:ln/>
+        </p:spPr>
+        <p:txBody>
+          <a:bodyPr wrap="square" lIns="0" tIns="0" rIns="0" bIns="0" rtlCol="0" anchor="ctr"/>
+          <a:lstStyle/>
+          <a:p>
+            <a:pPr indent="0" marL="0">
+              <a:buNone/>
+            </a:pPr>
+            <a:r>
+              <a:rPr lang="en-US" sz="3000" b="1" dirty="0">
+                <a:solidFill>
+                  <a:srgbClr val="39FF88"/>
+                </a:solidFill>
+                <a:latin typeface="Courier New" pitchFamily="34" charset="0"/>
+                <a:ea typeface="Courier New" pitchFamily="34" charset="-122"/>
+                <a:cs typeface="Courier New" pitchFamily="34" charset="-120"/>
+              </a:rPr>
+              <a:t>Reality check: real kernel (tc/netem)</a:t>
+            </a:r>
+            <a:endParaRPr lang="en-US" sz="3000" dirty="0"/>
+          </a:p>
+        </p:txBody>
+      </p:sp>
+      <p:sp>
+        <p:nvSpPr>
+          <p:cNvPr id="3" name="Text 1"/>
+          <p:cNvSpPr/>
+          <p:nvPr/>
+        </p:nvSpPr>
+        <p:spPr>
+          <a:xfrm>
+            <a:off x="9418320" y="6446520"/>
+            <a:ext cx="2377440" cy="274320"/>
+          </a:xfrm>
+          <a:prstGeom prst="rect">
+            <a:avLst/>
+          </a:prstGeom>
+          <a:noFill/>
+          <a:ln/>
+        </p:spPr>
+        <p:txBody>
+          <a:bodyPr wrap="square" lIns="0" tIns="0" rIns="0" bIns="0" rtlCol="0" anchor="ctr"/>
+          <a:lstStyle/>
+          <a:p>
+            <a:pPr algn="r" indent="0" marL="0">
+              <a:buNone/>
+            </a:pPr>
+            <a:r>
+              <a:rPr lang="en-US" sz="1000" dirty="0">
+                <a:solidFill>
+                  <a:srgbClr val="8B98A5"/>
+                </a:solidFill>
+                <a:latin typeface="Courier New" pitchFamily="34" charset="0"/>
+                <a:ea typeface="Courier New" pitchFamily="34" charset="-122"/>
+                <a:cs typeface="Courier New" pitchFamily="34" charset="-120"/>
+              </a:rPr>
+              <a:t>33 / 39   Smart-RUDP</a:t>
             </a:r>
             <a:endParaRPr lang="en-US" sz="1000" dirty="0"/>
           </a:p>
@@ -26616,7 +26956,7 @@
       </p:sp>
       <p:graphicFrame>
         <p:nvGraphicFramePr>
-          <p:cNvPr id="33" name="Table 0"/>
+          <p:cNvPr id="34" name="Table 0"/>
           <p:cNvGraphicFramePr>
             <a:graphicFrameLocks noGrp="1"/>
           </p:cNvGraphicFramePr>
@@ -28492,9 +28832,9 @@
 </p:sld>
 </file>
 
-<file path=ppt/slides/slide33.xml><?xml version="1.0" encoding="utf-8"?>
+<file path=ppt/slides/slide34.xml><?xml version="1.0" encoding="utf-8"?>
 <p:sld xmlns:a="http://schemas.openxmlformats.org/drawingml/2006/main" xmlns:r="http://schemas.openxmlformats.org/officeDocument/2006/relationships" xmlns:p="http://schemas.openxmlformats.org/presentationml/2006/main">
-  <p:cSld name="Slide 33">
+  <p:cSld name="Slide 34">
     <p:bg>
       <p:bgPr>
         <a:solidFill>
@@ -28588,7 +28928,7 @@
                 <a:ea typeface="Courier New" pitchFamily="34" charset="-122"/>
                 <a:cs typeface="Courier New" pitchFamily="34" charset="-120"/>
               </a:rPr>
-              <a:t>33 / 38   Smart-RUDP</a:t>
+              <a:t>34 / 39   Smart-RUDP</a:t>
             </a:r>
             <a:endParaRPr lang="en-US" sz="1000" dirty="0"/>
           </a:p>
@@ -28596,7 +28936,7 @@
       </p:sp>
       <p:graphicFrame>
         <p:nvGraphicFramePr>
-          <p:cNvPr id="34" name="Table 0"/>
+          <p:cNvPr id="35" name="Table 0"/>
           <p:cNvGraphicFramePr>
             <a:graphicFrameLocks noGrp="1"/>
           </p:cNvGraphicFramePr>
@@ -31135,9 +31475,9 @@
 </p:sld>
 </file>
 
-<file path=ppt/slides/slide34.xml><?xml version="1.0" encoding="utf-8"?>
+<file path=ppt/slides/slide35.xml><?xml version="1.0" encoding="utf-8"?>
 <p:sld xmlns:a="http://schemas.openxmlformats.org/drawingml/2006/main" xmlns:r="http://schemas.openxmlformats.org/officeDocument/2006/relationships" xmlns:p="http://schemas.openxmlformats.org/presentationml/2006/main">
-  <p:cSld name="Slide 34">
+  <p:cSld name="Slide 35">
     <p:bg>
       <p:bgPr>
         <a:solidFill>
@@ -31231,7 +31571,7 @@
                 <a:ea typeface="Courier New" pitchFamily="34" charset="-122"/>
                 <a:cs typeface="Courier New" pitchFamily="34" charset="-120"/>
               </a:rPr>
-              <a:t>34 / 38   Smart-RUDP</a:t>
+              <a:t>35 / 39   Smart-RUDP</a:t>
             </a:r>
             <a:endParaRPr lang="en-US" sz="1000" dirty="0"/>
           </a:p>
@@ -31239,7 +31579,7 @@
       </p:sp>
       <p:graphicFrame>
         <p:nvGraphicFramePr>
-          <p:cNvPr id="35" name="Table 0"/>
+          <p:cNvPr id="36" name="Table 0"/>
           <p:cNvGraphicFramePr>
             <a:graphicFrameLocks noGrp="1"/>
           </p:cNvGraphicFramePr>
@@ -32226,9 +32566,9 @@
 </p:sld>
 </file>
 
-<file path=ppt/slides/slide35.xml><?xml version="1.0" encoding="utf-8"?>
+<file path=ppt/slides/slide36.xml><?xml version="1.0" encoding="utf-8"?>
 <p:sld xmlns:a="http://schemas.openxmlformats.org/drawingml/2006/main" xmlns:r="http://schemas.openxmlformats.org/officeDocument/2006/relationships" xmlns:p="http://schemas.openxmlformats.org/presentationml/2006/main">
-  <p:cSld name="Slide 35">
+  <p:cSld name="Slide 36">
     <p:bg>
       <p:bgPr>
         <a:solidFill>
@@ -32322,7 +32662,7 @@
                 <a:ea typeface="Courier New" pitchFamily="34" charset="-122"/>
                 <a:cs typeface="Courier New" pitchFamily="34" charset="-120"/>
               </a:rPr>
-              <a:t>35 / 38   Smart-RUDP</a:t>
+              <a:t>36 / 39   Smart-RUDP</a:t>
             </a:r>
             <a:endParaRPr lang="en-US" sz="1000" dirty="0"/>
           </a:p>
@@ -32330,7 +32670,7 @@
       </p:sp>
       <p:graphicFrame>
         <p:nvGraphicFramePr>
-          <p:cNvPr id="36" name="Table 0"/>
+          <p:cNvPr id="37" name="Table 0"/>
           <p:cNvGraphicFramePr>
             <a:graphicFrameLocks noGrp="1"/>
           </p:cNvGraphicFramePr>
@@ -34957,9 +35297,9 @@
 </p:sld>
 </file>
 
-<file path=ppt/slides/slide36.xml><?xml version="1.0" encoding="utf-8"?>
+<file path=ppt/slides/slide37.xml><?xml version="1.0" encoding="utf-8"?>
 <p:sld xmlns:a="http://schemas.openxmlformats.org/drawingml/2006/main" xmlns:r="http://schemas.openxmlformats.org/officeDocument/2006/relationships" xmlns:p="http://schemas.openxmlformats.org/presentationml/2006/main">
-  <p:cSld name="Slide 36">
+  <p:cSld name="Slide 37">
     <p:bg>
       <p:bgPr>
         <a:solidFill>
@@ -35053,7 +35393,7 @@
                 <a:ea typeface="Courier New" pitchFamily="34" charset="-122"/>
                 <a:cs typeface="Courier New" pitchFamily="34" charset="-120"/>
               </a:rPr>
-              <a:t>36 / 38   Smart-RUDP</a:t>
+              <a:t>37 / 39   Smart-RUDP</a:t>
             </a:r>
             <a:endParaRPr lang="en-US" sz="1000" dirty="0"/>
           </a:p>
@@ -35380,9 +35720,9 @@
 </p:sld>
 </file>
 
-<file path=ppt/slides/slide37.xml><?xml version="1.0" encoding="utf-8"?>
+<file path=ppt/slides/slide38.xml><?xml version="1.0" encoding="utf-8"?>
 <p:sld xmlns:a="http://schemas.openxmlformats.org/drawingml/2006/main" xmlns:r="http://schemas.openxmlformats.org/officeDocument/2006/relationships" xmlns:p="http://schemas.openxmlformats.org/presentationml/2006/main">
-  <p:cSld name="Slide 37">
+  <p:cSld name="Slide 38">
     <p:bg>
       <p:bgPr>
         <a:solidFill>
@@ -35529,9 +35869,9 @@
 </p:sld>
 </file>
 
-<file path=ppt/slides/slide38.xml><?xml version="1.0" encoding="utf-8"?>
+<file path=ppt/slides/slide39.xml><?xml version="1.0" encoding="utf-8"?>
 <p:sld xmlns:a="http://schemas.openxmlformats.org/drawingml/2006/main" xmlns:r="http://schemas.openxmlformats.org/officeDocument/2006/relationships" xmlns:p="http://schemas.openxmlformats.org/presentationml/2006/main">
-  <p:cSld name="Slide 38">
+  <p:cSld name="Slide 39">
     <p:bg>
       <p:bgPr>
         <a:solidFill>
@@ -35865,7 +36205,7 @@
                 <a:ea typeface="Courier New" pitchFamily="34" charset="-122"/>
                 <a:cs typeface="Courier New" pitchFamily="34" charset="-120"/>
               </a:rPr>
-              <a:t>4 / 38   Smart-RUDP</a:t>
+              <a:t>4 / 39   Smart-RUDP</a:t>
             </a:r>
             <a:endParaRPr lang="en-US" sz="1000" dirty="0"/>
           </a:p>
@@ -36426,7 +36766,7 @@
                 <a:ea typeface="Courier New" pitchFamily="34" charset="-122"/>
                 <a:cs typeface="Courier New" pitchFamily="34" charset="-120"/>
               </a:rPr>
-              <a:t>5 / 38   Smart-RUDP</a:t>
+              <a:t>5 / 39   Smart-RUDP</a:t>
             </a:r>
             <a:endParaRPr lang="en-US" sz="1000" dirty="0"/>
           </a:p>
@@ -37865,7 +38205,7 @@
                 <a:ea typeface="Courier New" pitchFamily="34" charset="-122"/>
                 <a:cs typeface="Courier New" pitchFamily="34" charset="-120"/>
               </a:rPr>
-              <a:t>6 / 38   Smart-RUDP</a:t>
+              <a:t>6 / 39   Smart-RUDP</a:t>
             </a:r>
             <a:endParaRPr lang="en-US" sz="1000" dirty="0"/>
           </a:p>
@@ -39100,7 +39440,7 @@
                 <a:ea typeface="Courier New" pitchFamily="34" charset="-122"/>
                 <a:cs typeface="Courier New" pitchFamily="34" charset="-120"/>
               </a:rPr>
-              <a:t>7 / 38   Smart-RUDP</a:t>
+              <a:t>7 / 39   Smart-RUDP</a:t>
             </a:r>
             <a:endParaRPr lang="en-US" sz="1000" dirty="0"/>
           </a:p>
@@ -39543,7 +39883,7 @@
                 <a:ea typeface="Courier New" pitchFamily="34" charset="-122"/>
                 <a:cs typeface="Courier New" pitchFamily="34" charset="-120"/>
               </a:rPr>
-              <a:t>8 / 38   Smart-RUDP</a:t>
+              <a:t>8 / 39   Smart-RUDP</a:t>
             </a:r>
             <a:endParaRPr lang="en-US" sz="1000" dirty="0"/>
           </a:p>
@@ -39843,7 +40183,7 @@
                 <a:ea typeface="Courier New" pitchFamily="34" charset="-122"/>
                 <a:cs typeface="Courier New" pitchFamily="34" charset="-120"/>
               </a:rPr>
-              <a:t>9 / 38   Smart-RUDP</a:t>
+              <a:t>9 / 39   Smart-RUDP</a:t>
             </a:r>
             <a:endParaRPr lang="en-US" sz="1000" dirty="0"/>
           </a:p>
